--- a/pitch/out/tessera-buyer-seller-guide.pptx
+++ b/pitch/out/tessera-buyer-seller-guide.pptx
@@ -21,9 +21,10 @@
     <p:sldId id="269" r:id="rId15"/>
     <p:sldId id="270" r:id="rId16"/>
     <p:sldId id="271" r:id="rId17"/>
+    <p:sldId id="272" r:id="rId18"/>
   </p:sldIdLst>
   <p:notesMasterIdLst>
-    <p:notesMasterId r:id="rId18"/>
+    <p:notesMasterId r:id="rId19"/>
   </p:notesMasterIdLst>
   <p:sldSz cx="12192000" cy="6858000"/>
   <p:notesSz cx="6858000" cy="12192000"/>
@@ -122,14 +123,14 @@
   <p:extLst>
     <p:ext uri="{521415D9-36F7-43E2-AB2F-B90AF26B5E84}">
       <p14:sectionLst xmlns:p14="http://schemas.microsoft.com/office/powerpoint/2010/main">
-        <p14:section name="gm" id="{8ac5b53f-8dc1-5771-f96b-59f79088cde5}">
+        <p14:section name="gm" id="{c80d1526-efac-038a-a605-90881c955a61}">
           <p14:sldIdLst>
             <p14:sldId id="256"/>
             <p14:sldId id="257"/>
             <p14:sldId id="258"/>
           </p14:sldIdLst>
         </p14:section>
-        <p14:section name="Setup" id="{3fce0690-7437-b3c6-a1eb-915035d3b49f}">
+        <p14:section name="Setup" id="{f86a4469-8c85-c60d-b9d4-5b1f261461d0}">
           <p14:sldIdLst>
             <p14:sldId id="259"/>
             <p14:sldId id="260"/>
@@ -137,25 +138,26 @@
             <p14:sldId id="262"/>
           </p14:sldIdLst>
         </p14:section>
-        <p14:section name="Buy" id="{04f352f6-04fb-e61f-222f-9601455152af}">
+        <p14:section name="Buy" id="{58e36741-b18b-a8a7-a6db-c90c34d8fdc7}">
           <p14:sldIdLst>
             <p14:sldId id="263"/>
             <p14:sldId id="264"/>
             <p14:sldId id="265"/>
+            <p14:sldId id="266"/>
           </p14:sldIdLst>
         </p14:section>
-        <p14:section name="Watch" id="{6786eed4-3af1-a648-8e9d-0dd171ade12e}">
+        <p14:section name="Watch" id="{1eddc479-04e8-a43c-1554-c28c07d0deef}">
           <p14:sldIdLst>
-            <p14:sldId id="266"/>
             <p14:sldId id="267"/>
             <p14:sldId id="268"/>
+            <p14:sldId id="269"/>
           </p14:sldIdLst>
         </p14:section>
-        <p14:section name="Extras" id="{f12b054d-bfd0-3839-dbcf-81fefc72ef88}">
+        <p14:section name="Extras" id="{10c9c98d-ec8f-6346-9624-a920ebd8303f}">
           <p14:sldIdLst>
-            <p14:sldId id="269"/>
             <p14:sldId id="270"/>
             <p14:sldId id="271"/>
+            <p14:sldId id="272"/>
           </p14:sldIdLst>
         </p14:section>
       </p14:sectionLst>
@@ -650,7 +652,7 @@
           <a:p>
             <a:r>
               <a:rPr lang="en-US" dirty="0"/>
-              <a:t>Every purchase is an Order account that owns a vault. AwaitingPayment is the quote. Funded means the USDC is in the vault; the program checks the vault balance rather than trusting anyone. Delivered means the merchant committed the hash of what it delivered, and the hold starts. Released pays the merchant minus a 1% protocol fee. If the merchant never delivers, anyone can refund the buyer after the deadline; during the hold, the buyer can dispute and the arbiter decides. The hold is the longer of the two parties' tier holds: on devnet two minutes for New, 45 seconds for Building, 10 seconds for Established and none for two Trusted parties.</a:t>
+              <a:t>Before buying, an agent can ask Tessera who to buy from. Start the API with npm run api, then run tessera find with what you need, or call GET /v1/merchants on the API. MCP clients get the same thing as the find_merchants tool. Each row is a merchant ranked by its on-chain score: settled sales, distinct buyers, tenure, penalties, and reviews weighted by the money behind them. A review needs a real settled order, so faking a top rank costs real sales. Every row also says whether paying would settle instantly or go through escrow, and roughly how many seconds from paying to settled, so an agent can choose by quality, speed or price in one call. The output shown is abridged; your numbers come from devnet. If nothing matches, the answer is status no_match with an empty list. A merchant with a bad record is still listed, lower, and routed to escrow.</a:t>
             </a:r>
             <a:endParaRPr lang="en-US" dirty="0"/>
           </a:p>
@@ -738,7 +740,7 @@
           <a:p>
             <a:r>
               <a:rPr lang="en-US" dirty="0"/>
-              <a:t>Where to see transactions live. The live network page draws every agent, pair and open escrow from devnet and has a feed of the latest orders; each row opens the order in Solana Explorer. The agents page lists every credit file; each one shows the score stored on-chain next to the score recomputed in your browser. In Solana Explorer, with the cluster set to devnet, the program address lists every Tessera transaction, and any wallet or order address can be searched. Solscan works too with ?cluster=devnet. The buy command prints direct links.</a:t>
+              <a:t>Every purchase is an Order account that owns a vault. AwaitingPayment is the quote. Funded means the USDC is in the vault; the program checks the vault balance rather than trusting anyone. Delivered means the merchant committed the hash of what it delivered, and the hold starts. Released pays the merchant minus a 1% protocol fee. If the merchant never delivers, anyone can refund the buyer after the deadline; during the hold, the buyer can dispute and the arbiter decides. The hold is the longer of the two parties' tier holds: on devnet two minutes for New, 45 seconds for Building, 10 seconds for Established and none for two Trusted parties.</a:t>
             </a:r>
             <a:endParaRPr lang="en-US" dirty="0"/>
           </a:p>
@@ -826,7 +828,7 @@
           <a:p>
             <a:r>
               <a:rPr lang="en-US" dirty="0"/>
-              <a:t>Run one purchase and watch it from both sides. The seller's terminal logs each release by the crank, with the hold it waited, and each dispute the arbiter resolves. The shop's wallet receives the USDC, the treasury its 1% fee, and the shop's credit file updates. The buyer sees the checkout steps, or the buy command's output, with links to the order and the settlement transaction, the hash check, and the review. The buyer's own credit file appears on the agents page after its first settled order.</a:t>
+              <a:t>Where to see transactions live. The live network page draws every agent, pair and open escrow from devnet and has a feed of the latest orders; each row opens the order in Solana Explorer. The agents page lists every credit file; each one shows the score stored on-chain next to the score recomputed in your browser. In Solana Explorer, with the cluster set to devnet, the program address lists every Tessera transaction, and any wallet or order address can be searched. Solscan works too with ?cluster=devnet. The buy command prints direct links.</a:t>
             </a:r>
             <a:endParaRPr lang="en-US" dirty="0"/>
           </a:p>
@@ -914,7 +916,7 @@
           <a:p>
             <a:r>
               <a:rPr lang="en-US" dirty="0"/>
-              <a:t>For a busy network, run npm run swarm next to the seller. Six honest buyer agents trade every period, one minute on devnet, for 45 periods. Later three attacks join: a merchant that wash-trades with three sock puppets, a merchant that takes orders and never delivers, and a buyer that disputes deliveries that were fine. On the live network page you can watch honest agents climb tiers while the attackers stall or get penalised. Don't run it while recording a video; the public devnet RPC rate-limits.</a:t>
+              <a:t>Run one purchase and watch it from both sides. The seller's terminal logs each release by the crank, with the hold it waited, and each dispute the arbiter resolves. The shop's wallet receives the USDC, the treasury its 1% fee, and the shop's credit file updates. The buyer sees the checkout steps, or the buy command's output, with links to the order and the settlement transaction, the hash check, and the review. The buyer's own credit file appears on the agents page after its first settled order.</a:t>
             </a:r>
             <a:endParaRPr lang="en-US" dirty="0"/>
           </a:p>
@@ -1002,7 +1004,7 @@
           <a:p>
             <a:r>
               <a:rPr lang="en-US" dirty="0"/>
-              <a:t>To have the buyer on a different computer, the seller exposes port 4020 over HTTPS with any tunnel, such as cloudflared or ngrok, and restarts the agents with AGENT_HOST set to the tunnel URL, so agent cards and x402 resources name the public address. The buyer clones the project, runs npm install, and starts the website with VITE_AGENTS_URL pointing at the tunnel. The default allowed origin is localhost:5173, which is where the buyer's own site runs. Agent buyers load keypairs from .keys, so in this demo they run on the seller's machine. On Windows PowerShell, set environment variables with $env: before running the command.</a:t>
+              <a:t>For a busy network, run npm run swarm next to the seller. Six honest buyer agents trade every period, one minute on devnet, for 45 periods. Later three attacks join: a merchant that wash-trades with three sock puppets, a merchant that takes orders and never delivers, and a buyer that disputes deliveries that were fine. On the live network page you can watch honest agents climb tiers while the attackers stall or get penalised. Don't run it while recording a video; the public devnet RPC rate-limits.</a:t>
             </a:r>
             <a:endParaRPr lang="en-US" dirty="0"/>
           </a:p>
@@ -1090,7 +1092,7 @@
           <a:p>
             <a:r>
               <a:rPr lang="en-US" dirty="0"/>
-              <a:t>Common problems. The public devnet RPC rate-limits hard; the site retries, or you can give it your own RPC. If the market cannot reach the seller, start the agents or fix VITE_AGENTS_URL. The site faucet only has what the shops have earned, so on a new setup make a few purchases first. Wallets must be on devnet. The setup script stops if the CLI wallet runs out; top up and run it again. Disputes are resolved by the arbiter key recorded in the on-chain config, so if your keys are new and you are not the config authority, disputes stay open.</a:t>
+              <a:t>To have the buyer on a different computer, the seller exposes port 4020 over HTTPS with any tunnel, such as cloudflared or ngrok, and restarts the agents with AGENT_HOST set to the tunnel URL, so agent cards and x402 resources name the public address. The buyer clones the project, runs npm install, and starts the website with VITE_AGENTS_URL pointing at the tunnel. The default allowed origin is localhost:5173, which is where the buyer's own site runs. Agent buyers load keypairs from .keys, so in this demo they run on the seller's machine. On Windows PowerShell, set environment variables with $env: before running the command.</a:t>
             </a:r>
             <a:endParaRPr lang="en-US" dirty="0"/>
           </a:p>
@@ -1178,7 +1180,7 @@
           <a:p>
             <a:r>
               <a:rPr lang="en-US" dirty="0"/>
-              <a:t>Every command from this deck, in order. The seller runs setup once, then the agents. Anyone runs the website. Buyer bots run npm run buy or the swarm.</a:t>
+              <a:t>Common problems. The public devnet RPC rate-limits hard; the site retries, or you can give it your own RPC. If the market cannot reach the seller, start the agents or fix VITE_AGENTS_URL. The site faucet only has what the shops have earned, so on a new setup make a few purchases first. Wallets must be on devnet. The setup script stops if the CLI wallet runs out; top up and run it again. Disputes are resolved by the arbiter key recorded in the on-chain config, so if your keys are new and you are not the config authority, disputes stay open.</a:t>
             </a:r>
             <a:endParaRPr lang="en-US" dirty="0"/>
           </a:p>
@@ -1202,6 +1204,94 @@
             <a:fld id="{F7021451-1387-4CA6-816F-3879F97B5CBC}" type="slidenum">
               <a:rPr lang="en-US"/>
               <a:t>16</a:t>
+            </a:fld>
+            <a:endParaRPr lang="en-US"/>
+          </a:p>
+        </p:txBody>
+      </p:sp>
+    </p:spTree>
+    <p:extLst>
+      <p:ext uri="{BB962C8B-B14F-4D97-AF65-F5344CB8AC3E}">
+        <p14:creationId xmlns:p14="http://schemas.microsoft.com/office/powerpoint/2010/main" val="1024086991"/>
+      </p:ext>
+    </p:extLst>
+  </p:cSld>
+  <p:clrMapOvr>
+    <a:masterClrMapping/>
+  </p:clrMapOvr>
+</p:notes>
+</file>
+
+<file path=ppt/notesSlides/notesSlide17.xml><?xml version="1.0" encoding="utf-8"?>
+<p:notes xmlns:a="http://schemas.openxmlformats.org/drawingml/2006/main" xmlns:r="http://schemas.openxmlformats.org/officeDocument/2006/relationships" xmlns:p="http://schemas.openxmlformats.org/presentationml/2006/main">
+  <p:cSld>
+    <p:spTree>
+      <p:nvGrpSpPr>
+        <p:cNvPr id="1" name=""/>
+        <p:cNvGrpSpPr/>
+        <p:nvPr/>
+      </p:nvGrpSpPr>
+      <p:grpSpPr>
+        <a:xfrm>
+          <a:off x="0" y="0"/>
+          <a:ext cx="0" cy="0"/>
+          <a:chOff x="0" y="0"/>
+          <a:chExt cx="0" cy="0"/>
+        </a:xfrm>
+      </p:grpSpPr>
+      <p:sp>
+        <p:nvSpPr>
+          <p:cNvPr id="2" name="Slide Image Placeholder 1"/>
+          <p:cNvSpPr>
+            <a:spLocks noGrp="1" noRot="1" noChangeAspect="1"/>
+          </p:cNvSpPr>
+          <p:nvPr>
+            <p:ph type="sldImg"/>
+          </p:nvPr>
+        </p:nvSpPr>
+        <p:spPr/>
+      </p:sp>
+      <p:sp>
+        <p:nvSpPr>
+          <p:cNvPr id="3" name="Notes Placeholder 2"/>
+          <p:cNvSpPr>
+            <a:spLocks noGrp="1"/>
+          </p:cNvSpPr>
+          <p:nvPr>
+            <p:ph type="body" idx="1"/>
+          </p:nvPr>
+        </p:nvSpPr>
+        <p:spPr/>
+        <p:txBody>
+          <a:bodyPr/>
+          <a:lstStyle/>
+          <a:p>
+            <a:r>
+              <a:rPr lang="en-US" dirty="0"/>
+              <a:t>Every command from this deck, in order. The seller runs setup once, then the agents. Anyone runs the website. Buyer bots run npm run buy or the swarm.</a:t>
+            </a:r>
+            <a:endParaRPr lang="en-US" dirty="0"/>
+          </a:p>
+        </p:txBody>
+      </p:sp>
+      <p:sp>
+        <p:nvSpPr>
+          <p:cNvPr id="4" name="Slide Number Placeholder 3"/>
+          <p:cNvSpPr>
+            <a:spLocks noGrp="1"/>
+          </p:cNvSpPr>
+          <p:nvPr>
+            <p:ph type="sldNum" sz="quarter" idx="10"/>
+          </p:nvPr>
+        </p:nvSpPr>
+        <p:spPr/>
+        <p:txBody>
+          <a:bodyPr/>
+          <a:lstStyle/>
+          <a:p>
+            <a:fld id="{F7021451-1387-4CA6-816F-3879F97B5CBC}" type="slidenum">
+              <a:rPr lang="en-US"/>
+              <a:t>17</a:t>
             </a:fld>
             <a:endParaRPr lang="en-US"/>
           </a:p>
@@ -3046,7 +3136,7 @@
                 <a:ea typeface="+mj-lt" pitchFamily="34" charset="-122"/>
                 <a:cs typeface="+mj-lt" pitchFamily="34" charset="-120"/>
               </a:rPr>
-              <a:t>// UNDER THE HOOD</a:t>
+              <a:t>// STEP 4C · LET YOUR AGENT PICK THE SELLER</a:t>
             </a:r>
             <a:endParaRPr lang="en-US" sz="1200" dirty="0"/>
           </a:p>
@@ -3084,7 +3174,7 @@
                   <a:schemeClr val="bg1"/>
                 </a:solidFill>
               </a:rPr>
-              <a:t>where your money goes ⏳</a:t>
+              <a:t>DYOR, but automated 🔎</a:t>
             </a:r>
             <a:endParaRPr lang="en-US" sz="3600" dirty="0"/>
           </a:p>
@@ -3092,893 +3182,22 @@
       </p:sp>
       <p:sp>
         <p:nvSpPr>
-          <p:cNvPr id="4" name="State 1"/>
+          <p:cNvPr id="4" name="Terminal"/>
           <p:cNvSpPr/>
           <p:nvPr/>
         </p:nvSpPr>
         <p:spPr>
           <a:xfrm>
-            <a:off x="548640" y="1645920"/>
-            <a:ext cx="2560320" cy="640080"/>
+            <a:off x="548640" y="1600200"/>
+            <a:ext cx="11091672" cy="2743200"/>
           </a:xfrm>
           <a:prstGeom prst="roundRect">
             <a:avLst>
-              <a:gd name="adj" fmla="val 50000"/>
+              <a:gd name="adj" fmla="val 4667"/>
             </a:avLst>
           </a:prstGeom>
           <a:solidFill>
-            <a:schemeClr val="accent5">
-              <a:alpha val="25000"/>
-            </a:schemeClr>
-          </a:solidFill>
-          <a:ln w="19050">
-            <a:solidFill>
-              <a:schemeClr val="accent5"/>
-            </a:solidFill>
-            <a:prstDash val="solid"/>
-          </a:ln>
-        </p:spPr>
-      </p:sp>
-      <p:sp>
-        <p:nvSpPr>
-          <p:cNvPr id="5" name="State 1 label"/>
-          <p:cNvSpPr txBox="1"/>
-          <p:nvPr/>
-        </p:nvSpPr>
-        <p:spPr>
-          <a:xfrm>
-            <a:off x="548640" y="1645920"/>
-            <a:ext cx="2560320" cy="640080"/>
-          </a:xfrm>
-          <a:prstGeom prst="rect">
-            <a:avLst/>
-          </a:prstGeom>
-          <a:noFill/>
-          <a:ln/>
-        </p:spPr>
-        <p:txBody>
-          <a:bodyPr wrap="square" lIns="0" tIns="0" rIns="0" bIns="0" rtlCol="0" anchor="ctr"/>
-          <a:lstStyle/>
-          <a:p>
-            <a:pPr algn="ctr" indent="0" marL="0">
-              <a:buNone/>
-            </a:pPr>
-            <a:r>
-              <a:rPr lang="en-US" sz="1600" b="1" dirty="0">
-                <a:solidFill>
-                  <a:schemeClr val="bg1"/>
-                </a:solidFill>
-                <a:latin typeface="+mj-lt" pitchFamily="34" charset="0"/>
-                <a:ea typeface="+mj-lt" pitchFamily="34" charset="-122"/>
-                <a:cs typeface="+mj-lt" pitchFamily="34" charset="-120"/>
-              </a:rPr>
-              <a:t>AwaitingPayment</a:t>
-            </a:r>
-            <a:endParaRPr lang="en-US" sz="1600" dirty="0"/>
-          </a:p>
-        </p:txBody>
-      </p:sp>
-      <p:sp>
-        <p:nvSpPr>
-          <p:cNvPr id="6" name="State 1 body"/>
-          <p:cNvSpPr txBox="1"/>
-          <p:nvPr/>
-        </p:nvSpPr>
-        <p:spPr>
-          <a:xfrm>
-            <a:off x="594360" y="2423160"/>
-            <a:ext cx="2514600" cy="914400"/>
-          </a:xfrm>
-          <a:prstGeom prst="rect">
-            <a:avLst/>
-          </a:prstGeom>
-          <a:noFill/>
-          <a:ln/>
-        </p:spPr>
-        <p:txBody>
-          <a:bodyPr wrap="square" lIns="0" tIns="0" rIns="0" bIns="0" rtlCol="0" anchor="t"/>
-          <a:lstStyle/>
-          <a:p>
-            <a:pPr indent="0" marL="0">
-              <a:buNone/>
-            </a:pPr>
-            <a:r>
-              <a:rPr lang="en-US" sz="1500" dirty="0">
-                <a:solidFill>
-                  <a:schemeClr val="bg2"/>
-                </a:solidFill>
-              </a:rPr>
-              <a:t>The seller opens the order: that’s the 402 quote.</a:t>
-            </a:r>
-            <a:endParaRPr lang="en-US" sz="1500" dirty="0"/>
-          </a:p>
-        </p:txBody>
-      </p:sp>
-      <p:sp>
-        <p:nvSpPr>
-          <p:cNvPr id="7" name="State arrow 1"/>
-          <p:cNvSpPr/>
-          <p:nvPr/>
-        </p:nvSpPr>
-        <p:spPr>
-          <a:xfrm>
-            <a:off x="3136392" y="1965960"/>
-            <a:ext cx="228600" cy="0"/>
-          </a:xfrm>
-          <a:prstGeom prst="line">
-            <a:avLst/>
-          </a:prstGeom>
-          <a:noFill/>
-          <a:ln w="25400">
-            <a:solidFill>
-              <a:schemeClr val="accent1"/>
-            </a:solidFill>
-            <a:prstDash val="solid"/>
-            <a:tailEnd type="triangle"/>
-          </a:ln>
-        </p:spPr>
-      </p:sp>
-      <p:sp>
-        <p:nvSpPr>
-          <p:cNvPr id="8" name="State 2"/>
-          <p:cNvSpPr/>
-          <p:nvPr/>
-        </p:nvSpPr>
-        <p:spPr>
-          <a:xfrm>
-            <a:off x="3392424" y="1645920"/>
-            <a:ext cx="2560320" cy="640080"/>
-          </a:xfrm>
-          <a:prstGeom prst="roundRect">
-            <a:avLst>
-              <a:gd name="adj" fmla="val 50000"/>
-            </a:avLst>
-          </a:prstGeom>
-          <a:solidFill>
-            <a:schemeClr val="accent3">
-              <a:alpha val="25000"/>
-            </a:schemeClr>
-          </a:solidFill>
-          <a:ln w="19050">
-            <a:solidFill>
-              <a:schemeClr val="accent3"/>
-            </a:solidFill>
-            <a:prstDash val="solid"/>
-          </a:ln>
-        </p:spPr>
-      </p:sp>
-      <p:sp>
-        <p:nvSpPr>
-          <p:cNvPr id="9" name="State 2 label"/>
-          <p:cNvSpPr txBox="1"/>
-          <p:nvPr/>
-        </p:nvSpPr>
-        <p:spPr>
-          <a:xfrm>
-            <a:off x="3392424" y="1645920"/>
-            <a:ext cx="2560320" cy="640080"/>
-          </a:xfrm>
-          <a:prstGeom prst="rect">
-            <a:avLst/>
-          </a:prstGeom>
-          <a:noFill/>
-          <a:ln/>
-        </p:spPr>
-        <p:txBody>
-          <a:bodyPr wrap="square" lIns="0" tIns="0" rIns="0" bIns="0" rtlCol="0" anchor="ctr"/>
-          <a:lstStyle/>
-          <a:p>
-            <a:pPr algn="ctr" indent="0" marL="0">
-              <a:buNone/>
-            </a:pPr>
-            <a:r>
-              <a:rPr lang="en-US" sz="1600" b="1" dirty="0">
-                <a:solidFill>
-                  <a:schemeClr val="bg1"/>
-                </a:solidFill>
-                <a:latin typeface="+mj-lt" pitchFamily="34" charset="0"/>
-                <a:ea typeface="+mj-lt" pitchFamily="34" charset="-122"/>
-                <a:cs typeface="+mj-lt" pitchFamily="34" charset="-120"/>
-              </a:rPr>
-              <a:t>Funded</a:t>
-            </a:r>
-            <a:endParaRPr lang="en-US" sz="1600" dirty="0"/>
-          </a:p>
-        </p:txBody>
-      </p:sp>
-      <p:sp>
-        <p:nvSpPr>
-          <p:cNvPr id="10" name="State 2 body"/>
-          <p:cNvSpPr txBox="1"/>
-          <p:nvPr/>
-        </p:nvSpPr>
-        <p:spPr>
-          <a:xfrm>
-            <a:off x="3438144" y="2423160"/>
-            <a:ext cx="2514600" cy="914400"/>
-          </a:xfrm>
-          <a:prstGeom prst="rect">
-            <a:avLst/>
-          </a:prstGeom>
-          <a:noFill/>
-          <a:ln/>
-        </p:spPr>
-        <p:txBody>
-          <a:bodyPr wrap="square" lIns="0" tIns="0" rIns="0" bIns="0" rtlCol="0" anchor="t"/>
-          <a:lstStyle/>
-          <a:p>
-            <a:pPr indent="0" marL="0">
-              <a:buNone/>
-            </a:pPr>
-            <a:r>
-              <a:rPr lang="en-US" sz="1500" dirty="0">
-                <a:solidFill>
-                  <a:schemeClr val="bg2"/>
-                </a:solidFill>
-              </a:rPr>
-              <a:t>USDC lands in the vault. confirm_funded reads the balance itself.</a:t>
-            </a:r>
-            <a:endParaRPr lang="en-US" sz="1500" dirty="0"/>
-          </a:p>
-        </p:txBody>
-      </p:sp>
-      <p:sp>
-        <p:nvSpPr>
-          <p:cNvPr id="11" name="State arrow 2"/>
-          <p:cNvSpPr/>
-          <p:nvPr/>
-        </p:nvSpPr>
-        <p:spPr>
-          <a:xfrm>
-            <a:off x="5980176" y="1965960"/>
-            <a:ext cx="228600" cy="0"/>
-          </a:xfrm>
-          <a:prstGeom prst="line">
-            <a:avLst/>
-          </a:prstGeom>
-          <a:noFill/>
-          <a:ln w="25400">
-            <a:solidFill>
-              <a:schemeClr val="accent1"/>
-            </a:solidFill>
-            <a:prstDash val="solid"/>
-            <a:tailEnd type="triangle"/>
-          </a:ln>
-        </p:spPr>
-      </p:sp>
-      <p:sp>
-        <p:nvSpPr>
-          <p:cNvPr id="12" name="State 3"/>
-          <p:cNvSpPr/>
-          <p:nvPr/>
-        </p:nvSpPr>
-        <p:spPr>
-          <a:xfrm>
-            <a:off x="6236208" y="1645920"/>
-            <a:ext cx="2560320" cy="640080"/>
-          </a:xfrm>
-          <a:prstGeom prst="roundRect">
-            <a:avLst>
-              <a:gd name="adj" fmla="val 50000"/>
-            </a:avLst>
-          </a:prstGeom>
-          <a:solidFill>
-            <a:schemeClr val="accent4">
-              <a:alpha val="25000"/>
-            </a:schemeClr>
-          </a:solidFill>
-          <a:ln w="19050">
-            <a:solidFill>
-              <a:schemeClr val="accent4"/>
-            </a:solidFill>
-            <a:prstDash val="solid"/>
-          </a:ln>
-        </p:spPr>
-      </p:sp>
-      <p:sp>
-        <p:nvSpPr>
-          <p:cNvPr id="13" name="State 3 label"/>
-          <p:cNvSpPr txBox="1"/>
-          <p:nvPr/>
-        </p:nvSpPr>
-        <p:spPr>
-          <a:xfrm>
-            <a:off x="6236208" y="1645920"/>
-            <a:ext cx="2560320" cy="640080"/>
-          </a:xfrm>
-          <a:prstGeom prst="rect">
-            <a:avLst/>
-          </a:prstGeom>
-          <a:noFill/>
-          <a:ln/>
-        </p:spPr>
-        <p:txBody>
-          <a:bodyPr wrap="square" lIns="0" tIns="0" rIns="0" bIns="0" rtlCol="0" anchor="ctr"/>
-          <a:lstStyle/>
-          <a:p>
-            <a:pPr algn="ctr" indent="0" marL="0">
-              <a:buNone/>
-            </a:pPr>
-            <a:r>
-              <a:rPr lang="en-US" sz="1600" b="1" dirty="0">
-                <a:solidFill>
-                  <a:schemeClr val="bg1"/>
-                </a:solidFill>
-                <a:latin typeface="+mj-lt" pitchFamily="34" charset="0"/>
-                <a:ea typeface="+mj-lt" pitchFamily="34" charset="-122"/>
-                <a:cs typeface="+mj-lt" pitchFamily="34" charset="-120"/>
-              </a:rPr>
-              <a:t>Delivered</a:t>
-            </a:r>
-            <a:endParaRPr lang="en-US" sz="1600" dirty="0"/>
-          </a:p>
-        </p:txBody>
-      </p:sp>
-      <p:sp>
-        <p:nvSpPr>
-          <p:cNvPr id="14" name="State 3 body"/>
-          <p:cNvSpPr txBox="1"/>
-          <p:nvPr/>
-        </p:nvSpPr>
-        <p:spPr>
-          <a:xfrm>
-            <a:off x="6281928" y="2423160"/>
-            <a:ext cx="2514600" cy="914400"/>
-          </a:xfrm>
-          <a:prstGeom prst="rect">
-            <a:avLst/>
-          </a:prstGeom>
-          <a:noFill/>
-          <a:ln/>
-        </p:spPr>
-        <p:txBody>
-          <a:bodyPr wrap="square" lIns="0" tIns="0" rIns="0" bIns="0" rtlCol="0" anchor="t"/>
-          <a:lstStyle/>
-          <a:p>
-            <a:pPr indent="0" marL="0">
-              <a:buNone/>
-            </a:pPr>
-            <a:r>
-              <a:rPr lang="en-US" sz="1500" dirty="0">
-                <a:solidFill>
-                  <a:schemeClr val="bg2"/>
-                </a:solidFill>
-              </a:rPr>
-              <a:t>The seller commits the sha256 of what it sent. The hold starts.</a:t>
-            </a:r>
-            <a:endParaRPr lang="en-US" sz="1500" dirty="0"/>
-          </a:p>
-        </p:txBody>
-      </p:sp>
-      <p:sp>
-        <p:nvSpPr>
-          <p:cNvPr id="15" name="State arrow 3"/>
-          <p:cNvSpPr/>
-          <p:nvPr/>
-        </p:nvSpPr>
-        <p:spPr>
-          <a:xfrm>
-            <a:off x="8823960" y="1965960"/>
-            <a:ext cx="228600" cy="0"/>
-          </a:xfrm>
-          <a:prstGeom prst="line">
-            <a:avLst/>
-          </a:prstGeom>
-          <a:noFill/>
-          <a:ln w="25400">
-            <a:solidFill>
-              <a:schemeClr val="accent1"/>
-            </a:solidFill>
-            <a:prstDash val="solid"/>
-            <a:tailEnd type="triangle"/>
-          </a:ln>
-        </p:spPr>
-      </p:sp>
-      <p:sp>
-        <p:nvSpPr>
-          <p:cNvPr id="16" name="State 4"/>
-          <p:cNvSpPr/>
-          <p:nvPr/>
-        </p:nvSpPr>
-        <p:spPr>
-          <a:xfrm>
-            <a:off x="9079992" y="1645920"/>
-            <a:ext cx="2560320" cy="640080"/>
-          </a:xfrm>
-          <a:prstGeom prst="roundRect">
-            <a:avLst>
-              <a:gd name="adj" fmla="val 50000"/>
-            </a:avLst>
-          </a:prstGeom>
-          <a:solidFill>
-            <a:schemeClr val="accent1">
-              <a:alpha val="25000"/>
-            </a:schemeClr>
-          </a:solidFill>
-          <a:ln w="19050">
-            <a:solidFill>
-              <a:schemeClr val="accent1"/>
-            </a:solidFill>
-            <a:prstDash val="solid"/>
-          </a:ln>
-        </p:spPr>
-      </p:sp>
-      <p:sp>
-        <p:nvSpPr>
-          <p:cNvPr id="17" name="State 4 label"/>
-          <p:cNvSpPr txBox="1"/>
-          <p:nvPr/>
-        </p:nvSpPr>
-        <p:spPr>
-          <a:xfrm>
-            <a:off x="9079992" y="1645920"/>
-            <a:ext cx="2560320" cy="640080"/>
-          </a:xfrm>
-          <a:prstGeom prst="rect">
-            <a:avLst/>
-          </a:prstGeom>
-          <a:noFill/>
-          <a:ln/>
-        </p:spPr>
-        <p:txBody>
-          <a:bodyPr wrap="square" lIns="0" tIns="0" rIns="0" bIns="0" rtlCol="0" anchor="ctr"/>
-          <a:lstStyle/>
-          <a:p>
-            <a:pPr algn="ctr" indent="0" marL="0">
-              <a:buNone/>
-            </a:pPr>
-            <a:r>
-              <a:rPr lang="en-US" sz="1600" b="1" dirty="0">
-                <a:solidFill>
-                  <a:schemeClr val="bg1"/>
-                </a:solidFill>
-                <a:latin typeface="+mj-lt" pitchFamily="34" charset="0"/>
-                <a:ea typeface="+mj-lt" pitchFamily="34" charset="-122"/>
-                <a:cs typeface="+mj-lt" pitchFamily="34" charset="-120"/>
-              </a:rPr>
-              <a:t>Released</a:t>
-            </a:r>
-            <a:endParaRPr lang="en-US" sz="1600" dirty="0"/>
-          </a:p>
-        </p:txBody>
-      </p:sp>
-      <p:sp>
-        <p:nvSpPr>
-          <p:cNvPr id="18" name="State 4 body"/>
-          <p:cNvSpPr txBox="1"/>
-          <p:nvPr/>
-        </p:nvSpPr>
-        <p:spPr>
-          <a:xfrm>
-            <a:off x="9125712" y="2423160"/>
-            <a:ext cx="2514600" cy="914400"/>
-          </a:xfrm>
-          <a:prstGeom prst="rect">
-            <a:avLst/>
-          </a:prstGeom>
-          <a:noFill/>
-          <a:ln/>
-        </p:spPr>
-        <p:txBody>
-          <a:bodyPr wrap="square" lIns="0" tIns="0" rIns="0" bIns="0" rtlCol="0" anchor="t"/>
-          <a:lstStyle/>
-          <a:p>
-            <a:pPr indent="0" marL="0">
-              <a:buNone/>
-            </a:pPr>
-            <a:r>
-              <a:rPr lang="en-US" sz="1500" dirty="0">
-                <a:solidFill>
-                  <a:schemeClr val="bg2"/>
-                </a:solidFill>
-              </a:rPr>
-              <a:t>After the hold, or when you release early: seller paid, 1% fee.</a:t>
-            </a:r>
-            <a:endParaRPr lang="en-US" sz="1500" dirty="0"/>
-          </a:p>
-        </p:txBody>
-      </p:sp>
-      <p:sp>
-        <p:nvSpPr>
-          <p:cNvPr id="19" name="Branch 1"/>
-          <p:cNvSpPr/>
-          <p:nvPr/>
-        </p:nvSpPr>
-        <p:spPr>
-          <a:xfrm>
-            <a:off x="3392424" y="3429000"/>
-            <a:ext cx="2560320" cy="457200"/>
-          </a:xfrm>
-          <a:prstGeom prst="roundRect">
-            <a:avLst>
-              <a:gd name="adj" fmla="val 50000"/>
-            </a:avLst>
-          </a:prstGeom>
-          <a:solidFill>
-            <a:schemeClr val="accent6">
-              <a:alpha val="18000"/>
-            </a:schemeClr>
-          </a:solidFill>
-          <a:ln w="12700">
-            <a:solidFill>
-              <a:schemeClr val="accent6"/>
-            </a:solidFill>
-            <a:prstDash val="solid"/>
-          </a:ln>
-        </p:spPr>
-      </p:sp>
-      <p:sp>
-        <p:nvSpPr>
-          <p:cNvPr id="20" name="Branch 1 label"/>
-          <p:cNvSpPr txBox="1"/>
-          <p:nvPr/>
-        </p:nvSpPr>
-        <p:spPr>
-          <a:xfrm>
-            <a:off x="3392424" y="3429000"/>
-            <a:ext cx="2560320" cy="457200"/>
-          </a:xfrm>
-          <a:prstGeom prst="rect">
-            <a:avLst/>
-          </a:prstGeom>
-          <a:noFill/>
-          <a:ln/>
-        </p:spPr>
-        <p:txBody>
-          <a:bodyPr wrap="square" lIns="0" tIns="0" rIns="0" bIns="0" rtlCol="0" anchor="ctr"/>
-          <a:lstStyle/>
-          <a:p>
-            <a:pPr algn="ctr" indent="0" marL="0">
-              <a:buNone/>
-            </a:pPr>
-            <a:r>
-              <a:rPr lang="en-US" sz="1400" dirty="0">
-                <a:solidFill>
-                  <a:schemeClr val="bg1"/>
-                </a:solidFill>
-              </a:rPr>
-              <a:t>↳ refund if the seller ghosts</a:t>
-            </a:r>
-            <a:endParaRPr lang="en-US" sz="1400" dirty="0"/>
-          </a:p>
-        </p:txBody>
-      </p:sp>
-      <p:sp>
-        <p:nvSpPr>
-          <p:cNvPr id="21" name="Branch 2"/>
-          <p:cNvSpPr/>
-          <p:nvPr/>
-        </p:nvSpPr>
-        <p:spPr>
-          <a:xfrm>
-            <a:off x="6236208" y="3429000"/>
-            <a:ext cx="2560320" cy="457200"/>
-          </a:xfrm>
-          <a:prstGeom prst="roundRect">
-            <a:avLst>
-              <a:gd name="adj" fmla="val 50000"/>
-            </a:avLst>
-          </a:prstGeom>
-          <a:solidFill>
-            <a:schemeClr val="accent6">
-              <a:alpha val="18000"/>
-            </a:schemeClr>
-          </a:solidFill>
-          <a:ln w="12700">
-            <a:solidFill>
-              <a:schemeClr val="accent6"/>
-            </a:solidFill>
-            <a:prstDash val="solid"/>
-          </a:ln>
-        </p:spPr>
-      </p:sp>
-      <p:sp>
-        <p:nvSpPr>
-          <p:cNvPr id="22" name="Branch 2 label"/>
-          <p:cNvSpPr txBox="1"/>
-          <p:nvPr/>
-        </p:nvSpPr>
-        <p:spPr>
-          <a:xfrm>
-            <a:off x="6236208" y="3429000"/>
-            <a:ext cx="2560320" cy="457200"/>
-          </a:xfrm>
-          <a:prstGeom prst="rect">
-            <a:avLst/>
-          </a:prstGeom>
-          <a:noFill/>
-          <a:ln/>
-        </p:spPr>
-        <p:txBody>
-          <a:bodyPr wrap="square" lIns="0" tIns="0" rIns="0" bIns="0" rtlCol="0" anchor="ctr"/>
-          <a:lstStyle/>
-          <a:p>
-            <a:pPr algn="ctr" indent="0" marL="0">
-              <a:buNone/>
-            </a:pPr>
-            <a:r>
-              <a:rPr lang="en-US" sz="1400" dirty="0">
-                <a:solidFill>
-                  <a:schemeClr val="bg1"/>
-                </a:solidFill>
-              </a:rPr>
-              <a:t>↳ dispute → the arbiter rules</a:t>
-            </a:r>
-            <a:endParaRPr lang="en-US" sz="1400" dirty="0"/>
-          </a:p>
-        </p:txBody>
-      </p:sp>
-      <p:sp>
-        <p:nvSpPr>
-          <p:cNvPr id="23" name="Hold label"/>
-          <p:cNvSpPr txBox="1"/>
-          <p:nvPr/>
-        </p:nvSpPr>
-        <p:spPr>
-          <a:xfrm>
-            <a:off x="548640" y="4206240"/>
-            <a:ext cx="11064240" cy="365760"/>
-          </a:xfrm>
-          <a:prstGeom prst="rect">
-            <a:avLst/>
-          </a:prstGeom>
-          <a:noFill/>
-          <a:ln/>
-        </p:spPr>
-        <p:txBody>
-          <a:bodyPr wrap="square" lIns="0" tIns="0" rIns="0" bIns="0" rtlCol="0" anchor="t"/>
-          <a:lstStyle/>
-          <a:p>
-            <a:pPr indent="0" marL="0">
-              <a:buNone/>
-            </a:pPr>
-            <a:r>
-              <a:rPr lang="en-US" sz="1400" b="1" dirty="0">
-                <a:solidFill>
-                  <a:schemeClr val="bg2"/>
-                </a:solidFill>
-                <a:latin typeface="+mj-lt" pitchFamily="34" charset="0"/>
-                <a:ea typeface="+mj-lt" pitchFamily="34" charset="-122"/>
-                <a:cs typeface="+mj-lt" pitchFamily="34" charset="-120"/>
-              </a:rPr>
-              <a:t>HOLD = the longer of the two parties’ tiers (devnet clock)</a:t>
-            </a:r>
-            <a:endParaRPr lang="en-US" sz="1400" dirty="0"/>
-          </a:p>
-        </p:txBody>
-      </p:sp>
-      <p:sp>
-        <p:nvSpPr>
-          <p:cNvPr id="24" name="Tier 1"/>
-          <p:cNvSpPr/>
-          <p:nvPr/>
-        </p:nvSpPr>
-        <p:spPr>
-          <a:xfrm>
-            <a:off x="548640" y="4645152"/>
-            <a:ext cx="2560320" cy="914400"/>
-          </a:xfrm>
-          <a:prstGeom prst="roundRect">
-            <a:avLst>
-              <a:gd name="adj" fmla="val 14000"/>
-            </a:avLst>
-          </a:prstGeom>
-          <a:solidFill>
-            <a:schemeClr val="bg2">
-              <a:alpha val="16000"/>
-            </a:schemeClr>
-          </a:solidFill>
-          <a:ln w="12700">
-            <a:solidFill>
-              <a:schemeClr val="bg2">
-                <a:alpha val="45000"/>
-              </a:schemeClr>
-            </a:solidFill>
-            <a:prstDash val="solid"/>
-          </a:ln>
-        </p:spPr>
-      </p:sp>
-      <p:sp>
-        <p:nvSpPr>
-          <p:cNvPr id="25" name="Tier 1 name"/>
-          <p:cNvSpPr txBox="1"/>
-          <p:nvPr/>
-        </p:nvSpPr>
-        <p:spPr>
-          <a:xfrm>
-            <a:off x="731520" y="4709160"/>
-            <a:ext cx="2286000" cy="365760"/>
-          </a:xfrm>
-          <a:prstGeom prst="rect">
-            <a:avLst/>
-          </a:prstGeom>
-          <a:noFill/>
-          <a:ln/>
-        </p:spPr>
-        <p:txBody>
-          <a:bodyPr wrap="square" lIns="0" tIns="0" rIns="0" bIns="0" rtlCol="0" anchor="t"/>
-          <a:lstStyle/>
-          <a:p>
-            <a:pPr indent="0" marL="0">
-              <a:buNone/>
-            </a:pPr>
-            <a:r>
-              <a:rPr lang="en-US" sz="1500" dirty="0">
-                <a:solidFill>
-                  <a:schemeClr val="bg1"/>
-                </a:solidFill>
-              </a:rPr>
-              <a:t>New</a:t>
-            </a:r>
-            <a:endParaRPr lang="en-US" sz="1500" dirty="0"/>
-          </a:p>
-        </p:txBody>
-      </p:sp>
-      <p:sp>
-        <p:nvSpPr>
-          <p:cNvPr id="26" name="Tier 1 hold"/>
-          <p:cNvSpPr txBox="1"/>
-          <p:nvPr/>
-        </p:nvSpPr>
-        <p:spPr>
-          <a:xfrm>
-            <a:off x="731520" y="5029200"/>
-            <a:ext cx="2286000" cy="457200"/>
-          </a:xfrm>
-          <a:prstGeom prst="rect">
-            <a:avLst/>
-          </a:prstGeom>
-          <a:noFill/>
-          <a:ln/>
-        </p:spPr>
-        <p:txBody>
-          <a:bodyPr wrap="square" lIns="0" tIns="0" rIns="0" bIns="0" rtlCol="0" anchor="t"/>
-          <a:lstStyle/>
-          <a:p>
-            <a:pPr indent="0" marL="0">
-              <a:buNone/>
-            </a:pPr>
-            <a:r>
-              <a:rPr lang="en-US" sz="2400" b="1" dirty="0">
-                <a:solidFill>
-                  <a:schemeClr val="bg2"/>
-                </a:solidFill>
-                <a:latin typeface="+mj-lt" pitchFamily="34" charset="0"/>
-                <a:ea typeface="+mj-lt" pitchFamily="34" charset="-122"/>
-                <a:cs typeface="+mj-lt" pitchFamily="34" charset="-120"/>
-              </a:rPr>
-              <a:t>2 min</a:t>
-            </a:r>
-            <a:endParaRPr lang="en-US" sz="2400" dirty="0"/>
-          </a:p>
-        </p:txBody>
-      </p:sp>
-      <p:sp>
-        <p:nvSpPr>
-          <p:cNvPr id="27" name="Tier 2"/>
-          <p:cNvSpPr/>
-          <p:nvPr/>
-        </p:nvSpPr>
-        <p:spPr>
-          <a:xfrm>
-            <a:off x="3392424" y="4645152"/>
-            <a:ext cx="2560320" cy="914400"/>
-          </a:xfrm>
-          <a:prstGeom prst="roundRect">
-            <a:avLst>
-              <a:gd name="adj" fmla="val 14000"/>
-            </a:avLst>
-          </a:prstGeom>
-          <a:solidFill>
-            <a:schemeClr val="accent5">
-              <a:alpha val="16000"/>
-            </a:schemeClr>
-          </a:solidFill>
-          <a:ln w="12700">
-            <a:solidFill>
-              <a:schemeClr val="accent5">
-                <a:alpha val="45000"/>
-              </a:schemeClr>
-            </a:solidFill>
-            <a:prstDash val="solid"/>
-          </a:ln>
-        </p:spPr>
-      </p:sp>
-      <p:sp>
-        <p:nvSpPr>
-          <p:cNvPr id="28" name="Tier 2 name"/>
-          <p:cNvSpPr txBox="1"/>
-          <p:nvPr/>
-        </p:nvSpPr>
-        <p:spPr>
-          <a:xfrm>
-            <a:off x="3575304" y="4709160"/>
-            <a:ext cx="2286000" cy="365760"/>
-          </a:xfrm>
-          <a:prstGeom prst="rect">
-            <a:avLst/>
-          </a:prstGeom>
-          <a:noFill/>
-          <a:ln/>
-        </p:spPr>
-        <p:txBody>
-          <a:bodyPr wrap="square" lIns="0" tIns="0" rIns="0" bIns="0" rtlCol="0" anchor="t"/>
-          <a:lstStyle/>
-          <a:p>
-            <a:pPr indent="0" marL="0">
-              <a:buNone/>
-            </a:pPr>
-            <a:r>
-              <a:rPr lang="en-US" sz="1500" dirty="0">
-                <a:solidFill>
-                  <a:schemeClr val="bg1"/>
-                </a:solidFill>
-              </a:rPr>
-              <a:t>Building</a:t>
-            </a:r>
-            <a:endParaRPr lang="en-US" sz="1500" dirty="0"/>
-          </a:p>
-        </p:txBody>
-      </p:sp>
-      <p:sp>
-        <p:nvSpPr>
-          <p:cNvPr id="29" name="Tier 2 hold"/>
-          <p:cNvSpPr txBox="1"/>
-          <p:nvPr/>
-        </p:nvSpPr>
-        <p:spPr>
-          <a:xfrm>
-            <a:off x="3575304" y="5029200"/>
-            <a:ext cx="2286000" cy="457200"/>
-          </a:xfrm>
-          <a:prstGeom prst="rect">
-            <a:avLst/>
-          </a:prstGeom>
-          <a:noFill/>
-          <a:ln/>
-        </p:spPr>
-        <p:txBody>
-          <a:bodyPr wrap="square" lIns="0" tIns="0" rIns="0" bIns="0" rtlCol="0" anchor="t"/>
-          <a:lstStyle/>
-          <a:p>
-            <a:pPr indent="0" marL="0">
-              <a:buNone/>
-            </a:pPr>
-            <a:r>
-              <a:rPr lang="en-US" sz="2400" b="1" dirty="0">
-                <a:solidFill>
-                  <a:schemeClr val="accent5"/>
-                </a:solidFill>
-                <a:latin typeface="+mj-lt" pitchFamily="34" charset="0"/>
-                <a:ea typeface="+mj-lt" pitchFamily="34" charset="-122"/>
-                <a:cs typeface="+mj-lt" pitchFamily="34" charset="-120"/>
-              </a:rPr>
-              <a:t>45 s</a:t>
-            </a:r>
-            <a:endParaRPr lang="en-US" sz="2400" dirty="0"/>
-          </a:p>
-        </p:txBody>
-      </p:sp>
-      <p:sp>
-        <p:nvSpPr>
-          <p:cNvPr id="30" name="Tier 3"/>
-          <p:cNvSpPr/>
-          <p:nvPr/>
-        </p:nvSpPr>
-        <p:spPr>
-          <a:xfrm>
-            <a:off x="6236208" y="4645152"/>
-            <a:ext cx="2560320" cy="914400"/>
-          </a:xfrm>
-          <a:prstGeom prst="roundRect">
-            <a:avLst>
-              <a:gd name="adj" fmla="val 14000"/>
-            </a:avLst>
-          </a:prstGeom>
-          <a:solidFill>
-            <a:schemeClr val="accent2">
-              <a:alpha val="16000"/>
-            </a:schemeClr>
+            <a:schemeClr val="tx2"/>
           </a:solidFill>
           <a:ln w="12700">
             <a:solidFill>
@@ -3988,107 +3207,313 @@
             </a:solidFill>
             <a:prstDash val="solid"/>
           </a:ln>
-        </p:spPr>
-      </p:sp>
-      <p:sp>
-        <p:nvSpPr>
-          <p:cNvPr id="31" name="Tier 3 name"/>
+          <a:effectLst>
+            <a:outerShdw sx="100000" sy="100000" kx="0" ky="0" algn="bl" rotWithShape="0" blurRad="228600" dist="50800" dir="5400000">
+              <a:srgbClr val="9945FF">
+                <a:alpha val="35000"/>
+              </a:srgbClr>
+            </a:outerShdw>
+          </a:effectLst>
+        </p:spPr>
+      </p:sp>
+      <p:sp>
+        <p:nvSpPr>
+          <p:cNvPr id="5" name="Terminal dot 1"/>
+          <p:cNvSpPr/>
+          <p:nvPr/>
+        </p:nvSpPr>
+        <p:spPr>
+          <a:xfrm>
+            <a:off x="749808" y="1755648"/>
+            <a:ext cx="118872" cy="118872"/>
+          </a:xfrm>
+          <a:prstGeom prst="ellipse">
+            <a:avLst/>
+          </a:prstGeom>
+          <a:solidFill>
+            <a:schemeClr val="accent6"/>
+          </a:solidFill>
+          <a:ln w="12700">
+            <a:solidFill>
+              <a:schemeClr val="accent6"/>
+            </a:solidFill>
+            <a:prstDash val="solid"/>
+          </a:ln>
+        </p:spPr>
+      </p:sp>
+      <p:sp>
+        <p:nvSpPr>
+          <p:cNvPr id="6" name="Terminal dot 2"/>
+          <p:cNvSpPr/>
+          <p:nvPr/>
+        </p:nvSpPr>
+        <p:spPr>
+          <a:xfrm>
+            <a:off x="950976" y="1755648"/>
+            <a:ext cx="118872" cy="118872"/>
+          </a:xfrm>
+          <a:prstGeom prst="ellipse">
+            <a:avLst/>
+          </a:prstGeom>
+          <a:solidFill>
+            <a:schemeClr val="accent3"/>
+          </a:solidFill>
+          <a:ln w="12700">
+            <a:solidFill>
+              <a:schemeClr val="accent3"/>
+            </a:solidFill>
+            <a:prstDash val="solid"/>
+          </a:ln>
+        </p:spPr>
+      </p:sp>
+      <p:sp>
+        <p:nvSpPr>
+          <p:cNvPr id="7" name="Terminal dot 3"/>
+          <p:cNvSpPr/>
+          <p:nvPr/>
+        </p:nvSpPr>
+        <p:spPr>
+          <a:xfrm>
+            <a:off x="1152144" y="1755648"/>
+            <a:ext cx="118872" cy="118872"/>
+          </a:xfrm>
+          <a:prstGeom prst="ellipse">
+            <a:avLst/>
+          </a:prstGeom>
+          <a:solidFill>
+            <a:schemeClr val="accent1"/>
+          </a:solidFill>
+          <a:ln w="12700">
+            <a:solidFill>
+              <a:schemeClr val="accent1"/>
+            </a:solidFill>
+            <a:prstDash val="solid"/>
+          </a:ln>
+        </p:spPr>
+      </p:sp>
+      <p:sp>
+        <p:nvSpPr>
+          <p:cNvPr id="8" name="Terminal label"/>
           <p:cNvSpPr txBox="1"/>
           <p:nvPr/>
         </p:nvSpPr>
         <p:spPr>
           <a:xfrm>
-            <a:off x="6419088" y="4709160"/>
-            <a:ext cx="2286000" cy="365760"/>
-          </a:xfrm>
-          <a:prstGeom prst="rect">
-            <a:avLst/>
-          </a:prstGeom>
-          <a:noFill/>
-          <a:ln/>
-        </p:spPr>
-        <p:txBody>
-          <a:bodyPr wrap="square" lIns="0" tIns="0" rIns="0" bIns="0" rtlCol="0" anchor="t"/>
-          <a:lstStyle/>
-          <a:p>
-            <a:pPr indent="0" marL="0">
-              <a:buNone/>
-            </a:pPr>
-            <a:r>
-              <a:rPr lang="en-US" sz="1500" dirty="0">
-                <a:solidFill>
-                  <a:schemeClr val="bg1"/>
-                </a:solidFill>
-              </a:rPr>
-              <a:t>Established</a:t>
-            </a:r>
-            <a:endParaRPr lang="en-US" sz="1500" dirty="0"/>
-          </a:p>
-        </p:txBody>
-      </p:sp>
-      <p:sp>
-        <p:nvSpPr>
-          <p:cNvPr id="32" name="Tier 3 hold"/>
-          <p:cNvSpPr txBox="1"/>
-          <p:nvPr/>
-        </p:nvSpPr>
-        <p:spPr>
-          <a:xfrm>
-            <a:off x="6419088" y="5029200"/>
-            <a:ext cx="2286000" cy="457200"/>
-          </a:xfrm>
-          <a:prstGeom prst="rect">
-            <a:avLst/>
-          </a:prstGeom>
-          <a:noFill/>
-          <a:ln/>
-        </p:spPr>
-        <p:txBody>
-          <a:bodyPr wrap="square" lIns="0" tIns="0" rIns="0" bIns="0" rtlCol="0" anchor="t"/>
-          <a:lstStyle/>
-          <a:p>
-            <a:pPr indent="0" marL="0">
-              <a:buNone/>
-            </a:pPr>
-            <a:r>
-              <a:rPr lang="en-US" sz="2400" b="1" dirty="0">
-                <a:solidFill>
-                  <a:schemeClr val="accent2"/>
+            <a:off x="1417320" y="1682496"/>
+            <a:ext cx="9994392" cy="256032"/>
+          </a:xfrm>
+          <a:prstGeom prst="rect">
+            <a:avLst/>
+          </a:prstGeom>
+          <a:noFill/>
+          <a:ln/>
+        </p:spPr>
+        <p:txBody>
+          <a:bodyPr wrap="square" lIns="0" tIns="0" rIns="0" bIns="0" rtlCol="0" anchor="ctr"/>
+          <a:lstStyle/>
+          <a:p>
+            <a:pPr indent="0" marL="0">
+              <a:buNone/>
+            </a:pPr>
+            <a:r>
+              <a:rPr lang="en-US" sz="1000" dirty="0">
+                <a:solidFill>
+                  <a:schemeClr val="bg2"/>
                 </a:solidFill>
                 <a:latin typeface="+mj-lt" pitchFamily="34" charset="0"/>
                 <a:ea typeface="+mj-lt" pitchFamily="34" charset="-122"/>
                 <a:cs typeface="+mj-lt" pitchFamily="34" charset="-120"/>
               </a:rPr>
-              <a:t>10 s</a:t>
-            </a:r>
-            <a:endParaRPr lang="en-US" sz="2400" dirty="0"/>
-          </a:p>
-        </p:txBody>
-      </p:sp>
-      <p:sp>
-        <p:nvSpPr>
-          <p:cNvPr id="33" name="Tier 4"/>
+              <a:t>terminal 4 · the Tessera API (any buyer, any machine)</a:t>
+            </a:r>
+            <a:endParaRPr lang="en-US" sz="1000" dirty="0"/>
+          </a:p>
+        </p:txBody>
+      </p:sp>
+      <p:sp>
+        <p:nvSpPr>
+          <p:cNvPr id="9" name="Terminal text"/>
+          <p:cNvSpPr txBox="1"/>
+          <p:nvPr/>
+        </p:nvSpPr>
+        <p:spPr>
+          <a:xfrm>
+            <a:off x="822960" y="2039112"/>
+            <a:ext cx="10588752" cy="2194560"/>
+          </a:xfrm>
+          <a:prstGeom prst="rect">
+            <a:avLst/>
+          </a:prstGeom>
+          <a:noFill/>
+          <a:ln/>
+        </p:spPr>
+        <p:txBody>
+          <a:bodyPr wrap="square" lIns="0" tIns="0" rIns="0" bIns="0" rtlCol="0" anchor="t"/>
+          <a:lstStyle/>
+          <a:p>
+            <a:pPr indent="0" marL="0">
+              <a:lnSpc>
+                <a:spcPct val="115000"/>
+              </a:lnSpc>
+              <a:buNone/>
+            </a:pPr>
+            <a:r>
+              <a:rPr lang="en-US" sz="1400" b="1" dirty="0">
+                <a:solidFill>
+                  <a:schemeClr val="bg1"/>
+                </a:solidFill>
+                <a:latin typeface="+mj-lt" pitchFamily="34" charset="0"/>
+                <a:ea typeface="+mj-lt" pitchFamily="34" charset="-122"/>
+                <a:cs typeface="+mj-lt" pitchFamily="34" charset="-120"/>
+              </a:rPr>
+              <a:t>$ npm run api                 # → http://127.0.0.1:4030</a:t>
+            </a:r>
+            <a:endParaRPr lang="en-US" sz="1400" dirty="0"/>
+          </a:p>
+          <a:p>
+            <a:pPr indent="0" marL="0">
+              <a:lnSpc>
+                <a:spcPct val="115000"/>
+              </a:lnSpc>
+              <a:buNone/>
+            </a:pPr>
+            <a:r>
+              <a:rPr lang="en-US" sz="1400" dirty="0">
+                <a:solidFill>
+                  <a:schemeClr val="bg2"/>
+                </a:solidFill>
+                <a:latin typeface="+mj-lt" pitchFamily="34" charset="0"/>
+                <a:ea typeface="+mj-lt" pitchFamily="34" charset="-122"/>
+                <a:cs typeface="+mj-lt" pitchFamily="34" charset="-120"/>
+              </a:rPr>
+              <a:t># one call: who is best for this, what it costs, how fast it settles</a:t>
+            </a:r>
+            <a:endParaRPr lang="en-US" sz="1400" dirty="0"/>
+          </a:p>
+          <a:p>
+            <a:pPr indent="0" marL="0">
+              <a:lnSpc>
+                <a:spcPct val="115000"/>
+              </a:lnSpc>
+              <a:buNone/>
+            </a:pPr>
+            <a:r>
+              <a:rPr lang="en-US" sz="1400" b="1" dirty="0">
+                <a:solidFill>
+                  <a:schemeClr val="bg1"/>
+                </a:solidFill>
+                <a:latin typeface="+mj-lt" pitchFamily="34" charset="0"/>
+                <a:ea typeface="+mj-lt" pitchFamily="34" charset="-122"/>
+                <a:cs typeface="+mj-lt" pitchFamily="34" charset="-120"/>
+              </a:rPr>
+              <a:t>$ npm run tessera -- find text summary --sort fastest</a:t>
+            </a:r>
+            <a:endParaRPr lang="en-US" sz="1400" dirty="0"/>
+          </a:p>
+          <a:p>
+            <a:pPr indent="0" marL="0">
+              <a:lnSpc>
+                <a:spcPct val="115000"/>
+              </a:lnSpc>
+              <a:buNone/>
+            </a:pPr>
+            <a:r>
+              <a:rPr lang="en-US" sz="1400" dirty="0">
+                <a:solidFill>
+                  <a:schemeClr val="accent1"/>
+                </a:solidFill>
+                <a:latin typeface="+mj-lt" pitchFamily="34" charset="0"/>
+                <a:ea typeface="+mj-lt" pitchFamily="34" charset="-122"/>
+                <a:cs typeface="+mj-lt" pitchFamily="34" charset="-120"/>
+              </a:rPr>
+              <a:t> 1. BhQ7…6Rc  quill  Trusted 1000 ★4.83 (… reviews, 42 sales)</a:t>
+            </a:r>
+            <a:endParaRPr lang="en-US" sz="1400" dirty="0"/>
+          </a:p>
+          <a:p>
+            <a:pPr indent="0" marL="0">
+              <a:lnSpc>
+                <a:spcPct val="115000"/>
+              </a:lnSpc>
+              <a:buNone/>
+            </a:pPr>
+            <a:r>
+              <a:rPr lang="en-US" sz="1400" dirty="0">
+                <a:solidFill>
+                  <a:schemeClr val="accent1"/>
+                </a:solidFill>
+                <a:latin typeface="+mj-lt" pitchFamily="34" charset="0"/>
+                <a:ea typeface="+mj-lt" pitchFamily="34" charset="-122"/>
+                <a:cs typeface="+mj-lt" pitchFamily="34" charset="-120"/>
+              </a:rPr>
+              <a:t>    INSTANT ~… s to settled  summary 0.25 USDC</a:t>
+            </a:r>
+            <a:endParaRPr lang="en-US" sz="1400" dirty="0"/>
+          </a:p>
+          <a:p>
+            <a:pPr indent="0" marL="0">
+              <a:lnSpc>
+                <a:spcPct val="115000"/>
+              </a:lnSpc>
+              <a:buNone/>
+            </a:pPr>
+            <a:r>
+              <a:rPr lang="en-US" sz="1400" dirty="0">
+                <a:solidFill>
+                  <a:schemeClr val="bg2"/>
+                </a:solidFill>
+                <a:latin typeface="+mj-lt" pitchFamily="34" charset="0"/>
+                <a:ea typeface="+mj-lt" pitchFamily="34" charset="-122"/>
+                <a:cs typeface="+mj-lt" pitchFamily="34" charset="-120"/>
+              </a:rPr>
+              <a:t># same thing raw, for any agent: GET /v1/merchants?need=text%20summary</a:t>
+            </a:r>
+            <a:endParaRPr lang="en-US" sz="1400" dirty="0"/>
+          </a:p>
+          <a:p>
+            <a:pPr indent="0" marL="0">
+              <a:lnSpc>
+                <a:spcPct val="115000"/>
+              </a:lnSpc>
+              <a:buNone/>
+            </a:pPr>
+            <a:r>
+              <a:rPr lang="en-US" sz="1400" b="1" dirty="0">
+                <a:solidFill>
+                  <a:schemeClr val="bg1"/>
+                </a:solidFill>
+                <a:latin typeface="+mj-lt" pitchFamily="34" charset="0"/>
+                <a:ea typeface="+mj-lt" pitchFamily="34" charset="-122"/>
+                <a:cs typeface="+mj-lt" pitchFamily="34" charset="-120"/>
+              </a:rPr>
+              <a:t>$ curl -s "localhost:4030/v1/merchants?need=text%20summary&amp;sort=best&amp;limit=3"</a:t>
+            </a:r>
+            <a:endParaRPr lang="en-US" sz="1400" dirty="0"/>
+          </a:p>
+        </p:txBody>
+      </p:sp>
+      <p:sp>
+        <p:nvSpPr>
+          <p:cNvPr id="10" name="Find point 1"/>
           <p:cNvSpPr/>
           <p:nvPr/>
         </p:nvSpPr>
         <p:spPr>
           <a:xfrm>
-            <a:off x="9079992" y="4645152"/>
-            <a:ext cx="2560320" cy="914400"/>
+            <a:off x="548640" y="4526280"/>
+            <a:ext cx="3520440" cy="1600200"/>
           </a:xfrm>
           <a:prstGeom prst="roundRect">
             <a:avLst>
-              <a:gd name="adj" fmla="val 14000"/>
+              <a:gd name="adj" fmla="val 8000"/>
             </a:avLst>
           </a:prstGeom>
           <a:solidFill>
-            <a:schemeClr val="accent1">
-              <a:alpha val="16000"/>
-            </a:schemeClr>
+            <a:schemeClr val="tx2"/>
           </a:solidFill>
           <a:ln w="12700">
             <a:solidFill>
-              <a:schemeClr val="accent1">
+              <a:schemeClr val="accent2">
                 <a:alpha val="45000"/>
               </a:schemeClr>
             </a:solidFill>
@@ -4098,14 +3523,67 @@
       </p:sp>
       <p:sp>
         <p:nvSpPr>
-          <p:cNvPr id="34" name="Tier 4 name"/>
+          <p:cNvPr id="11" name="Icon chip"/>
+          <p:cNvSpPr/>
+          <p:nvPr/>
+        </p:nvSpPr>
+        <p:spPr>
+          <a:xfrm>
+            <a:off x="731520" y="4727448"/>
+            <a:ext cx="548640" cy="548640"/>
+          </a:xfrm>
+          <a:prstGeom prst="ellipse">
+            <a:avLst/>
+          </a:prstGeom>
+          <a:solidFill>
+            <a:schemeClr val="accent3">
+              <a:alpha val="22000"/>
+            </a:schemeClr>
+          </a:solidFill>
+          <a:ln w="12700">
+            <a:solidFill>
+              <a:schemeClr val="accent3">
+                <a:alpha val="70000"/>
+              </a:schemeClr>
+            </a:solidFill>
+            <a:prstDash val="solid"/>
+          </a:ln>
+        </p:spPr>
+      </p:sp>
+      <p:pic>
+        <p:nvPicPr>
+          <p:cNvPr id="12" name="Icon" descr="preencoded.png">    </p:cNvPr>
+          <p:cNvPicPr>
+            <a:picLocks noChangeAspect="1"/>
+          </p:cNvPicPr>
+          <p:nvPr/>
+        </p:nvPicPr>
+        <p:blipFill>
+          <a:blip r:embed="rId1"/>
+          <a:stretch>
+            <a:fillRect/>
+          </a:stretch>
+        </p:blipFill>
+        <p:spPr>
+          <a:xfrm>
+            <a:off x="868680" y="4864608"/>
+            <a:ext cx="274320" cy="274320"/>
+          </a:xfrm>
+          <a:prstGeom prst="rect">
+            <a:avLst/>
+          </a:prstGeom>
+        </p:spPr>
+      </p:pic>
+      <p:sp>
+        <p:nvSpPr>
+          <p:cNvPr id="13" name="Find point 1 title"/>
           <p:cNvSpPr txBox="1"/>
           <p:nvPr/>
         </p:nvSpPr>
         <p:spPr>
           <a:xfrm>
-            <a:off x="9262872" y="4709160"/>
-            <a:ext cx="2286000" cy="365760"/>
+            <a:off x="1417320" y="4663440"/>
+            <a:ext cx="2514600" cy="365760"/>
           </a:xfrm>
           <a:prstGeom prst="rect">
             <a:avLst/>
@@ -4121,66 +3599,30 @@
               <a:buNone/>
             </a:pPr>
             <a:r>
-              <a:rPr lang="en-US" sz="1500" dirty="0">
+              <a:rPr lang="en-US" sz="1600" b="1" dirty="0">
                 <a:solidFill>
                   <a:schemeClr val="bg1"/>
-                </a:solidFill>
-              </a:rPr>
-              <a:t>Trusted</a:t>
-            </a:r>
-            <a:endParaRPr lang="en-US" sz="1500" dirty="0"/>
-          </a:p>
-        </p:txBody>
-      </p:sp>
-      <p:sp>
-        <p:nvSpPr>
-          <p:cNvPr id="35" name="Tier 4 hold"/>
-          <p:cNvSpPr txBox="1"/>
-          <p:nvPr/>
-        </p:nvSpPr>
-        <p:spPr>
-          <a:xfrm>
-            <a:off x="9262872" y="5029200"/>
-            <a:ext cx="2286000" cy="457200"/>
-          </a:xfrm>
-          <a:prstGeom prst="rect">
-            <a:avLst/>
-          </a:prstGeom>
-          <a:noFill/>
-          <a:ln/>
-        </p:spPr>
-        <p:txBody>
-          <a:bodyPr wrap="square" lIns="0" tIns="0" rIns="0" bIns="0" rtlCol="0" anchor="t"/>
-          <a:lstStyle/>
-          <a:p>
-            <a:pPr indent="0" marL="0">
-              <a:buNone/>
-            </a:pPr>
-            <a:r>
-              <a:rPr lang="en-US" sz="2400" b="1" dirty="0">
-                <a:solidFill>
-                  <a:schemeClr val="accent1"/>
                 </a:solidFill>
                 <a:latin typeface="+mj-lt" pitchFamily="34" charset="0"/>
                 <a:ea typeface="+mj-lt" pitchFamily="34" charset="-122"/>
                 <a:cs typeface="+mj-lt" pitchFamily="34" charset="-120"/>
               </a:rPr>
-              <a:t>instant</a:t>
-            </a:r>
-            <a:endParaRPr lang="en-US" sz="2400" dirty="0"/>
-          </a:p>
-        </p:txBody>
-      </p:sp>
-      <p:sp>
-        <p:nvSpPr>
-          <p:cNvPr id="36" name="Quip"/>
+              <a:t>ranked by receipts</a:t>
+            </a:r>
+            <a:endParaRPr lang="en-US" sz="1600" dirty="0"/>
+          </a:p>
+        </p:txBody>
+      </p:sp>
+      <p:sp>
+        <p:nvSpPr>
+          <p:cNvPr id="14" name="Find point 1 body"/>
           <p:cNvSpPr txBox="1"/>
           <p:nvPr/>
         </p:nvSpPr>
         <p:spPr>
           <a:xfrm>
-            <a:off x="548640" y="5760720"/>
-            <a:ext cx="11064240" cy="365760"/>
+            <a:off x="1417320" y="5029200"/>
+            <a:ext cx="2514600" cy="1005840"/>
           </a:xfrm>
           <a:prstGeom prst="rect">
             <a:avLst/>
@@ -4196,17 +3638,328 @@
               <a:buNone/>
             </a:pPr>
             <a:r>
+              <a:rPr lang="en-US" sz="1300" dirty="0">
+                <a:solidFill>
+                  <a:schemeClr val="bg2"/>
+                </a:solidFill>
+              </a:rPr>
+              <a:t>every review behind the rank cost a real settled order. fake stars = real money.</a:t>
+            </a:r>
+            <a:endParaRPr lang="en-US" sz="1300" dirty="0"/>
+          </a:p>
+        </p:txBody>
+      </p:sp>
+      <p:sp>
+        <p:nvSpPr>
+          <p:cNvPr id="15" name="Find point 2"/>
+          <p:cNvSpPr/>
+          <p:nvPr/>
+        </p:nvSpPr>
+        <p:spPr>
+          <a:xfrm>
+            <a:off x="4334256" y="4526280"/>
+            <a:ext cx="3520440" cy="1600200"/>
+          </a:xfrm>
+          <a:prstGeom prst="roundRect">
+            <a:avLst>
+              <a:gd name="adj" fmla="val 8000"/>
+            </a:avLst>
+          </a:prstGeom>
+          <a:solidFill>
+            <a:schemeClr val="tx2"/>
+          </a:solidFill>
+          <a:ln w="12700">
+            <a:solidFill>
+              <a:schemeClr val="accent2">
+                <a:alpha val="45000"/>
+              </a:schemeClr>
+            </a:solidFill>
+            <a:prstDash val="solid"/>
+          </a:ln>
+        </p:spPr>
+      </p:sp>
+      <p:sp>
+        <p:nvSpPr>
+          <p:cNvPr id="16" name="Icon chip"/>
+          <p:cNvSpPr/>
+          <p:nvPr/>
+        </p:nvSpPr>
+        <p:spPr>
+          <a:xfrm>
+            <a:off x="4517136" y="4727448"/>
+            <a:ext cx="548640" cy="548640"/>
+          </a:xfrm>
+          <a:prstGeom prst="ellipse">
+            <a:avLst/>
+          </a:prstGeom>
+          <a:solidFill>
+            <a:schemeClr val="accent2">
+              <a:alpha val="22000"/>
+            </a:schemeClr>
+          </a:solidFill>
+          <a:ln w="12700">
+            <a:solidFill>
+              <a:schemeClr val="accent2">
+                <a:alpha val="70000"/>
+              </a:schemeClr>
+            </a:solidFill>
+            <a:prstDash val="solid"/>
+          </a:ln>
+        </p:spPr>
+      </p:sp>
+      <p:pic>
+        <p:nvPicPr>
+          <p:cNvPr id="17" name="Icon" descr="preencoded.png">    </p:cNvPr>
+          <p:cNvPicPr>
+            <a:picLocks noChangeAspect="1"/>
+          </p:cNvPicPr>
+          <p:nvPr/>
+        </p:nvPicPr>
+        <p:blipFill>
+          <a:blip r:embed="rId2"/>
+          <a:stretch>
+            <a:fillRect/>
+          </a:stretch>
+        </p:blipFill>
+        <p:spPr>
+          <a:xfrm>
+            <a:off x="4654296" y="4864608"/>
+            <a:ext cx="274320" cy="274320"/>
+          </a:xfrm>
+          <a:prstGeom prst="rect">
+            <a:avLst/>
+          </a:prstGeom>
+        </p:spPr>
+      </p:pic>
+      <p:sp>
+        <p:nvSpPr>
+          <p:cNvPr id="18" name="Find point 2 title"/>
+          <p:cNvSpPr txBox="1"/>
+          <p:nvPr/>
+        </p:nvSpPr>
+        <p:spPr>
+          <a:xfrm>
+            <a:off x="5202936" y="4663440"/>
+            <a:ext cx="2514600" cy="365760"/>
+          </a:xfrm>
+          <a:prstGeom prst="rect">
+            <a:avLst/>
+          </a:prstGeom>
+          <a:noFill/>
+          <a:ln/>
+        </p:spPr>
+        <p:txBody>
+          <a:bodyPr wrap="square" lIns="0" tIns="0" rIns="0" bIns="0" rtlCol="0" anchor="t"/>
+          <a:lstStyle/>
+          <a:p>
+            <a:pPr indent="0" marL="0">
+              <a:buNone/>
+            </a:pPr>
+            <a:r>
               <a:rPr lang="en-US" sz="1600" b="1" dirty="0">
                 <a:solidFill>
-                  <a:schemeClr val="accent1"/>
+                  <a:schemeClr val="bg1"/>
                 </a:solidFill>
                 <a:latin typeface="+mj-lt" pitchFamily="34" charset="0"/>
                 <a:ea typeface="+mj-lt" pitchFamily="34" charset="-122"/>
                 <a:cs typeface="+mj-lt" pitchFamily="34" charset="-120"/>
               </a:rPr>
-              <a:t>strangers wait. OGs settle in the same tx. not gatekeeping, just credit.</a:t>
+              <a:t>one call, no reading</a:t>
             </a:r>
             <a:endParaRPr lang="en-US" sz="1600" dirty="0"/>
+          </a:p>
+        </p:txBody>
+      </p:sp>
+      <p:sp>
+        <p:nvSpPr>
+          <p:cNvPr id="19" name="Find point 2 body"/>
+          <p:cNvSpPr txBox="1"/>
+          <p:nvPr/>
+        </p:nvSpPr>
+        <p:spPr>
+          <a:xfrm>
+            <a:off x="5202936" y="5029200"/>
+            <a:ext cx="2514600" cy="1005840"/>
+          </a:xfrm>
+          <a:prstGeom prst="rect">
+            <a:avLst/>
+          </a:prstGeom>
+          <a:noFill/>
+          <a:ln/>
+        </p:spPr>
+        <p:txBody>
+          <a:bodyPr wrap="square" lIns="0" tIns="0" rIns="0" bIns="0" rtlCol="0" anchor="t"/>
+          <a:lstStyle/>
+          <a:p>
+            <a:pPr indent="0" marL="0">
+              <a:buNone/>
+            </a:pPr>
+            <a:r>
+              <a:rPr lang="en-US" sz="1300" dirty="0">
+                <a:solidFill>
+                  <a:schemeClr val="bg2"/>
+                </a:solidFill>
+              </a:rPr>
+              <a:t>price, instant or escrow, and seconds to settled, per row. JSON for bots, not pages for humans.</a:t>
+            </a:r>
+            <a:endParaRPr lang="en-US" sz="1300" dirty="0"/>
+          </a:p>
+        </p:txBody>
+      </p:sp>
+      <p:sp>
+        <p:nvSpPr>
+          <p:cNvPr id="20" name="Find point 3"/>
+          <p:cNvSpPr/>
+          <p:nvPr/>
+        </p:nvSpPr>
+        <p:spPr>
+          <a:xfrm>
+            <a:off x="8119872" y="4526280"/>
+            <a:ext cx="3520440" cy="1600200"/>
+          </a:xfrm>
+          <a:prstGeom prst="roundRect">
+            <a:avLst>
+              <a:gd name="adj" fmla="val 8000"/>
+            </a:avLst>
+          </a:prstGeom>
+          <a:solidFill>
+            <a:schemeClr val="tx2"/>
+          </a:solidFill>
+          <a:ln w="12700">
+            <a:solidFill>
+              <a:schemeClr val="accent2">
+                <a:alpha val="45000"/>
+              </a:schemeClr>
+            </a:solidFill>
+            <a:prstDash val="solid"/>
+          </a:ln>
+        </p:spPr>
+      </p:sp>
+      <p:sp>
+        <p:nvSpPr>
+          <p:cNvPr id="21" name="Icon chip"/>
+          <p:cNvSpPr/>
+          <p:nvPr/>
+        </p:nvSpPr>
+        <p:spPr>
+          <a:xfrm>
+            <a:off x="8302752" y="4727448"/>
+            <a:ext cx="548640" cy="548640"/>
+          </a:xfrm>
+          <a:prstGeom prst="ellipse">
+            <a:avLst/>
+          </a:prstGeom>
+          <a:solidFill>
+            <a:schemeClr val="accent5">
+              <a:alpha val="22000"/>
+            </a:schemeClr>
+          </a:solidFill>
+          <a:ln w="12700">
+            <a:solidFill>
+              <a:schemeClr val="accent5">
+                <a:alpha val="70000"/>
+              </a:schemeClr>
+            </a:solidFill>
+            <a:prstDash val="solid"/>
+          </a:ln>
+        </p:spPr>
+      </p:sp>
+      <p:pic>
+        <p:nvPicPr>
+          <p:cNvPr id="22" name="Icon" descr="preencoded.png">    </p:cNvPr>
+          <p:cNvPicPr>
+            <a:picLocks noChangeAspect="1"/>
+          </p:cNvPicPr>
+          <p:nvPr/>
+        </p:nvPicPr>
+        <p:blipFill>
+          <a:blip r:embed="rId3"/>
+          <a:stretch>
+            <a:fillRect/>
+          </a:stretch>
+        </p:blipFill>
+        <p:spPr>
+          <a:xfrm>
+            <a:off x="8439912" y="4864608"/>
+            <a:ext cx="274320" cy="274320"/>
+          </a:xfrm>
+          <a:prstGeom prst="rect">
+            <a:avLst/>
+          </a:prstGeom>
+        </p:spPr>
+      </p:pic>
+      <p:sp>
+        <p:nvSpPr>
+          <p:cNvPr id="23" name="Find point 3 title"/>
+          <p:cNvSpPr txBox="1"/>
+          <p:nvPr/>
+        </p:nvSpPr>
+        <p:spPr>
+          <a:xfrm>
+            <a:off x="8988552" y="4663440"/>
+            <a:ext cx="2514600" cy="365760"/>
+          </a:xfrm>
+          <a:prstGeom prst="rect">
+            <a:avLst/>
+          </a:prstGeom>
+          <a:noFill/>
+          <a:ln/>
+        </p:spPr>
+        <p:txBody>
+          <a:bodyPr wrap="square" lIns="0" tIns="0" rIns="0" bIns="0" rtlCol="0" anchor="t"/>
+          <a:lstStyle/>
+          <a:p>
+            <a:pPr indent="0" marL="0">
+              <a:buNone/>
+            </a:pPr>
+            <a:r>
+              <a:rPr lang="en-US" sz="1600" b="1" dirty="0">
+                <a:solidFill>
+                  <a:schemeClr val="bg1"/>
+                </a:solidFill>
+                <a:latin typeface="+mj-lt" pitchFamily="34" charset="0"/>
+                <a:ea typeface="+mj-lt" pitchFamily="34" charset="-122"/>
+                <a:cs typeface="+mj-lt" pitchFamily="34" charset="-120"/>
+              </a:rPr>
+              <a:t>no ghosting</a:t>
+            </a:r>
+            <a:endParaRPr lang="en-US" sz="1600" dirty="0"/>
+          </a:p>
+        </p:txBody>
+      </p:sp>
+      <p:sp>
+        <p:nvSpPr>
+          <p:cNvPr id="24" name="Find point 3 body"/>
+          <p:cNvSpPr txBox="1"/>
+          <p:nvPr/>
+        </p:nvSpPr>
+        <p:spPr>
+          <a:xfrm>
+            <a:off x="8988552" y="5029200"/>
+            <a:ext cx="2514600" cy="1005840"/>
+          </a:xfrm>
+          <a:prstGeom prst="rect">
+            <a:avLst/>
+          </a:prstGeom>
+          <a:noFill/>
+          <a:ln/>
+        </p:spPr>
+        <p:txBody>
+          <a:bodyPr wrap="square" lIns="0" tIns="0" rIns="0" bIns="0" rtlCol="0" anchor="t"/>
+          <a:lstStyle/>
+          <a:p>
+            <a:pPr indent="0" marL="0">
+              <a:buNone/>
+            </a:pPr>
+            <a:r>
+              <a:rPr lang="en-US" sz="1300" dirty="0">
+                <a:solidFill>
+                  <a:schemeClr val="bg2"/>
+                </a:solidFill>
+              </a:rPr>
+              <a:t>nothing fits? status no_match, never an empty 200. a bad record ranks lower, never hidden.</a:t>
+            </a:r>
+            <a:endParaRPr lang="en-US" sz="1300" dirty="0"/>
           </a:p>
         </p:txBody>
       </p:sp>
@@ -4313,7 +4066,7 @@
                 <a:ea typeface="+mj-lt" pitchFamily="34" charset="-122"/>
                 <a:cs typeface="+mj-lt" pitchFamily="34" charset="-120"/>
               </a:rPr>
-              <a:t>// STEP 5 · EVERYONE</a:t>
+              <a:t>// UNDER THE HOOD</a:t>
             </a:r>
             <a:endParaRPr lang="en-US" sz="1200" dirty="0"/>
           </a:p>
@@ -4351,7 +4104,7 @@
                   <a:schemeClr val="bg1"/>
                 </a:solidFill>
               </a:rPr>
-              <a:t>watch it live 📡</a:t>
+              <a:t>where your money goes ⏳</a:t>
             </a:r>
             <a:endParaRPr lang="en-US" sz="3600" dirty="0"/>
           </a:p>
@@ -4359,22 +4112,893 @@
       </p:sp>
       <p:sp>
         <p:nvSpPr>
-          <p:cNvPr id="4" name="Screenshot frame"/>
+          <p:cNvPr id="4" name="State 1"/>
           <p:cNvSpPr/>
           <p:nvPr/>
         </p:nvSpPr>
         <p:spPr>
           <a:xfrm>
-            <a:off x="548640" y="1600200"/>
-            <a:ext cx="6858000" cy="3108960"/>
+            <a:off x="548640" y="1645920"/>
+            <a:ext cx="2560320" cy="640080"/>
           </a:xfrm>
           <a:prstGeom prst="roundRect">
             <a:avLst>
-              <a:gd name="adj" fmla="val 4118"/>
+              <a:gd name="adj" fmla="val 50000"/>
             </a:avLst>
           </a:prstGeom>
           <a:solidFill>
-            <a:schemeClr val="tx2"/>
+            <a:schemeClr val="accent5">
+              <a:alpha val="25000"/>
+            </a:schemeClr>
+          </a:solidFill>
+          <a:ln w="19050">
+            <a:solidFill>
+              <a:schemeClr val="accent5"/>
+            </a:solidFill>
+            <a:prstDash val="solid"/>
+          </a:ln>
+        </p:spPr>
+      </p:sp>
+      <p:sp>
+        <p:nvSpPr>
+          <p:cNvPr id="5" name="State 1 label"/>
+          <p:cNvSpPr txBox="1"/>
+          <p:nvPr/>
+        </p:nvSpPr>
+        <p:spPr>
+          <a:xfrm>
+            <a:off x="548640" y="1645920"/>
+            <a:ext cx="2560320" cy="640080"/>
+          </a:xfrm>
+          <a:prstGeom prst="rect">
+            <a:avLst/>
+          </a:prstGeom>
+          <a:noFill/>
+          <a:ln/>
+        </p:spPr>
+        <p:txBody>
+          <a:bodyPr wrap="square" lIns="0" tIns="0" rIns="0" bIns="0" rtlCol="0" anchor="ctr"/>
+          <a:lstStyle/>
+          <a:p>
+            <a:pPr algn="ctr" indent="0" marL="0">
+              <a:buNone/>
+            </a:pPr>
+            <a:r>
+              <a:rPr lang="en-US" sz="1600" b="1" dirty="0">
+                <a:solidFill>
+                  <a:schemeClr val="bg1"/>
+                </a:solidFill>
+                <a:latin typeface="+mj-lt" pitchFamily="34" charset="0"/>
+                <a:ea typeface="+mj-lt" pitchFamily="34" charset="-122"/>
+                <a:cs typeface="+mj-lt" pitchFamily="34" charset="-120"/>
+              </a:rPr>
+              <a:t>AwaitingPayment</a:t>
+            </a:r>
+            <a:endParaRPr lang="en-US" sz="1600" dirty="0"/>
+          </a:p>
+        </p:txBody>
+      </p:sp>
+      <p:sp>
+        <p:nvSpPr>
+          <p:cNvPr id="6" name="State 1 body"/>
+          <p:cNvSpPr txBox="1"/>
+          <p:nvPr/>
+        </p:nvSpPr>
+        <p:spPr>
+          <a:xfrm>
+            <a:off x="594360" y="2423160"/>
+            <a:ext cx="2514600" cy="914400"/>
+          </a:xfrm>
+          <a:prstGeom prst="rect">
+            <a:avLst/>
+          </a:prstGeom>
+          <a:noFill/>
+          <a:ln/>
+        </p:spPr>
+        <p:txBody>
+          <a:bodyPr wrap="square" lIns="0" tIns="0" rIns="0" bIns="0" rtlCol="0" anchor="t"/>
+          <a:lstStyle/>
+          <a:p>
+            <a:pPr indent="0" marL="0">
+              <a:buNone/>
+            </a:pPr>
+            <a:r>
+              <a:rPr lang="en-US" sz="1500" dirty="0">
+                <a:solidFill>
+                  <a:schemeClr val="bg2"/>
+                </a:solidFill>
+              </a:rPr>
+              <a:t>The seller opens the order: that’s the 402 quote.</a:t>
+            </a:r>
+            <a:endParaRPr lang="en-US" sz="1500" dirty="0"/>
+          </a:p>
+        </p:txBody>
+      </p:sp>
+      <p:sp>
+        <p:nvSpPr>
+          <p:cNvPr id="7" name="State arrow 1"/>
+          <p:cNvSpPr/>
+          <p:nvPr/>
+        </p:nvSpPr>
+        <p:spPr>
+          <a:xfrm>
+            <a:off x="3136392" y="1965960"/>
+            <a:ext cx="228600" cy="0"/>
+          </a:xfrm>
+          <a:prstGeom prst="line">
+            <a:avLst/>
+          </a:prstGeom>
+          <a:noFill/>
+          <a:ln w="25400">
+            <a:solidFill>
+              <a:schemeClr val="accent1"/>
+            </a:solidFill>
+            <a:prstDash val="solid"/>
+            <a:tailEnd type="triangle"/>
+          </a:ln>
+        </p:spPr>
+      </p:sp>
+      <p:sp>
+        <p:nvSpPr>
+          <p:cNvPr id="8" name="State 2"/>
+          <p:cNvSpPr/>
+          <p:nvPr/>
+        </p:nvSpPr>
+        <p:spPr>
+          <a:xfrm>
+            <a:off x="3392424" y="1645920"/>
+            <a:ext cx="2560320" cy="640080"/>
+          </a:xfrm>
+          <a:prstGeom prst="roundRect">
+            <a:avLst>
+              <a:gd name="adj" fmla="val 50000"/>
+            </a:avLst>
+          </a:prstGeom>
+          <a:solidFill>
+            <a:schemeClr val="accent3">
+              <a:alpha val="25000"/>
+            </a:schemeClr>
+          </a:solidFill>
+          <a:ln w="19050">
+            <a:solidFill>
+              <a:schemeClr val="accent3"/>
+            </a:solidFill>
+            <a:prstDash val="solid"/>
+          </a:ln>
+        </p:spPr>
+      </p:sp>
+      <p:sp>
+        <p:nvSpPr>
+          <p:cNvPr id="9" name="State 2 label"/>
+          <p:cNvSpPr txBox="1"/>
+          <p:nvPr/>
+        </p:nvSpPr>
+        <p:spPr>
+          <a:xfrm>
+            <a:off x="3392424" y="1645920"/>
+            <a:ext cx="2560320" cy="640080"/>
+          </a:xfrm>
+          <a:prstGeom prst="rect">
+            <a:avLst/>
+          </a:prstGeom>
+          <a:noFill/>
+          <a:ln/>
+        </p:spPr>
+        <p:txBody>
+          <a:bodyPr wrap="square" lIns="0" tIns="0" rIns="0" bIns="0" rtlCol="0" anchor="ctr"/>
+          <a:lstStyle/>
+          <a:p>
+            <a:pPr algn="ctr" indent="0" marL="0">
+              <a:buNone/>
+            </a:pPr>
+            <a:r>
+              <a:rPr lang="en-US" sz="1600" b="1" dirty="0">
+                <a:solidFill>
+                  <a:schemeClr val="bg1"/>
+                </a:solidFill>
+                <a:latin typeface="+mj-lt" pitchFamily="34" charset="0"/>
+                <a:ea typeface="+mj-lt" pitchFamily="34" charset="-122"/>
+                <a:cs typeface="+mj-lt" pitchFamily="34" charset="-120"/>
+              </a:rPr>
+              <a:t>Funded</a:t>
+            </a:r>
+            <a:endParaRPr lang="en-US" sz="1600" dirty="0"/>
+          </a:p>
+        </p:txBody>
+      </p:sp>
+      <p:sp>
+        <p:nvSpPr>
+          <p:cNvPr id="10" name="State 2 body"/>
+          <p:cNvSpPr txBox="1"/>
+          <p:nvPr/>
+        </p:nvSpPr>
+        <p:spPr>
+          <a:xfrm>
+            <a:off x="3438144" y="2423160"/>
+            <a:ext cx="2514600" cy="914400"/>
+          </a:xfrm>
+          <a:prstGeom prst="rect">
+            <a:avLst/>
+          </a:prstGeom>
+          <a:noFill/>
+          <a:ln/>
+        </p:spPr>
+        <p:txBody>
+          <a:bodyPr wrap="square" lIns="0" tIns="0" rIns="0" bIns="0" rtlCol="0" anchor="t"/>
+          <a:lstStyle/>
+          <a:p>
+            <a:pPr indent="0" marL="0">
+              <a:buNone/>
+            </a:pPr>
+            <a:r>
+              <a:rPr lang="en-US" sz="1500" dirty="0">
+                <a:solidFill>
+                  <a:schemeClr val="bg2"/>
+                </a:solidFill>
+              </a:rPr>
+              <a:t>USDC lands in the vault. confirm_funded reads the balance itself.</a:t>
+            </a:r>
+            <a:endParaRPr lang="en-US" sz="1500" dirty="0"/>
+          </a:p>
+        </p:txBody>
+      </p:sp>
+      <p:sp>
+        <p:nvSpPr>
+          <p:cNvPr id="11" name="State arrow 2"/>
+          <p:cNvSpPr/>
+          <p:nvPr/>
+        </p:nvSpPr>
+        <p:spPr>
+          <a:xfrm>
+            <a:off x="5980176" y="1965960"/>
+            <a:ext cx="228600" cy="0"/>
+          </a:xfrm>
+          <a:prstGeom prst="line">
+            <a:avLst/>
+          </a:prstGeom>
+          <a:noFill/>
+          <a:ln w="25400">
+            <a:solidFill>
+              <a:schemeClr val="accent1"/>
+            </a:solidFill>
+            <a:prstDash val="solid"/>
+            <a:tailEnd type="triangle"/>
+          </a:ln>
+        </p:spPr>
+      </p:sp>
+      <p:sp>
+        <p:nvSpPr>
+          <p:cNvPr id="12" name="State 3"/>
+          <p:cNvSpPr/>
+          <p:nvPr/>
+        </p:nvSpPr>
+        <p:spPr>
+          <a:xfrm>
+            <a:off x="6236208" y="1645920"/>
+            <a:ext cx="2560320" cy="640080"/>
+          </a:xfrm>
+          <a:prstGeom prst="roundRect">
+            <a:avLst>
+              <a:gd name="adj" fmla="val 50000"/>
+            </a:avLst>
+          </a:prstGeom>
+          <a:solidFill>
+            <a:schemeClr val="accent4">
+              <a:alpha val="25000"/>
+            </a:schemeClr>
+          </a:solidFill>
+          <a:ln w="19050">
+            <a:solidFill>
+              <a:schemeClr val="accent4"/>
+            </a:solidFill>
+            <a:prstDash val="solid"/>
+          </a:ln>
+        </p:spPr>
+      </p:sp>
+      <p:sp>
+        <p:nvSpPr>
+          <p:cNvPr id="13" name="State 3 label"/>
+          <p:cNvSpPr txBox="1"/>
+          <p:nvPr/>
+        </p:nvSpPr>
+        <p:spPr>
+          <a:xfrm>
+            <a:off x="6236208" y="1645920"/>
+            <a:ext cx="2560320" cy="640080"/>
+          </a:xfrm>
+          <a:prstGeom prst="rect">
+            <a:avLst/>
+          </a:prstGeom>
+          <a:noFill/>
+          <a:ln/>
+        </p:spPr>
+        <p:txBody>
+          <a:bodyPr wrap="square" lIns="0" tIns="0" rIns="0" bIns="0" rtlCol="0" anchor="ctr"/>
+          <a:lstStyle/>
+          <a:p>
+            <a:pPr algn="ctr" indent="0" marL="0">
+              <a:buNone/>
+            </a:pPr>
+            <a:r>
+              <a:rPr lang="en-US" sz="1600" b="1" dirty="0">
+                <a:solidFill>
+                  <a:schemeClr val="bg1"/>
+                </a:solidFill>
+                <a:latin typeface="+mj-lt" pitchFamily="34" charset="0"/>
+                <a:ea typeface="+mj-lt" pitchFamily="34" charset="-122"/>
+                <a:cs typeface="+mj-lt" pitchFamily="34" charset="-120"/>
+              </a:rPr>
+              <a:t>Delivered</a:t>
+            </a:r>
+            <a:endParaRPr lang="en-US" sz="1600" dirty="0"/>
+          </a:p>
+        </p:txBody>
+      </p:sp>
+      <p:sp>
+        <p:nvSpPr>
+          <p:cNvPr id="14" name="State 3 body"/>
+          <p:cNvSpPr txBox="1"/>
+          <p:nvPr/>
+        </p:nvSpPr>
+        <p:spPr>
+          <a:xfrm>
+            <a:off x="6281928" y="2423160"/>
+            <a:ext cx="2514600" cy="914400"/>
+          </a:xfrm>
+          <a:prstGeom prst="rect">
+            <a:avLst/>
+          </a:prstGeom>
+          <a:noFill/>
+          <a:ln/>
+        </p:spPr>
+        <p:txBody>
+          <a:bodyPr wrap="square" lIns="0" tIns="0" rIns="0" bIns="0" rtlCol="0" anchor="t"/>
+          <a:lstStyle/>
+          <a:p>
+            <a:pPr indent="0" marL="0">
+              <a:buNone/>
+            </a:pPr>
+            <a:r>
+              <a:rPr lang="en-US" sz="1500" dirty="0">
+                <a:solidFill>
+                  <a:schemeClr val="bg2"/>
+                </a:solidFill>
+              </a:rPr>
+              <a:t>The seller commits the sha256 of what it sent. The hold starts.</a:t>
+            </a:r>
+            <a:endParaRPr lang="en-US" sz="1500" dirty="0"/>
+          </a:p>
+        </p:txBody>
+      </p:sp>
+      <p:sp>
+        <p:nvSpPr>
+          <p:cNvPr id="15" name="State arrow 3"/>
+          <p:cNvSpPr/>
+          <p:nvPr/>
+        </p:nvSpPr>
+        <p:spPr>
+          <a:xfrm>
+            <a:off x="8823960" y="1965960"/>
+            <a:ext cx="228600" cy="0"/>
+          </a:xfrm>
+          <a:prstGeom prst="line">
+            <a:avLst/>
+          </a:prstGeom>
+          <a:noFill/>
+          <a:ln w="25400">
+            <a:solidFill>
+              <a:schemeClr val="accent1"/>
+            </a:solidFill>
+            <a:prstDash val="solid"/>
+            <a:tailEnd type="triangle"/>
+          </a:ln>
+        </p:spPr>
+      </p:sp>
+      <p:sp>
+        <p:nvSpPr>
+          <p:cNvPr id="16" name="State 4"/>
+          <p:cNvSpPr/>
+          <p:nvPr/>
+        </p:nvSpPr>
+        <p:spPr>
+          <a:xfrm>
+            <a:off x="9079992" y="1645920"/>
+            <a:ext cx="2560320" cy="640080"/>
+          </a:xfrm>
+          <a:prstGeom prst="roundRect">
+            <a:avLst>
+              <a:gd name="adj" fmla="val 50000"/>
+            </a:avLst>
+          </a:prstGeom>
+          <a:solidFill>
+            <a:schemeClr val="accent1">
+              <a:alpha val="25000"/>
+            </a:schemeClr>
+          </a:solidFill>
+          <a:ln w="19050">
+            <a:solidFill>
+              <a:schemeClr val="accent1"/>
+            </a:solidFill>
+            <a:prstDash val="solid"/>
+          </a:ln>
+        </p:spPr>
+      </p:sp>
+      <p:sp>
+        <p:nvSpPr>
+          <p:cNvPr id="17" name="State 4 label"/>
+          <p:cNvSpPr txBox="1"/>
+          <p:nvPr/>
+        </p:nvSpPr>
+        <p:spPr>
+          <a:xfrm>
+            <a:off x="9079992" y="1645920"/>
+            <a:ext cx="2560320" cy="640080"/>
+          </a:xfrm>
+          <a:prstGeom prst="rect">
+            <a:avLst/>
+          </a:prstGeom>
+          <a:noFill/>
+          <a:ln/>
+        </p:spPr>
+        <p:txBody>
+          <a:bodyPr wrap="square" lIns="0" tIns="0" rIns="0" bIns="0" rtlCol="0" anchor="ctr"/>
+          <a:lstStyle/>
+          <a:p>
+            <a:pPr algn="ctr" indent="0" marL="0">
+              <a:buNone/>
+            </a:pPr>
+            <a:r>
+              <a:rPr lang="en-US" sz="1600" b="1" dirty="0">
+                <a:solidFill>
+                  <a:schemeClr val="bg1"/>
+                </a:solidFill>
+                <a:latin typeface="+mj-lt" pitchFamily="34" charset="0"/>
+                <a:ea typeface="+mj-lt" pitchFamily="34" charset="-122"/>
+                <a:cs typeface="+mj-lt" pitchFamily="34" charset="-120"/>
+              </a:rPr>
+              <a:t>Released</a:t>
+            </a:r>
+            <a:endParaRPr lang="en-US" sz="1600" dirty="0"/>
+          </a:p>
+        </p:txBody>
+      </p:sp>
+      <p:sp>
+        <p:nvSpPr>
+          <p:cNvPr id="18" name="State 4 body"/>
+          <p:cNvSpPr txBox="1"/>
+          <p:nvPr/>
+        </p:nvSpPr>
+        <p:spPr>
+          <a:xfrm>
+            <a:off x="9125712" y="2423160"/>
+            <a:ext cx="2514600" cy="914400"/>
+          </a:xfrm>
+          <a:prstGeom prst="rect">
+            <a:avLst/>
+          </a:prstGeom>
+          <a:noFill/>
+          <a:ln/>
+        </p:spPr>
+        <p:txBody>
+          <a:bodyPr wrap="square" lIns="0" tIns="0" rIns="0" bIns="0" rtlCol="0" anchor="t"/>
+          <a:lstStyle/>
+          <a:p>
+            <a:pPr indent="0" marL="0">
+              <a:buNone/>
+            </a:pPr>
+            <a:r>
+              <a:rPr lang="en-US" sz="1500" dirty="0">
+                <a:solidFill>
+                  <a:schemeClr val="bg2"/>
+                </a:solidFill>
+              </a:rPr>
+              <a:t>After the hold, or when you release early: seller paid, 1% fee.</a:t>
+            </a:r>
+            <a:endParaRPr lang="en-US" sz="1500" dirty="0"/>
+          </a:p>
+        </p:txBody>
+      </p:sp>
+      <p:sp>
+        <p:nvSpPr>
+          <p:cNvPr id="19" name="Branch 1"/>
+          <p:cNvSpPr/>
+          <p:nvPr/>
+        </p:nvSpPr>
+        <p:spPr>
+          <a:xfrm>
+            <a:off x="3392424" y="3429000"/>
+            <a:ext cx="2560320" cy="457200"/>
+          </a:xfrm>
+          <a:prstGeom prst="roundRect">
+            <a:avLst>
+              <a:gd name="adj" fmla="val 50000"/>
+            </a:avLst>
+          </a:prstGeom>
+          <a:solidFill>
+            <a:schemeClr val="accent6">
+              <a:alpha val="18000"/>
+            </a:schemeClr>
+          </a:solidFill>
+          <a:ln w="12700">
+            <a:solidFill>
+              <a:schemeClr val="accent6"/>
+            </a:solidFill>
+            <a:prstDash val="solid"/>
+          </a:ln>
+        </p:spPr>
+      </p:sp>
+      <p:sp>
+        <p:nvSpPr>
+          <p:cNvPr id="20" name="Branch 1 label"/>
+          <p:cNvSpPr txBox="1"/>
+          <p:nvPr/>
+        </p:nvSpPr>
+        <p:spPr>
+          <a:xfrm>
+            <a:off x="3392424" y="3429000"/>
+            <a:ext cx="2560320" cy="457200"/>
+          </a:xfrm>
+          <a:prstGeom prst="rect">
+            <a:avLst/>
+          </a:prstGeom>
+          <a:noFill/>
+          <a:ln/>
+        </p:spPr>
+        <p:txBody>
+          <a:bodyPr wrap="square" lIns="0" tIns="0" rIns="0" bIns="0" rtlCol="0" anchor="ctr"/>
+          <a:lstStyle/>
+          <a:p>
+            <a:pPr algn="ctr" indent="0" marL="0">
+              <a:buNone/>
+            </a:pPr>
+            <a:r>
+              <a:rPr lang="en-US" sz="1400" dirty="0">
+                <a:solidFill>
+                  <a:schemeClr val="bg1"/>
+                </a:solidFill>
+              </a:rPr>
+              <a:t>↳ refund if the seller ghosts</a:t>
+            </a:r>
+            <a:endParaRPr lang="en-US" sz="1400" dirty="0"/>
+          </a:p>
+        </p:txBody>
+      </p:sp>
+      <p:sp>
+        <p:nvSpPr>
+          <p:cNvPr id="21" name="Branch 2"/>
+          <p:cNvSpPr/>
+          <p:nvPr/>
+        </p:nvSpPr>
+        <p:spPr>
+          <a:xfrm>
+            <a:off x="6236208" y="3429000"/>
+            <a:ext cx="2560320" cy="457200"/>
+          </a:xfrm>
+          <a:prstGeom prst="roundRect">
+            <a:avLst>
+              <a:gd name="adj" fmla="val 50000"/>
+            </a:avLst>
+          </a:prstGeom>
+          <a:solidFill>
+            <a:schemeClr val="accent6">
+              <a:alpha val="18000"/>
+            </a:schemeClr>
+          </a:solidFill>
+          <a:ln w="12700">
+            <a:solidFill>
+              <a:schemeClr val="accent6"/>
+            </a:solidFill>
+            <a:prstDash val="solid"/>
+          </a:ln>
+        </p:spPr>
+      </p:sp>
+      <p:sp>
+        <p:nvSpPr>
+          <p:cNvPr id="22" name="Branch 2 label"/>
+          <p:cNvSpPr txBox="1"/>
+          <p:nvPr/>
+        </p:nvSpPr>
+        <p:spPr>
+          <a:xfrm>
+            <a:off x="6236208" y="3429000"/>
+            <a:ext cx="2560320" cy="457200"/>
+          </a:xfrm>
+          <a:prstGeom prst="rect">
+            <a:avLst/>
+          </a:prstGeom>
+          <a:noFill/>
+          <a:ln/>
+        </p:spPr>
+        <p:txBody>
+          <a:bodyPr wrap="square" lIns="0" tIns="0" rIns="0" bIns="0" rtlCol="0" anchor="ctr"/>
+          <a:lstStyle/>
+          <a:p>
+            <a:pPr algn="ctr" indent="0" marL="0">
+              <a:buNone/>
+            </a:pPr>
+            <a:r>
+              <a:rPr lang="en-US" sz="1400" dirty="0">
+                <a:solidFill>
+                  <a:schemeClr val="bg1"/>
+                </a:solidFill>
+              </a:rPr>
+              <a:t>↳ dispute → the arbiter rules</a:t>
+            </a:r>
+            <a:endParaRPr lang="en-US" sz="1400" dirty="0"/>
+          </a:p>
+        </p:txBody>
+      </p:sp>
+      <p:sp>
+        <p:nvSpPr>
+          <p:cNvPr id="23" name="Hold label"/>
+          <p:cNvSpPr txBox="1"/>
+          <p:nvPr/>
+        </p:nvSpPr>
+        <p:spPr>
+          <a:xfrm>
+            <a:off x="548640" y="4206240"/>
+            <a:ext cx="11064240" cy="365760"/>
+          </a:xfrm>
+          <a:prstGeom prst="rect">
+            <a:avLst/>
+          </a:prstGeom>
+          <a:noFill/>
+          <a:ln/>
+        </p:spPr>
+        <p:txBody>
+          <a:bodyPr wrap="square" lIns="0" tIns="0" rIns="0" bIns="0" rtlCol="0" anchor="t"/>
+          <a:lstStyle/>
+          <a:p>
+            <a:pPr indent="0" marL="0">
+              <a:buNone/>
+            </a:pPr>
+            <a:r>
+              <a:rPr lang="en-US" sz="1400" b="1" dirty="0">
+                <a:solidFill>
+                  <a:schemeClr val="bg2"/>
+                </a:solidFill>
+                <a:latin typeface="+mj-lt" pitchFamily="34" charset="0"/>
+                <a:ea typeface="+mj-lt" pitchFamily="34" charset="-122"/>
+                <a:cs typeface="+mj-lt" pitchFamily="34" charset="-120"/>
+              </a:rPr>
+              <a:t>HOLD = the longer of the two parties’ tiers (devnet clock)</a:t>
+            </a:r>
+            <a:endParaRPr lang="en-US" sz="1400" dirty="0"/>
+          </a:p>
+        </p:txBody>
+      </p:sp>
+      <p:sp>
+        <p:nvSpPr>
+          <p:cNvPr id="24" name="Tier 1"/>
+          <p:cNvSpPr/>
+          <p:nvPr/>
+        </p:nvSpPr>
+        <p:spPr>
+          <a:xfrm>
+            <a:off x="548640" y="4645152"/>
+            <a:ext cx="2560320" cy="914400"/>
+          </a:xfrm>
+          <a:prstGeom prst="roundRect">
+            <a:avLst>
+              <a:gd name="adj" fmla="val 14000"/>
+            </a:avLst>
+          </a:prstGeom>
+          <a:solidFill>
+            <a:schemeClr val="bg2">
+              <a:alpha val="16000"/>
+            </a:schemeClr>
+          </a:solidFill>
+          <a:ln w="12700">
+            <a:solidFill>
+              <a:schemeClr val="bg2">
+                <a:alpha val="45000"/>
+              </a:schemeClr>
+            </a:solidFill>
+            <a:prstDash val="solid"/>
+          </a:ln>
+        </p:spPr>
+      </p:sp>
+      <p:sp>
+        <p:nvSpPr>
+          <p:cNvPr id="25" name="Tier 1 name"/>
+          <p:cNvSpPr txBox="1"/>
+          <p:nvPr/>
+        </p:nvSpPr>
+        <p:spPr>
+          <a:xfrm>
+            <a:off x="731520" y="4709160"/>
+            <a:ext cx="2286000" cy="365760"/>
+          </a:xfrm>
+          <a:prstGeom prst="rect">
+            <a:avLst/>
+          </a:prstGeom>
+          <a:noFill/>
+          <a:ln/>
+        </p:spPr>
+        <p:txBody>
+          <a:bodyPr wrap="square" lIns="0" tIns="0" rIns="0" bIns="0" rtlCol="0" anchor="t"/>
+          <a:lstStyle/>
+          <a:p>
+            <a:pPr indent="0" marL="0">
+              <a:buNone/>
+            </a:pPr>
+            <a:r>
+              <a:rPr lang="en-US" sz="1500" dirty="0">
+                <a:solidFill>
+                  <a:schemeClr val="bg1"/>
+                </a:solidFill>
+              </a:rPr>
+              <a:t>New</a:t>
+            </a:r>
+            <a:endParaRPr lang="en-US" sz="1500" dirty="0"/>
+          </a:p>
+        </p:txBody>
+      </p:sp>
+      <p:sp>
+        <p:nvSpPr>
+          <p:cNvPr id="26" name="Tier 1 hold"/>
+          <p:cNvSpPr txBox="1"/>
+          <p:nvPr/>
+        </p:nvSpPr>
+        <p:spPr>
+          <a:xfrm>
+            <a:off x="731520" y="5029200"/>
+            <a:ext cx="2286000" cy="457200"/>
+          </a:xfrm>
+          <a:prstGeom prst="rect">
+            <a:avLst/>
+          </a:prstGeom>
+          <a:noFill/>
+          <a:ln/>
+        </p:spPr>
+        <p:txBody>
+          <a:bodyPr wrap="square" lIns="0" tIns="0" rIns="0" bIns="0" rtlCol="0" anchor="t"/>
+          <a:lstStyle/>
+          <a:p>
+            <a:pPr indent="0" marL="0">
+              <a:buNone/>
+            </a:pPr>
+            <a:r>
+              <a:rPr lang="en-US" sz="2400" b="1" dirty="0">
+                <a:solidFill>
+                  <a:schemeClr val="bg2"/>
+                </a:solidFill>
+                <a:latin typeface="+mj-lt" pitchFamily="34" charset="0"/>
+                <a:ea typeface="+mj-lt" pitchFamily="34" charset="-122"/>
+                <a:cs typeface="+mj-lt" pitchFamily="34" charset="-120"/>
+              </a:rPr>
+              <a:t>2 min</a:t>
+            </a:r>
+            <a:endParaRPr lang="en-US" sz="2400" dirty="0"/>
+          </a:p>
+        </p:txBody>
+      </p:sp>
+      <p:sp>
+        <p:nvSpPr>
+          <p:cNvPr id="27" name="Tier 2"/>
+          <p:cNvSpPr/>
+          <p:nvPr/>
+        </p:nvSpPr>
+        <p:spPr>
+          <a:xfrm>
+            <a:off x="3392424" y="4645152"/>
+            <a:ext cx="2560320" cy="914400"/>
+          </a:xfrm>
+          <a:prstGeom prst="roundRect">
+            <a:avLst>
+              <a:gd name="adj" fmla="val 14000"/>
+            </a:avLst>
+          </a:prstGeom>
+          <a:solidFill>
+            <a:schemeClr val="accent5">
+              <a:alpha val="16000"/>
+            </a:schemeClr>
+          </a:solidFill>
+          <a:ln w="12700">
+            <a:solidFill>
+              <a:schemeClr val="accent5">
+                <a:alpha val="45000"/>
+              </a:schemeClr>
+            </a:solidFill>
+            <a:prstDash val="solid"/>
+          </a:ln>
+        </p:spPr>
+      </p:sp>
+      <p:sp>
+        <p:nvSpPr>
+          <p:cNvPr id="28" name="Tier 2 name"/>
+          <p:cNvSpPr txBox="1"/>
+          <p:nvPr/>
+        </p:nvSpPr>
+        <p:spPr>
+          <a:xfrm>
+            <a:off x="3575304" y="4709160"/>
+            <a:ext cx="2286000" cy="365760"/>
+          </a:xfrm>
+          <a:prstGeom prst="rect">
+            <a:avLst/>
+          </a:prstGeom>
+          <a:noFill/>
+          <a:ln/>
+        </p:spPr>
+        <p:txBody>
+          <a:bodyPr wrap="square" lIns="0" tIns="0" rIns="0" bIns="0" rtlCol="0" anchor="t"/>
+          <a:lstStyle/>
+          <a:p>
+            <a:pPr indent="0" marL="0">
+              <a:buNone/>
+            </a:pPr>
+            <a:r>
+              <a:rPr lang="en-US" sz="1500" dirty="0">
+                <a:solidFill>
+                  <a:schemeClr val="bg1"/>
+                </a:solidFill>
+              </a:rPr>
+              <a:t>Building</a:t>
+            </a:r>
+            <a:endParaRPr lang="en-US" sz="1500" dirty="0"/>
+          </a:p>
+        </p:txBody>
+      </p:sp>
+      <p:sp>
+        <p:nvSpPr>
+          <p:cNvPr id="29" name="Tier 2 hold"/>
+          <p:cNvSpPr txBox="1"/>
+          <p:nvPr/>
+        </p:nvSpPr>
+        <p:spPr>
+          <a:xfrm>
+            <a:off x="3575304" y="5029200"/>
+            <a:ext cx="2286000" cy="457200"/>
+          </a:xfrm>
+          <a:prstGeom prst="rect">
+            <a:avLst/>
+          </a:prstGeom>
+          <a:noFill/>
+          <a:ln/>
+        </p:spPr>
+        <p:txBody>
+          <a:bodyPr wrap="square" lIns="0" tIns="0" rIns="0" bIns="0" rtlCol="0" anchor="t"/>
+          <a:lstStyle/>
+          <a:p>
+            <a:pPr indent="0" marL="0">
+              <a:buNone/>
+            </a:pPr>
+            <a:r>
+              <a:rPr lang="en-US" sz="2400" b="1" dirty="0">
+                <a:solidFill>
+                  <a:schemeClr val="accent5"/>
+                </a:solidFill>
+                <a:latin typeface="+mj-lt" pitchFamily="34" charset="0"/>
+                <a:ea typeface="+mj-lt" pitchFamily="34" charset="-122"/>
+                <a:cs typeface="+mj-lt" pitchFamily="34" charset="-120"/>
+              </a:rPr>
+              <a:t>45 s</a:t>
+            </a:r>
+            <a:endParaRPr lang="en-US" sz="2400" dirty="0"/>
+          </a:p>
+        </p:txBody>
+      </p:sp>
+      <p:sp>
+        <p:nvSpPr>
+          <p:cNvPr id="30" name="Tier 3"/>
+          <p:cNvSpPr/>
+          <p:nvPr/>
+        </p:nvSpPr>
+        <p:spPr>
+          <a:xfrm>
+            <a:off x="6236208" y="4645152"/>
+            <a:ext cx="2560320" cy="914400"/>
+          </a:xfrm>
+          <a:prstGeom prst="roundRect">
+            <a:avLst>
+              <a:gd name="adj" fmla="val 14000"/>
+            </a:avLst>
+          </a:prstGeom>
+          <a:solidFill>
+            <a:schemeClr val="accent2">
+              <a:alpha val="16000"/>
+            </a:schemeClr>
           </a:solidFill>
           <a:ln w="12700">
             <a:solidFill>
@@ -4384,49 +5008,18 @@
             </a:solidFill>
             <a:prstDash val="solid"/>
           </a:ln>
-          <a:effectLst>
-            <a:outerShdw sx="100000" sy="100000" kx="0" ky="0" algn="bl" rotWithShape="0" blurRad="228600" dist="50800" dir="5400000">
-              <a:srgbClr val="9945FF">
-                <a:alpha val="35000"/>
-              </a:srgbClr>
-            </a:outerShdw>
-          </a:effectLst>
-        </p:spPr>
-      </p:sp>
-      <p:pic>
-        <p:nvPicPr>
-          <p:cNvPr id="5" name="Network screenshot" descr="The Tessera live network page: a graph of agents and orders on devnet and a feed of recent orders">    </p:cNvPr>
-          <p:cNvPicPr>
-            <a:picLocks noChangeAspect="1"/>
-          </p:cNvPicPr>
-          <p:nvPr/>
-        </p:nvPicPr>
-        <p:blipFill>
-          <a:blip r:embed="rId1"/>
-          <a:stretch>
-            <a:fillRect/>
-          </a:stretch>
-        </p:blipFill>
-        <p:spPr>
-          <a:xfrm>
-            <a:off x="640080" y="1691640"/>
-            <a:ext cx="6675120" cy="2898648"/>
-          </a:xfrm>
-          <a:prstGeom prst="rect">
-            <a:avLst/>
-          </a:prstGeom>
-        </p:spPr>
-      </p:pic>
-      <p:sp>
-        <p:nvSpPr>
-          <p:cNvPr id="6" name="Screenshot caption"/>
+        </p:spPr>
+      </p:sp>
+      <p:sp>
+        <p:nvSpPr>
+          <p:cNvPr id="31" name="Tier 3 name"/>
           <p:cNvSpPr txBox="1"/>
           <p:nvPr/>
         </p:nvSpPr>
         <p:spPr>
           <a:xfrm>
-            <a:off x="548640" y="4773168"/>
-            <a:ext cx="6858000" cy="457200"/>
+            <a:off x="6419088" y="4709160"/>
+            <a:ext cx="2286000" cy="365760"/>
           </a:xfrm>
           <a:prstGeom prst="rect">
             <a:avLst/>
@@ -4442,27 +5035,66 @@
               <a:buNone/>
             </a:pPr>
             <a:r>
-              <a:rPr lang="en-US" sz="1200" dirty="0">
-                <a:solidFill>
-                  <a:schemeClr val="bg2"/>
-                </a:solidFill>
-              </a:rPr>
-              <a:t>your devnet, drawn by the site: squares = shops, circles = buyers, the island on the left = washer’s ring</a:t>
-            </a:r>
-            <a:endParaRPr lang="en-US" sz="1200" dirty="0"/>
-          </a:p>
-        </p:txBody>
-      </p:sp>
-      <p:sp>
-        <p:nvSpPr>
-          <p:cNvPr id="7" name="Terminal"/>
+              <a:rPr lang="en-US" sz="1500" dirty="0">
+                <a:solidFill>
+                  <a:schemeClr val="bg1"/>
+                </a:solidFill>
+              </a:rPr>
+              <a:t>Established</a:t>
+            </a:r>
+            <a:endParaRPr lang="en-US" sz="1500" dirty="0"/>
+          </a:p>
+        </p:txBody>
+      </p:sp>
+      <p:sp>
+        <p:nvSpPr>
+          <p:cNvPr id="32" name="Tier 3 hold"/>
+          <p:cNvSpPr txBox="1"/>
+          <p:nvPr/>
+        </p:nvSpPr>
+        <p:spPr>
+          <a:xfrm>
+            <a:off x="6419088" y="5029200"/>
+            <a:ext cx="2286000" cy="457200"/>
+          </a:xfrm>
+          <a:prstGeom prst="rect">
+            <a:avLst/>
+          </a:prstGeom>
+          <a:noFill/>
+          <a:ln/>
+        </p:spPr>
+        <p:txBody>
+          <a:bodyPr wrap="square" lIns="0" tIns="0" rIns="0" bIns="0" rtlCol="0" anchor="t"/>
+          <a:lstStyle/>
+          <a:p>
+            <a:pPr indent="0" marL="0">
+              <a:buNone/>
+            </a:pPr>
+            <a:r>
+              <a:rPr lang="en-US" sz="2400" b="1" dirty="0">
+                <a:solidFill>
+                  <a:schemeClr val="accent2"/>
+                </a:solidFill>
+                <a:latin typeface="+mj-lt" pitchFamily="34" charset="0"/>
+                <a:ea typeface="+mj-lt" pitchFamily="34" charset="-122"/>
+                <a:cs typeface="+mj-lt" pitchFamily="34" charset="-120"/>
+              </a:rPr>
+              <a:t>10 s</a:t>
+            </a:r>
+            <a:endParaRPr lang="en-US" sz="2400" dirty="0"/>
+          </a:p>
+        </p:txBody>
+      </p:sp>
+      <p:sp>
+        <p:nvSpPr>
+          <p:cNvPr id="33" name="Tier 4"/>
           <p:cNvSpPr/>
           <p:nvPr/>
         </p:nvSpPr>
         <p:spPr>
           <a:xfrm>
-            <a:off x="548640" y="5257800"/>
-            <a:ext cx="6858000" cy="914400"/>
+            <a:off x="9079992" y="4645152"/>
+            <a:ext cx="2560320" cy="914400"/>
           </a:xfrm>
           <a:prstGeom prst="roundRect">
             <a:avLst>
@@ -4470,149 +5102,105 @@
             </a:avLst>
           </a:prstGeom>
           <a:solidFill>
-            <a:schemeClr val="tx2"/>
+            <a:schemeClr val="accent1">
+              <a:alpha val="16000"/>
+            </a:schemeClr>
           </a:solidFill>
           <a:ln w="12700">
             <a:solidFill>
-              <a:schemeClr val="accent2">
+              <a:schemeClr val="accent1">
                 <a:alpha val="45000"/>
               </a:schemeClr>
             </a:solidFill>
             <a:prstDash val="solid"/>
           </a:ln>
-          <a:effectLst>
-            <a:outerShdw sx="100000" sy="100000" kx="0" ky="0" algn="bl" rotWithShape="0" blurRad="228600" dist="50800" dir="5400000">
-              <a:srgbClr val="9945FF">
-                <a:alpha val="35000"/>
-              </a:srgbClr>
-            </a:outerShdw>
-          </a:effectLst>
-        </p:spPr>
-      </p:sp>
-      <p:sp>
-        <p:nvSpPr>
-          <p:cNvPr id="8" name="Terminal dot 1"/>
-          <p:cNvSpPr/>
-          <p:nvPr/>
-        </p:nvSpPr>
-        <p:spPr>
-          <a:xfrm>
-            <a:off x="749808" y="5413248"/>
-            <a:ext cx="118872" cy="118872"/>
-          </a:xfrm>
-          <a:prstGeom prst="ellipse">
-            <a:avLst/>
-          </a:prstGeom>
-          <a:solidFill>
-            <a:schemeClr val="accent6"/>
-          </a:solidFill>
-          <a:ln w="12700">
-            <a:solidFill>
-              <a:schemeClr val="accent6"/>
-            </a:solidFill>
-            <a:prstDash val="solid"/>
-          </a:ln>
-        </p:spPr>
-      </p:sp>
-      <p:sp>
-        <p:nvSpPr>
-          <p:cNvPr id="9" name="Terminal dot 2"/>
-          <p:cNvSpPr/>
-          <p:nvPr/>
-        </p:nvSpPr>
-        <p:spPr>
-          <a:xfrm>
-            <a:off x="950976" y="5413248"/>
-            <a:ext cx="118872" cy="118872"/>
-          </a:xfrm>
-          <a:prstGeom prst="ellipse">
-            <a:avLst/>
-          </a:prstGeom>
-          <a:solidFill>
-            <a:schemeClr val="accent3"/>
-          </a:solidFill>
-          <a:ln w="12700">
-            <a:solidFill>
-              <a:schemeClr val="accent3"/>
-            </a:solidFill>
-            <a:prstDash val="solid"/>
-          </a:ln>
-        </p:spPr>
-      </p:sp>
-      <p:sp>
-        <p:nvSpPr>
-          <p:cNvPr id="10" name="Terminal dot 3"/>
-          <p:cNvSpPr/>
-          <p:nvPr/>
-        </p:nvSpPr>
-        <p:spPr>
-          <a:xfrm>
-            <a:off x="1152144" y="5413248"/>
-            <a:ext cx="118872" cy="118872"/>
-          </a:xfrm>
-          <a:prstGeom prst="ellipse">
-            <a:avLst/>
-          </a:prstGeom>
-          <a:solidFill>
-            <a:schemeClr val="accent1"/>
-          </a:solidFill>
-          <a:ln w="12700">
-            <a:solidFill>
-              <a:schemeClr val="accent1"/>
-            </a:solidFill>
-            <a:prstDash val="solid"/>
-          </a:ln>
-        </p:spPr>
-      </p:sp>
-      <p:sp>
-        <p:nvSpPr>
-          <p:cNvPr id="11" name="Terminal label"/>
+        </p:spPr>
+      </p:sp>
+      <p:sp>
+        <p:nvSpPr>
+          <p:cNvPr id="34" name="Tier 4 name"/>
           <p:cNvSpPr txBox="1"/>
           <p:nvPr/>
         </p:nvSpPr>
         <p:spPr>
           <a:xfrm>
-            <a:off x="1417320" y="5340096"/>
-            <a:ext cx="5760720" cy="256032"/>
-          </a:xfrm>
-          <a:prstGeom prst="rect">
-            <a:avLst/>
-          </a:prstGeom>
-          <a:noFill/>
-          <a:ln/>
-        </p:spPr>
-        <p:txBody>
-          <a:bodyPr wrap="square" lIns="0" tIns="0" rIns="0" bIns="0" rtlCol="0" anchor="ctr"/>
-          <a:lstStyle/>
-          <a:p>
-            <a:pPr indent="0" marL="0">
-              <a:buNone/>
-            </a:pPr>
-            <a:r>
-              <a:rPr lang="en-US" sz="1000" dirty="0">
-                <a:solidFill>
-                  <a:schemeClr val="bg2"/>
+            <a:off x="9262872" y="4709160"/>
+            <a:ext cx="2286000" cy="365760"/>
+          </a:xfrm>
+          <a:prstGeom prst="rect">
+            <a:avLst/>
+          </a:prstGeom>
+          <a:noFill/>
+          <a:ln/>
+        </p:spPr>
+        <p:txBody>
+          <a:bodyPr wrap="square" lIns="0" tIns="0" rIns="0" bIns="0" rtlCol="0" anchor="t"/>
+          <a:lstStyle/>
+          <a:p>
+            <a:pPr indent="0" marL="0">
+              <a:buNone/>
+            </a:pPr>
+            <a:r>
+              <a:rPr lang="en-US" sz="1500" dirty="0">
+                <a:solidFill>
+                  <a:schemeClr val="bg1"/>
+                </a:solidFill>
+              </a:rPr>
+              <a:t>Trusted</a:t>
+            </a:r>
+            <a:endParaRPr lang="en-US" sz="1500" dirty="0"/>
+          </a:p>
+        </p:txBody>
+      </p:sp>
+      <p:sp>
+        <p:nvSpPr>
+          <p:cNvPr id="35" name="Tier 4 hold"/>
+          <p:cNvSpPr txBox="1"/>
+          <p:nvPr/>
+        </p:nvSpPr>
+        <p:spPr>
+          <a:xfrm>
+            <a:off x="9262872" y="5029200"/>
+            <a:ext cx="2286000" cy="457200"/>
+          </a:xfrm>
+          <a:prstGeom prst="rect">
+            <a:avLst/>
+          </a:prstGeom>
+          <a:noFill/>
+          <a:ln/>
+        </p:spPr>
+        <p:txBody>
+          <a:bodyPr wrap="square" lIns="0" tIns="0" rIns="0" bIns="0" rtlCol="0" anchor="t"/>
+          <a:lstStyle/>
+          <a:p>
+            <a:pPr indent="0" marL="0">
+              <a:buNone/>
+            </a:pPr>
+            <a:r>
+              <a:rPr lang="en-US" sz="2400" b="1" dirty="0">
+                <a:solidFill>
+                  <a:schemeClr val="accent1"/>
                 </a:solidFill>
                 <a:latin typeface="+mj-lt" pitchFamily="34" charset="0"/>
                 <a:ea typeface="+mj-lt" pitchFamily="34" charset="-122"/>
                 <a:cs typeface="+mj-lt" pitchFamily="34" charset="-120"/>
               </a:rPr>
-              <a:t>the program on Explorer</a:t>
-            </a:r>
-            <a:endParaRPr lang="en-US" sz="1000" dirty="0"/>
-          </a:p>
-        </p:txBody>
-      </p:sp>
-      <p:sp>
-        <p:nvSpPr>
-          <p:cNvPr id="12" name="Terminal text"/>
+              <a:t>instant</a:t>
+            </a:r>
+            <a:endParaRPr lang="en-US" sz="2400" dirty="0"/>
+          </a:p>
+        </p:txBody>
+      </p:sp>
+      <p:sp>
+        <p:nvSpPr>
+          <p:cNvPr id="36" name="Quip"/>
           <p:cNvSpPr txBox="1"/>
           <p:nvPr/>
         </p:nvSpPr>
         <p:spPr>
           <a:xfrm>
-            <a:off x="822960" y="5696712"/>
-            <a:ext cx="6355080" cy="365760"/>
+            <a:off x="548640" y="5760720"/>
+            <a:ext cx="11064240" cy="365760"/>
           </a:xfrm>
           <a:prstGeom prst="rect">
             <a:avLst/>
@@ -4625,13 +5213,10 @@
           <a:lstStyle/>
           <a:p>
             <a:pPr indent="0" marL="0">
-              <a:lnSpc>
-                <a:spcPct val="100000"/>
-              </a:lnSpc>
-              <a:buNone/>
-            </a:pPr>
-            <a:r>
-              <a:rPr lang="en-US" sz="1200" dirty="0">
+              <a:buNone/>
+            </a:pPr>
+            <a:r>
+              <a:rPr lang="en-US" sz="1600" b="1" dirty="0">
                 <a:solidFill>
                   <a:schemeClr val="accent1"/>
                 </a:solidFill>
@@ -4639,637 +5224,9 @@
                 <a:ea typeface="+mj-lt" pitchFamily="34" charset="-122"/>
                 <a:cs typeface="+mj-lt" pitchFamily="34" charset="-120"/>
               </a:rPr>
-              <a:t>explorer.solana.com/address/TessSeP5QV5Bxpvm73iEefdsTjgtTEokKSx7jqFn1CQ?cluster=devnet</a:t>
-            </a:r>
-            <a:endParaRPr lang="en-US" sz="1200" dirty="0"/>
-          </a:p>
-        </p:txBody>
-      </p:sp>
-      <p:sp>
-        <p:nvSpPr>
-          <p:cNvPr id="13" name="Where 1"/>
-          <p:cNvSpPr/>
-          <p:nvPr/>
-        </p:nvSpPr>
-        <p:spPr>
-          <a:xfrm>
-            <a:off x="7680960" y="1600200"/>
-            <a:ext cx="3959352" cy="1005840"/>
-          </a:xfrm>
-          <a:prstGeom prst="roundRect">
-            <a:avLst>
-              <a:gd name="adj" fmla="val 12727"/>
-            </a:avLst>
-          </a:prstGeom>
-          <a:solidFill>
-            <a:schemeClr val="tx2"/>
-          </a:solidFill>
-          <a:ln w="12700">
-            <a:solidFill>
-              <a:schemeClr val="accent2">
-                <a:alpha val="45000"/>
-              </a:schemeClr>
-            </a:solidFill>
-            <a:prstDash val="solid"/>
-          </a:ln>
-        </p:spPr>
-      </p:sp>
-      <p:sp>
-        <p:nvSpPr>
-          <p:cNvPr id="14" name="Icon chip"/>
-          <p:cNvSpPr/>
-          <p:nvPr/>
-        </p:nvSpPr>
-        <p:spPr>
-          <a:xfrm>
-            <a:off x="7836408" y="1819656"/>
-            <a:ext cx="548640" cy="548640"/>
-          </a:xfrm>
-          <a:prstGeom prst="ellipse">
-            <a:avLst/>
-          </a:prstGeom>
-          <a:solidFill>
-            <a:schemeClr val="accent1">
-              <a:alpha val="22000"/>
-            </a:schemeClr>
-          </a:solidFill>
-          <a:ln w="12700">
-            <a:solidFill>
-              <a:schemeClr val="accent1">
-                <a:alpha val="70000"/>
-              </a:schemeClr>
-            </a:solidFill>
-            <a:prstDash val="solid"/>
-          </a:ln>
-        </p:spPr>
-      </p:sp>
-      <p:pic>
-        <p:nvPicPr>
-          <p:cNvPr id="15" name="Icon" descr="preencoded.png">    </p:cNvPr>
-          <p:cNvPicPr>
-            <a:picLocks noChangeAspect="1"/>
-          </p:cNvPicPr>
-          <p:nvPr/>
-        </p:nvPicPr>
-        <p:blipFill>
-          <a:blip r:embed="rId2"/>
-          <a:stretch>
-            <a:fillRect/>
-          </a:stretch>
-        </p:blipFill>
-        <p:spPr>
-          <a:xfrm>
-            <a:off x="7973568" y="1956816"/>
-            <a:ext cx="274320" cy="274320"/>
-          </a:xfrm>
-          <a:prstGeom prst="rect">
-            <a:avLst/>
-          </a:prstGeom>
-        </p:spPr>
-      </p:pic>
-      <p:sp>
-        <p:nvSpPr>
-          <p:cNvPr id="16" name="Where 1 title"/>
-          <p:cNvSpPr txBox="1"/>
-          <p:nvPr/>
-        </p:nvSpPr>
-        <p:spPr>
-          <a:xfrm>
-            <a:off x="8522208" y="1709928"/>
-            <a:ext cx="3017520" cy="329184"/>
-          </a:xfrm>
-          <a:prstGeom prst="rect">
-            <a:avLst/>
-          </a:prstGeom>
-          <a:noFill/>
-          <a:ln/>
-        </p:spPr>
-        <p:txBody>
-          <a:bodyPr wrap="square" lIns="0" tIns="0" rIns="0" bIns="0" rtlCol="0" anchor="t"/>
-          <a:lstStyle/>
-          <a:p>
-            <a:pPr indent="0" marL="0">
-              <a:buNone/>
-            </a:pPr>
-            <a:r>
-              <a:rPr lang="en-US" sz="1400" b="1" dirty="0">
-                <a:solidFill>
-                  <a:schemeClr val="bg1"/>
-                </a:solidFill>
-                <a:latin typeface="+mj-lt" pitchFamily="34" charset="0"/>
-                <a:ea typeface="+mj-lt" pitchFamily="34" charset="-122"/>
-                <a:cs typeface="+mj-lt" pitchFamily="34" charset="-120"/>
-              </a:rPr>
-              <a:t>localhost:5173/#/network</a:t>
-            </a:r>
-            <a:endParaRPr lang="en-US" sz="1400" dirty="0"/>
-          </a:p>
-        </p:txBody>
-      </p:sp>
-      <p:sp>
-        <p:nvSpPr>
-          <p:cNvPr id="17" name="Where 1 body"/>
-          <p:cNvSpPr txBox="1"/>
-          <p:nvPr/>
-        </p:nvSpPr>
-        <p:spPr>
-          <a:xfrm>
-            <a:off x="8522208" y="2039112"/>
-            <a:ext cx="3017520" cy="530352"/>
-          </a:xfrm>
-          <a:prstGeom prst="rect">
-            <a:avLst/>
-          </a:prstGeom>
-          <a:noFill/>
-          <a:ln/>
-        </p:spPr>
-        <p:txBody>
-          <a:bodyPr wrap="square" lIns="0" tIns="0" rIns="0" bIns="0" rtlCol="0" anchor="t"/>
-          <a:lstStyle/>
-          <a:p>
-            <a:pPr indent="0" marL="0">
-              <a:buNone/>
-            </a:pPr>
-            <a:r>
-              <a:rPr lang="en-US" sz="1400" dirty="0">
-                <a:solidFill>
-                  <a:schemeClr val="bg2"/>
-                </a:solidFill>
-              </a:rPr>
-              <a:t>live graph + “on-chain, just now” feed. Click a row → Explorer.</a:t>
-            </a:r>
-            <a:endParaRPr lang="en-US" sz="1400" dirty="0"/>
-          </a:p>
-        </p:txBody>
-      </p:sp>
-      <p:sp>
-        <p:nvSpPr>
-          <p:cNvPr id="18" name="Where 2"/>
-          <p:cNvSpPr/>
-          <p:nvPr/>
-        </p:nvSpPr>
-        <p:spPr>
-          <a:xfrm>
-            <a:off x="7680960" y="2743200"/>
-            <a:ext cx="3959352" cy="1005840"/>
-          </a:xfrm>
-          <a:prstGeom prst="roundRect">
-            <a:avLst>
-              <a:gd name="adj" fmla="val 12727"/>
-            </a:avLst>
-          </a:prstGeom>
-          <a:solidFill>
-            <a:schemeClr val="tx2"/>
-          </a:solidFill>
-          <a:ln w="12700">
-            <a:solidFill>
-              <a:schemeClr val="accent2">
-                <a:alpha val="45000"/>
-              </a:schemeClr>
-            </a:solidFill>
-            <a:prstDash val="solid"/>
-          </a:ln>
-        </p:spPr>
-      </p:sp>
-      <p:sp>
-        <p:nvSpPr>
-          <p:cNvPr id="19" name="Icon chip"/>
-          <p:cNvSpPr/>
-          <p:nvPr/>
-        </p:nvSpPr>
-        <p:spPr>
-          <a:xfrm>
-            <a:off x="7836408" y="2962656"/>
-            <a:ext cx="548640" cy="548640"/>
-          </a:xfrm>
-          <a:prstGeom prst="ellipse">
-            <a:avLst/>
-          </a:prstGeom>
-          <a:solidFill>
-            <a:schemeClr val="accent5">
-              <a:alpha val="22000"/>
-            </a:schemeClr>
-          </a:solidFill>
-          <a:ln w="12700">
-            <a:solidFill>
-              <a:schemeClr val="accent5">
-                <a:alpha val="70000"/>
-              </a:schemeClr>
-            </a:solidFill>
-            <a:prstDash val="solid"/>
-          </a:ln>
-        </p:spPr>
-      </p:sp>
-      <p:pic>
-        <p:nvPicPr>
-          <p:cNvPr id="20" name="Icon" descr="preencoded.png">    </p:cNvPr>
-          <p:cNvPicPr>
-            <a:picLocks noChangeAspect="1"/>
-          </p:cNvPicPr>
-          <p:nvPr/>
-        </p:nvPicPr>
-        <p:blipFill>
-          <a:blip r:embed="rId3"/>
-          <a:stretch>
-            <a:fillRect/>
-          </a:stretch>
-        </p:blipFill>
-        <p:spPr>
-          <a:xfrm>
-            <a:off x="7973568" y="3099816"/>
-            <a:ext cx="274320" cy="274320"/>
-          </a:xfrm>
-          <a:prstGeom prst="rect">
-            <a:avLst/>
-          </a:prstGeom>
-        </p:spPr>
-      </p:pic>
-      <p:sp>
-        <p:nvSpPr>
-          <p:cNvPr id="21" name="Where 2 title"/>
-          <p:cNvSpPr txBox="1"/>
-          <p:nvPr/>
-        </p:nvSpPr>
-        <p:spPr>
-          <a:xfrm>
-            <a:off x="8522208" y="2852928"/>
-            <a:ext cx="3017520" cy="329184"/>
-          </a:xfrm>
-          <a:prstGeom prst="rect">
-            <a:avLst/>
-          </a:prstGeom>
-          <a:noFill/>
-          <a:ln/>
-        </p:spPr>
-        <p:txBody>
-          <a:bodyPr wrap="square" lIns="0" tIns="0" rIns="0" bIns="0" rtlCol="0" anchor="t"/>
-          <a:lstStyle/>
-          <a:p>
-            <a:pPr indent="0" marL="0">
-              <a:buNone/>
-            </a:pPr>
-            <a:r>
-              <a:rPr lang="en-US" sz="1400" b="1" dirty="0">
-                <a:solidFill>
-                  <a:schemeClr val="bg1"/>
-                </a:solidFill>
-                <a:latin typeface="+mj-lt" pitchFamily="34" charset="0"/>
-                <a:ea typeface="+mj-lt" pitchFamily="34" charset="-122"/>
-                <a:cs typeface="+mj-lt" pitchFamily="34" charset="-120"/>
-              </a:rPr>
-              <a:t>#/agents → pick one</a:t>
-            </a:r>
-            <a:endParaRPr lang="en-US" sz="1400" dirty="0"/>
-          </a:p>
-        </p:txBody>
-      </p:sp>
-      <p:sp>
-        <p:nvSpPr>
-          <p:cNvPr id="22" name="Where 2 body"/>
-          <p:cNvSpPr txBox="1"/>
-          <p:nvPr/>
-        </p:nvSpPr>
-        <p:spPr>
-          <a:xfrm>
-            <a:off x="8522208" y="3182112"/>
-            <a:ext cx="3017520" cy="530352"/>
-          </a:xfrm>
-          <a:prstGeom prst="rect">
-            <a:avLst/>
-          </a:prstGeom>
-          <a:noFill/>
-          <a:ln/>
-        </p:spPr>
-        <p:txBody>
-          <a:bodyPr wrap="square" lIns="0" tIns="0" rIns="0" bIns="0" rtlCol="0" anchor="t"/>
-          <a:lstStyle/>
-          <a:p>
-            <a:pPr indent="0" marL="0">
-              <a:buNone/>
-            </a:pPr>
-            <a:r>
-              <a:rPr lang="en-US" sz="1400" dirty="0">
-                <a:solidFill>
-                  <a:schemeClr val="bg2"/>
-                </a:solidFill>
-              </a:rPr>
-              <a:t>credit file: score cached on-chain vs recomputed in your browser</a:t>
-            </a:r>
-            <a:endParaRPr lang="en-US" sz="1400" dirty="0"/>
-          </a:p>
-        </p:txBody>
-      </p:sp>
-      <p:sp>
-        <p:nvSpPr>
-          <p:cNvPr id="23" name="Where 3"/>
-          <p:cNvSpPr/>
-          <p:nvPr/>
-        </p:nvSpPr>
-        <p:spPr>
-          <a:xfrm>
-            <a:off x="7680960" y="3886200"/>
-            <a:ext cx="3959352" cy="1005840"/>
-          </a:xfrm>
-          <a:prstGeom prst="roundRect">
-            <a:avLst>
-              <a:gd name="adj" fmla="val 12727"/>
-            </a:avLst>
-          </a:prstGeom>
-          <a:solidFill>
-            <a:schemeClr val="tx2"/>
-          </a:solidFill>
-          <a:ln w="12700">
-            <a:solidFill>
-              <a:schemeClr val="accent2">
-                <a:alpha val="45000"/>
-              </a:schemeClr>
-            </a:solidFill>
-            <a:prstDash val="solid"/>
-          </a:ln>
-        </p:spPr>
-      </p:sp>
-      <p:sp>
-        <p:nvSpPr>
-          <p:cNvPr id="24" name="Icon chip"/>
-          <p:cNvSpPr/>
-          <p:nvPr/>
-        </p:nvSpPr>
-        <p:spPr>
-          <a:xfrm>
-            <a:off x="7836408" y="4105656"/>
-            <a:ext cx="548640" cy="548640"/>
-          </a:xfrm>
-          <a:prstGeom prst="ellipse">
-            <a:avLst/>
-          </a:prstGeom>
-          <a:solidFill>
-            <a:schemeClr val="accent2">
-              <a:alpha val="22000"/>
-            </a:schemeClr>
-          </a:solidFill>
-          <a:ln w="12700">
-            <a:solidFill>
-              <a:schemeClr val="accent2">
-                <a:alpha val="70000"/>
-              </a:schemeClr>
-            </a:solidFill>
-            <a:prstDash val="solid"/>
-          </a:ln>
-        </p:spPr>
-      </p:sp>
-      <p:pic>
-        <p:nvPicPr>
-          <p:cNvPr id="25" name="Icon" descr="preencoded.png">    </p:cNvPr>
-          <p:cNvPicPr>
-            <a:picLocks noChangeAspect="1"/>
-          </p:cNvPicPr>
-          <p:nvPr/>
-        </p:nvPicPr>
-        <p:blipFill>
-          <a:blip r:embed="rId4"/>
-          <a:stretch>
-            <a:fillRect/>
-          </a:stretch>
-        </p:blipFill>
-        <p:spPr>
-          <a:xfrm>
-            <a:off x="7973568" y="4242816"/>
-            <a:ext cx="274320" cy="274320"/>
-          </a:xfrm>
-          <a:prstGeom prst="rect">
-            <a:avLst/>
-          </a:prstGeom>
-        </p:spPr>
-      </p:pic>
-      <p:sp>
-        <p:nvSpPr>
-          <p:cNvPr id="26" name="Where 3 title"/>
-          <p:cNvSpPr txBox="1"/>
-          <p:nvPr/>
-        </p:nvSpPr>
-        <p:spPr>
-          <a:xfrm>
-            <a:off x="8522208" y="3995928"/>
-            <a:ext cx="3017520" cy="329184"/>
-          </a:xfrm>
-          <a:prstGeom prst="rect">
-            <a:avLst/>
-          </a:prstGeom>
-          <a:noFill/>
-          <a:ln/>
-        </p:spPr>
-        <p:txBody>
-          <a:bodyPr wrap="square" lIns="0" tIns="0" rIns="0" bIns="0" rtlCol="0" anchor="t"/>
-          <a:lstStyle/>
-          <a:p>
-            <a:pPr indent="0" marL="0">
-              <a:buNone/>
-            </a:pPr>
-            <a:r>
-              <a:rPr lang="en-US" sz="1400" b="1" dirty="0">
-                <a:solidFill>
-                  <a:schemeClr val="bg1"/>
-                </a:solidFill>
-                <a:latin typeface="+mj-lt" pitchFamily="34" charset="0"/>
-                <a:ea typeface="+mj-lt" pitchFamily="34" charset="-122"/>
-                <a:cs typeface="+mj-lt" pitchFamily="34" charset="-120"/>
-              </a:rPr>
-              <a:t>Solana Explorer (devnet)</a:t>
-            </a:r>
-            <a:endParaRPr lang="en-US" sz="1400" dirty="0"/>
-          </a:p>
-        </p:txBody>
-      </p:sp>
-      <p:sp>
-        <p:nvSpPr>
-          <p:cNvPr id="27" name="Where 3 body"/>
-          <p:cNvSpPr txBox="1"/>
-          <p:nvPr/>
-        </p:nvSpPr>
-        <p:spPr>
-          <a:xfrm>
-            <a:off x="8522208" y="4325112"/>
-            <a:ext cx="3017520" cy="530352"/>
-          </a:xfrm>
-          <a:prstGeom prst="rect">
-            <a:avLst/>
-          </a:prstGeom>
-          <a:noFill/>
-          <a:ln/>
-        </p:spPr>
-        <p:txBody>
-          <a:bodyPr wrap="square" lIns="0" tIns="0" rIns="0" bIns="0" rtlCol="0" anchor="t"/>
-          <a:lstStyle/>
-          <a:p>
-            <a:pPr indent="0" marL="0">
-              <a:buNone/>
-            </a:pPr>
-            <a:r>
-              <a:rPr lang="en-US" sz="1400" dirty="0">
-                <a:solidFill>
-                  <a:schemeClr val="bg2"/>
-                </a:solidFill>
-              </a:rPr>
-              <a:t>search any wallet or order. Solscan works too with ?cluster=devnet</a:t>
-            </a:r>
-            <a:endParaRPr lang="en-US" sz="1400" dirty="0"/>
-          </a:p>
-        </p:txBody>
-      </p:sp>
-      <p:sp>
-        <p:nvSpPr>
-          <p:cNvPr id="28" name="Where 4"/>
-          <p:cNvSpPr/>
-          <p:nvPr/>
-        </p:nvSpPr>
-        <p:spPr>
-          <a:xfrm>
-            <a:off x="7680960" y="5029200"/>
-            <a:ext cx="3959352" cy="1005840"/>
-          </a:xfrm>
-          <a:prstGeom prst="roundRect">
-            <a:avLst>
-              <a:gd name="adj" fmla="val 12727"/>
-            </a:avLst>
-          </a:prstGeom>
-          <a:solidFill>
-            <a:schemeClr val="tx2"/>
-          </a:solidFill>
-          <a:ln w="12700">
-            <a:solidFill>
-              <a:schemeClr val="accent2">
-                <a:alpha val="45000"/>
-              </a:schemeClr>
-            </a:solidFill>
-            <a:prstDash val="solid"/>
-          </a:ln>
-        </p:spPr>
-      </p:sp>
-      <p:sp>
-        <p:nvSpPr>
-          <p:cNvPr id="29" name="Icon chip"/>
-          <p:cNvSpPr/>
-          <p:nvPr/>
-        </p:nvSpPr>
-        <p:spPr>
-          <a:xfrm>
-            <a:off x="7836408" y="5248656"/>
-            <a:ext cx="548640" cy="548640"/>
-          </a:xfrm>
-          <a:prstGeom prst="ellipse">
-            <a:avLst/>
-          </a:prstGeom>
-          <a:solidFill>
-            <a:schemeClr val="accent3">
-              <a:alpha val="22000"/>
-            </a:schemeClr>
-          </a:solidFill>
-          <a:ln w="12700">
-            <a:solidFill>
-              <a:schemeClr val="accent3">
-                <a:alpha val="70000"/>
-              </a:schemeClr>
-            </a:solidFill>
-            <a:prstDash val="solid"/>
-          </a:ln>
-        </p:spPr>
-      </p:sp>
-      <p:pic>
-        <p:nvPicPr>
-          <p:cNvPr id="30" name="Icon" descr="preencoded.png">    </p:cNvPr>
-          <p:cNvPicPr>
-            <a:picLocks noChangeAspect="1"/>
-          </p:cNvPicPr>
-          <p:nvPr/>
-        </p:nvPicPr>
-        <p:blipFill>
-          <a:blip r:embed="rId5"/>
-          <a:stretch>
-            <a:fillRect/>
-          </a:stretch>
-        </p:blipFill>
-        <p:spPr>
-          <a:xfrm>
-            <a:off x="7973568" y="5385816"/>
-            <a:ext cx="274320" cy="274320"/>
-          </a:xfrm>
-          <a:prstGeom prst="rect">
-            <a:avLst/>
-          </a:prstGeom>
-        </p:spPr>
-      </p:pic>
-      <p:sp>
-        <p:nvSpPr>
-          <p:cNvPr id="31" name="Where 4 title"/>
-          <p:cNvSpPr txBox="1"/>
-          <p:nvPr/>
-        </p:nvSpPr>
-        <p:spPr>
-          <a:xfrm>
-            <a:off x="8522208" y="5138928"/>
-            <a:ext cx="3017520" cy="329184"/>
-          </a:xfrm>
-          <a:prstGeom prst="rect">
-            <a:avLst/>
-          </a:prstGeom>
-          <a:noFill/>
-          <a:ln/>
-        </p:spPr>
-        <p:txBody>
-          <a:bodyPr wrap="square" lIns="0" tIns="0" rIns="0" bIns="0" rtlCol="0" anchor="t"/>
-          <a:lstStyle/>
-          <a:p>
-            <a:pPr indent="0" marL="0">
-              <a:buNone/>
-            </a:pPr>
-            <a:r>
-              <a:rPr lang="en-US" sz="1400" b="1" dirty="0">
-                <a:solidFill>
-                  <a:schemeClr val="bg1"/>
-                </a:solidFill>
-                <a:latin typeface="+mj-lt" pitchFamily="34" charset="0"/>
-                <a:ea typeface="+mj-lt" pitchFamily="34" charset="-122"/>
-                <a:cs typeface="+mj-lt" pitchFamily="34" charset="-120"/>
-              </a:rPr>
-              <a:t>your terminal</a:t>
-            </a:r>
-            <a:endParaRPr lang="en-US" sz="1400" dirty="0"/>
-          </a:p>
-        </p:txBody>
-      </p:sp>
-      <p:sp>
-        <p:nvSpPr>
-          <p:cNvPr id="32" name="Where 4 body"/>
-          <p:cNvSpPr txBox="1"/>
-          <p:nvPr/>
-        </p:nvSpPr>
-        <p:spPr>
-          <a:xfrm>
-            <a:off x="8522208" y="5468112"/>
-            <a:ext cx="3017520" cy="530352"/>
-          </a:xfrm>
-          <a:prstGeom prst="rect">
-            <a:avLst/>
-          </a:prstGeom>
-          <a:noFill/>
-          <a:ln/>
-        </p:spPr>
-        <p:txBody>
-          <a:bodyPr wrap="square" lIns="0" tIns="0" rIns="0" bIns="0" rtlCol="0" anchor="t"/>
-          <a:lstStyle/>
-          <a:p>
-            <a:pPr indent="0" marL="0">
-              <a:buNone/>
-            </a:pPr>
-            <a:r>
-              <a:rPr lang="en-US" sz="1400" dirty="0">
-                <a:solidFill>
-                  <a:schemeClr val="bg2"/>
-                </a:solidFill>
-              </a:rPr>
-              <a:t>npm run buy prints the order and settle-tx links</a:t>
-            </a:r>
-            <a:endParaRPr lang="en-US" sz="1400" dirty="0"/>
+              <a:t>strangers wait. OGs settle in the same tx. not gatekeeping, just credit.</a:t>
+            </a:r>
+            <a:endParaRPr lang="en-US" sz="1600" dirty="0"/>
           </a:p>
         </p:txBody>
       </p:sp>
@@ -5376,7 +5333,7 @@
                 <a:ea typeface="+mj-lt" pitchFamily="34" charset="-122"/>
                 <a:cs typeface="+mj-lt" pitchFamily="34" charset="-120"/>
               </a:rPr>
-              <a:t>// SAME ORDER, TWO SCREENS</a:t>
+              <a:t>// STEP 5 · EVERYONE</a:t>
             </a:r>
             <a:endParaRPr lang="en-US" sz="1200" dirty="0"/>
           </a:p>
@@ -5414,7 +5371,7 @@
                   <a:schemeClr val="bg1"/>
                 </a:solidFill>
               </a:rPr>
-              <a:t>seller POV vs buyer POV 👀</a:t>
+              <a:t>watch it live 📡</a:t>
             </a:r>
             <a:endParaRPr lang="en-US" sz="3600" dirty="0"/>
           </a:p>
@@ -5422,57 +5379,18 @@
       </p:sp>
       <p:sp>
         <p:nvSpPr>
-          <p:cNvPr id="4" name="POV 1 heading"/>
-          <p:cNvSpPr txBox="1"/>
-          <p:nvPr/>
-        </p:nvSpPr>
-        <p:spPr>
-          <a:xfrm>
-            <a:off x="548640" y="1572768"/>
-            <a:ext cx="5394960" cy="384048"/>
-          </a:xfrm>
-          <a:prstGeom prst="rect">
-            <a:avLst/>
-          </a:prstGeom>
-          <a:noFill/>
-          <a:ln/>
-        </p:spPr>
-        <p:txBody>
-          <a:bodyPr wrap="square" lIns="0" tIns="0" rIns="0" bIns="0" rtlCol="0" anchor="t"/>
-          <a:lstStyle/>
-          <a:p>
-            <a:pPr indent="0" marL="0">
-              <a:buNone/>
-            </a:pPr>
-            <a:r>
-              <a:rPr lang="en-US" sz="1900" b="1" dirty="0">
-                <a:solidFill>
-                  <a:schemeClr val="accent4"/>
-                </a:solidFill>
-                <a:latin typeface="+mj-lt" pitchFamily="34" charset="0"/>
-                <a:ea typeface="+mj-lt" pitchFamily="34" charset="-122"/>
-                <a:cs typeface="+mj-lt" pitchFamily="34" charset="-120"/>
-              </a:rPr>
-              <a:t>SELLER SEES</a:t>
-            </a:r>
-            <a:endParaRPr lang="en-US" sz="1900" dirty="0"/>
-          </a:p>
-        </p:txBody>
-      </p:sp>
-      <p:sp>
-        <p:nvSpPr>
-          <p:cNvPr id="5" name="POV 1 terminal"/>
+          <p:cNvPr id="4" name="Screenshot frame"/>
           <p:cNvSpPr/>
           <p:nvPr/>
         </p:nvSpPr>
         <p:spPr>
           <a:xfrm>
-            <a:off x="548640" y="2057400"/>
-            <a:ext cx="5394960" cy="1188720"/>
+            <a:off x="548640" y="1600200"/>
+            <a:ext cx="6858000" cy="3108960"/>
           </a:xfrm>
           <a:prstGeom prst="roundRect">
             <a:avLst>
-              <a:gd name="adj" fmla="val 10769"/>
+              <a:gd name="adj" fmla="val 4118"/>
             </a:avLst>
           </a:prstGeom>
           <a:solidFill>
@@ -5495,342 +5413,80 @@
           </a:effectLst>
         </p:spPr>
       </p:sp>
-      <p:sp>
-        <p:nvSpPr>
-          <p:cNvPr id="6" name="POV 1 terminal dot 1"/>
+      <p:pic>
+        <p:nvPicPr>
+          <p:cNvPr id="5" name="Network screenshot" descr="The Tessera live network page: a graph of agents and orders on devnet and a feed of recent orders">    </p:cNvPr>
+          <p:cNvPicPr>
+            <a:picLocks noChangeAspect="1"/>
+          </p:cNvPicPr>
+          <p:nvPr/>
+        </p:nvPicPr>
+        <p:blipFill>
+          <a:blip r:embed="rId1"/>
+          <a:stretch>
+            <a:fillRect/>
+          </a:stretch>
+        </p:blipFill>
+        <p:spPr>
+          <a:xfrm>
+            <a:off x="640080" y="1691640"/>
+            <a:ext cx="6675120" cy="2898648"/>
+          </a:xfrm>
+          <a:prstGeom prst="rect">
+            <a:avLst/>
+          </a:prstGeom>
+        </p:spPr>
+      </p:pic>
+      <p:sp>
+        <p:nvSpPr>
+          <p:cNvPr id="6" name="Screenshot caption"/>
+          <p:cNvSpPr txBox="1"/>
+          <p:nvPr/>
+        </p:nvSpPr>
+        <p:spPr>
+          <a:xfrm>
+            <a:off x="548640" y="4773168"/>
+            <a:ext cx="6858000" cy="457200"/>
+          </a:xfrm>
+          <a:prstGeom prst="rect">
+            <a:avLst/>
+          </a:prstGeom>
+          <a:noFill/>
+          <a:ln/>
+        </p:spPr>
+        <p:txBody>
+          <a:bodyPr wrap="square" lIns="0" tIns="0" rIns="0" bIns="0" rtlCol="0" anchor="t"/>
+          <a:lstStyle/>
+          <a:p>
+            <a:pPr indent="0" marL="0">
+              <a:buNone/>
+            </a:pPr>
+            <a:r>
+              <a:rPr lang="en-US" sz="1200" dirty="0">
+                <a:solidFill>
+                  <a:schemeClr val="bg2"/>
+                </a:solidFill>
+              </a:rPr>
+              <a:t>your devnet, drawn by the site: squares = shops, circles = buyers, the island on the left = washer’s ring</a:t>
+            </a:r>
+            <a:endParaRPr lang="en-US" sz="1200" dirty="0"/>
+          </a:p>
+        </p:txBody>
+      </p:sp>
+      <p:sp>
+        <p:nvSpPr>
+          <p:cNvPr id="7" name="Terminal"/>
           <p:cNvSpPr/>
           <p:nvPr/>
         </p:nvSpPr>
         <p:spPr>
           <a:xfrm>
-            <a:off x="749808" y="2212848"/>
-            <a:ext cx="118872" cy="118872"/>
-          </a:xfrm>
-          <a:prstGeom prst="ellipse">
-            <a:avLst/>
-          </a:prstGeom>
-          <a:solidFill>
-            <a:schemeClr val="accent6"/>
-          </a:solidFill>
-          <a:ln w="12700">
-            <a:solidFill>
-              <a:schemeClr val="accent6"/>
-            </a:solidFill>
-            <a:prstDash val="solid"/>
-          </a:ln>
-        </p:spPr>
-      </p:sp>
-      <p:sp>
-        <p:nvSpPr>
-          <p:cNvPr id="7" name="POV 1 terminal dot 2"/>
-          <p:cNvSpPr/>
-          <p:nvPr/>
-        </p:nvSpPr>
-        <p:spPr>
-          <a:xfrm>
-            <a:off x="950976" y="2212848"/>
-            <a:ext cx="118872" cy="118872"/>
-          </a:xfrm>
-          <a:prstGeom prst="ellipse">
-            <a:avLst/>
-          </a:prstGeom>
-          <a:solidFill>
-            <a:schemeClr val="accent3"/>
-          </a:solidFill>
-          <a:ln w="12700">
-            <a:solidFill>
-              <a:schemeClr val="accent3"/>
-            </a:solidFill>
-            <a:prstDash val="solid"/>
-          </a:ln>
-        </p:spPr>
-      </p:sp>
-      <p:sp>
-        <p:nvSpPr>
-          <p:cNvPr id="8" name="POV 1 terminal dot 3"/>
-          <p:cNvSpPr/>
-          <p:nvPr/>
-        </p:nvSpPr>
-        <p:spPr>
-          <a:xfrm>
-            <a:off x="1152144" y="2212848"/>
-            <a:ext cx="118872" cy="118872"/>
-          </a:xfrm>
-          <a:prstGeom prst="ellipse">
-            <a:avLst/>
-          </a:prstGeom>
-          <a:solidFill>
-            <a:schemeClr val="accent1"/>
-          </a:solidFill>
-          <a:ln w="12700">
-            <a:solidFill>
-              <a:schemeClr val="accent1"/>
-            </a:solidFill>
-            <a:prstDash val="solid"/>
-          </a:ln>
-        </p:spPr>
-      </p:sp>
-      <p:sp>
-        <p:nvSpPr>
-          <p:cNvPr id="9" name="POV 1 terminal label"/>
-          <p:cNvSpPr txBox="1"/>
-          <p:nvPr/>
-        </p:nvSpPr>
-        <p:spPr>
-          <a:xfrm>
-            <a:off x="1417320" y="2139696"/>
-            <a:ext cx="4297680" cy="256032"/>
-          </a:xfrm>
-          <a:prstGeom prst="rect">
-            <a:avLst/>
-          </a:prstGeom>
-          <a:noFill/>
-          <a:ln/>
-        </p:spPr>
-        <p:txBody>
-          <a:bodyPr wrap="square" lIns="0" tIns="0" rIns="0" bIns="0" rtlCol="0" anchor="ctr"/>
-          <a:lstStyle/>
-          <a:p>
-            <a:pPr indent="0" marL="0">
-              <a:buNone/>
-            </a:pPr>
-            <a:r>
-              <a:rPr lang="en-US" sz="1000" dirty="0">
-                <a:solidFill>
-                  <a:schemeClr val="bg2"/>
-                </a:solidFill>
-                <a:latin typeface="+mj-lt" pitchFamily="34" charset="0"/>
-                <a:ea typeface="+mj-lt" pitchFamily="34" charset="-122"/>
-                <a:cs typeface="+mj-lt" pitchFamily="34" charset="-120"/>
-              </a:rPr>
-              <a:t>terminal 1 · seller logs</a:t>
-            </a:r>
-            <a:endParaRPr lang="en-US" sz="1000" dirty="0"/>
-          </a:p>
-        </p:txBody>
-      </p:sp>
-      <p:sp>
-        <p:nvSpPr>
-          <p:cNvPr id="10" name="POV 1 terminal text"/>
-          <p:cNvSpPr txBox="1"/>
-          <p:nvPr/>
-        </p:nvSpPr>
-        <p:spPr>
-          <a:xfrm>
-            <a:off x="822960" y="2496312"/>
-            <a:ext cx="4892040" cy="640080"/>
-          </a:xfrm>
-          <a:prstGeom prst="rect">
-            <a:avLst/>
-          </a:prstGeom>
-          <a:noFill/>
-          <a:ln/>
-        </p:spPr>
-        <p:txBody>
-          <a:bodyPr wrap="square" lIns="0" tIns="0" rIns="0" bIns="0" rtlCol="0" anchor="t"/>
-          <a:lstStyle/>
-          <a:p>
-            <a:pPr indent="0" marL="0">
-              <a:lnSpc>
-                <a:spcPct val="115000"/>
-              </a:lnSpc>
-              <a:buNone/>
-            </a:pPr>
-            <a:r>
-              <a:rPr lang="en-US" sz="1200" dirty="0">
-                <a:solidFill>
-                  <a:schemeClr val="accent1"/>
-                </a:solidFill>
-                <a:latin typeface="+mj-lt" pitchFamily="34" charset="0"/>
-                <a:ea typeface="+mj-lt" pitchFamily="34" charset="-122"/>
-                <a:cs typeface="+mj-lt" pitchFamily="34" charset="-120"/>
-              </a:rPr>
-              <a:t>[crank] released &lt;order&gt; to atlas after a 120s hold</a:t>
-            </a:r>
-            <a:endParaRPr lang="en-US" sz="1200" dirty="0"/>
-          </a:p>
-          <a:p>
-            <a:pPr indent="0" marL="0">
-              <a:lnSpc>
-                <a:spcPct val="115000"/>
-              </a:lnSpc>
-              <a:buNone/>
-            </a:pPr>
-            <a:r>
-              <a:rPr lang="en-US" sz="1200" dirty="0">
-                <a:solidFill>
-                  <a:schemeClr val="bg2"/>
-                </a:solidFill>
-                <a:latin typeface="+mj-lt" pitchFamily="34" charset="0"/>
-                <a:ea typeface="+mj-lt" pitchFamily="34" charset="-122"/>
-                <a:cs typeface="+mj-lt" pitchFamily="34" charset="-120"/>
-              </a:rPr>
-              <a:t>[arbiter] &lt;order&gt;: delivery matches its hash</a:t>
-            </a:r>
-            <a:endParaRPr lang="en-US" sz="1200" dirty="0"/>
-          </a:p>
-        </p:txBody>
-      </p:sp>
-      <p:sp>
-        <p:nvSpPr>
-          <p:cNvPr id="11" name="POV 1 card"/>
-          <p:cNvSpPr/>
-          <p:nvPr/>
-        </p:nvSpPr>
-        <p:spPr>
-          <a:xfrm>
-            <a:off x="548640" y="3474720"/>
-            <a:ext cx="5394960" cy="2377440"/>
+            <a:off x="548640" y="5257800"/>
+            <a:ext cx="6858000" cy="914400"/>
           </a:xfrm>
           <a:prstGeom prst="roundRect">
             <a:avLst>
-              <a:gd name="adj" fmla="val 5385"/>
-            </a:avLst>
-          </a:prstGeom>
-          <a:solidFill>
-            <a:schemeClr val="accent4">
-              <a:alpha val="16000"/>
-            </a:schemeClr>
-          </a:solidFill>
-          <a:ln w="12700">
-            <a:solidFill>
-              <a:schemeClr val="accent4">
-                <a:alpha val="45000"/>
-              </a:schemeClr>
-            </a:solidFill>
-            <a:prstDash val="solid"/>
-          </a:ln>
-        </p:spPr>
-      </p:sp>
-      <p:sp>
-        <p:nvSpPr>
-          <p:cNvPr id="12" name="POV 1 list"/>
-          <p:cNvSpPr txBox="1"/>
-          <p:nvPr/>
-        </p:nvSpPr>
-        <p:spPr>
-          <a:xfrm>
-            <a:off x="822960" y="3675888"/>
-            <a:ext cx="4892040" cy="2057400"/>
-          </a:xfrm>
-          <a:prstGeom prst="rect">
-            <a:avLst/>
-          </a:prstGeom>
-          <a:noFill/>
-          <a:ln/>
-        </p:spPr>
-        <p:txBody>
-          <a:bodyPr wrap="square" lIns="0" tIns="0" rIns="0" bIns="0" rtlCol="0" anchor="t"/>
-          <a:lstStyle/>
-          <a:p>
-            <a:pPr marL="342900" indent="-342900">
-              <a:spcAft>
-                <a:spcPts val="1000"/>
-              </a:spcAft>
-              <a:buSzPct val="100000"/>
-              <a:buChar char="•"/>
-            </a:pPr>
-            <a:r>
-              <a:rPr lang="en-US" sz="1700" dirty="0">
-                <a:solidFill>
-                  <a:schemeClr val="bg1"/>
-                </a:solidFill>
-              </a:rPr>
-              <a:t>USDC arrives in the shop’s wallet (Explorer → token balances)</a:t>
-            </a:r>
-            <a:endParaRPr lang="en-US" sz="1700" dirty="0"/>
-          </a:p>
-          <a:p>
-            <a:pPr marL="342900" indent="-342900">
-              <a:spcAft>
-                <a:spcPts val="1000"/>
-              </a:spcAft>
-              <a:buSzPct val="100000"/>
-              <a:buChar char="•"/>
-            </a:pPr>
-            <a:r>
-              <a:rPr lang="en-US" sz="1700" dirty="0">
-                <a:solidFill>
-                  <a:schemeClr val="bg1"/>
-                </a:solidFill>
-              </a:rPr>
-              <a:t>1% goes to the treasury</a:t>
-            </a:r>
-            <a:endParaRPr lang="en-US" sz="1700" dirty="0"/>
-          </a:p>
-          <a:p>
-            <a:pPr marL="342900" indent="-342900">
-              <a:spcAft>
-                <a:spcPts val="1000"/>
-              </a:spcAft>
-              <a:buSzPct val="100000"/>
-              <a:buChar char="•"/>
-            </a:pPr>
-            <a:r>
-              <a:rPr lang="en-US" sz="1700" dirty="0">
-                <a:solidFill>
-                  <a:schemeClr val="bg1"/>
-                </a:solidFill>
-              </a:rPr>
-              <a:t>Score and reviews update on the shop’s credit file</a:t>
-            </a:r>
-            <a:endParaRPr lang="en-US" sz="1700" dirty="0"/>
-          </a:p>
-        </p:txBody>
-      </p:sp>
-      <p:sp>
-        <p:nvSpPr>
-          <p:cNvPr id="13" name="POV 2 heading"/>
-          <p:cNvSpPr txBox="1"/>
-          <p:nvPr/>
-        </p:nvSpPr>
-        <p:spPr>
-          <a:xfrm>
-            <a:off x="6245352" y="1572768"/>
-            <a:ext cx="5394960" cy="384048"/>
-          </a:xfrm>
-          <a:prstGeom prst="rect">
-            <a:avLst/>
-          </a:prstGeom>
-          <a:noFill/>
-          <a:ln/>
-        </p:spPr>
-        <p:txBody>
-          <a:bodyPr wrap="square" lIns="0" tIns="0" rIns="0" bIns="0" rtlCol="0" anchor="t"/>
-          <a:lstStyle/>
-          <a:p>
-            <a:pPr indent="0" marL="0">
-              <a:buNone/>
-            </a:pPr>
-            <a:r>
-              <a:rPr lang="en-US" sz="1900" b="1" dirty="0">
-                <a:solidFill>
-                  <a:schemeClr val="accent5"/>
-                </a:solidFill>
-                <a:latin typeface="+mj-lt" pitchFamily="34" charset="0"/>
-                <a:ea typeface="+mj-lt" pitchFamily="34" charset="-122"/>
-                <a:cs typeface="+mj-lt" pitchFamily="34" charset="-120"/>
-              </a:rPr>
-              <a:t>BUYER SEES</a:t>
-            </a:r>
-            <a:endParaRPr lang="en-US" sz="1900" dirty="0"/>
-          </a:p>
-        </p:txBody>
-      </p:sp>
-      <p:sp>
-        <p:nvSpPr>
-          <p:cNvPr id="14" name="POV 2 terminal"/>
-          <p:cNvSpPr/>
-          <p:nvPr/>
-        </p:nvSpPr>
-        <p:spPr>
-          <a:xfrm>
-            <a:off x="6245352" y="2057400"/>
-            <a:ext cx="5394960" cy="1188720"/>
-          </a:xfrm>
-          <a:prstGeom prst="roundRect">
-            <a:avLst>
-              <a:gd name="adj" fmla="val 10769"/>
+              <a:gd name="adj" fmla="val 14000"/>
             </a:avLst>
           </a:prstGeom>
           <a:solidFill>
@@ -5855,13 +5511,13 @@
       </p:sp>
       <p:sp>
         <p:nvSpPr>
-          <p:cNvPr id="15" name="POV 2 terminal dot 1"/>
+          <p:cNvPr id="8" name="Terminal dot 1"/>
           <p:cNvSpPr/>
           <p:nvPr/>
         </p:nvSpPr>
         <p:spPr>
           <a:xfrm>
-            <a:off x="6446520" y="2212848"/>
+            <a:off x="749808" y="5413248"/>
             <a:ext cx="118872" cy="118872"/>
           </a:xfrm>
           <a:prstGeom prst="ellipse">
@@ -5880,13 +5536,13 @@
       </p:sp>
       <p:sp>
         <p:nvSpPr>
-          <p:cNvPr id="16" name="POV 2 terminal dot 2"/>
+          <p:cNvPr id="9" name="Terminal dot 2"/>
           <p:cNvSpPr/>
           <p:nvPr/>
         </p:nvSpPr>
         <p:spPr>
           <a:xfrm>
-            <a:off x="6647688" y="2212848"/>
+            <a:off x="950976" y="5413248"/>
             <a:ext cx="118872" cy="118872"/>
           </a:xfrm>
           <a:prstGeom prst="ellipse">
@@ -5905,13 +5561,13 @@
       </p:sp>
       <p:sp>
         <p:nvSpPr>
-          <p:cNvPr id="17" name="POV 2 terminal dot 3"/>
+          <p:cNvPr id="10" name="Terminal dot 3"/>
           <p:cNvSpPr/>
           <p:nvPr/>
         </p:nvSpPr>
         <p:spPr>
           <a:xfrm>
-            <a:off x="6848856" y="2212848"/>
+            <a:off x="1152144" y="5413248"/>
             <a:ext cx="118872" cy="118872"/>
           </a:xfrm>
           <a:prstGeom prst="ellipse">
@@ -5930,14 +5586,14 @@
       </p:sp>
       <p:sp>
         <p:nvSpPr>
-          <p:cNvPr id="18" name="POV 2 terminal label"/>
+          <p:cNvPr id="11" name="Terminal label"/>
           <p:cNvSpPr txBox="1"/>
           <p:nvPr/>
         </p:nvSpPr>
         <p:spPr>
           <a:xfrm>
-            <a:off x="7114032" y="2139696"/>
-            <a:ext cx="4297680" cy="256032"/>
+            <a:off x="1417320" y="5340096"/>
+            <a:ext cx="5760720" cy="256032"/>
           </a:xfrm>
           <a:prstGeom prst="rect">
             <a:avLst/>
@@ -5961,7 +5617,7 @@
                 <a:ea typeface="+mj-lt" pitchFamily="34" charset="-122"/>
                 <a:cs typeface="+mj-lt" pitchFamily="34" charset="-120"/>
               </a:rPr>
-              <a:t>terminal 3 · npm run buy</a:t>
+              <a:t>the program on Explorer</a:t>
             </a:r>
             <a:endParaRPr lang="en-US" sz="1000" dirty="0"/>
           </a:p>
@@ -5969,14 +5625,14 @@
       </p:sp>
       <p:sp>
         <p:nvSpPr>
-          <p:cNvPr id="19" name="POV 2 terminal text"/>
+          <p:cNvPr id="12" name="Terminal text"/>
           <p:cNvSpPr txBox="1"/>
           <p:nvPr/>
         </p:nvSpPr>
         <p:spPr>
           <a:xfrm>
-            <a:off x="6519672" y="2496312"/>
-            <a:ext cx="4892040" cy="640080"/>
+            <a:off x="822960" y="5696712"/>
+            <a:ext cx="6355080" cy="365760"/>
           </a:xfrm>
           <a:prstGeom prst="rect">
             <a:avLst/>
@@ -5990,7 +5646,7 @@
           <a:p>
             <a:pPr indent="0" marL="0">
               <a:lnSpc>
-                <a:spcPct val="115000"/>
+                <a:spcPct val="100000"/>
               </a:lnSpc>
               <a:buNone/>
             </a:pPr>
@@ -6003,56 +5659,348 @@
                 <a:ea typeface="+mj-lt" pitchFamily="34" charset="-122"/>
                 <a:cs typeface="+mj-lt" pitchFamily="34" charset="-120"/>
               </a:rPr>
-              <a:t>order      &lt;Explorer link&gt;</a:t>
+              <a:t>explorer.solana.com/address/TessSeP5QV5Bxpvm73iEefdsTjgtTEokKSx7jqFn1CQ?cluster=devnet</a:t>
             </a:r>
             <a:endParaRPr lang="en-US" sz="1200" dirty="0"/>
           </a:p>
-          <a:p>
-            <a:pPr indent="0" marL="0">
-              <a:lnSpc>
-                <a:spcPct val="115000"/>
-              </a:lnSpc>
-              <a:buNone/>
-            </a:pPr>
-            <a:r>
-              <a:rPr lang="en-US" sz="1200" dirty="0">
-                <a:solidFill>
-                  <a:schemeClr val="accent1"/>
+        </p:txBody>
+      </p:sp>
+      <p:sp>
+        <p:nvSpPr>
+          <p:cNvPr id="13" name="Where 1"/>
+          <p:cNvSpPr/>
+          <p:nvPr/>
+        </p:nvSpPr>
+        <p:spPr>
+          <a:xfrm>
+            <a:off x="7680960" y="1600200"/>
+            <a:ext cx="3959352" cy="1005840"/>
+          </a:xfrm>
+          <a:prstGeom prst="roundRect">
+            <a:avLst>
+              <a:gd name="adj" fmla="val 12727"/>
+            </a:avLst>
+          </a:prstGeom>
+          <a:solidFill>
+            <a:schemeClr val="tx2"/>
+          </a:solidFill>
+          <a:ln w="12700">
+            <a:solidFill>
+              <a:schemeClr val="accent2">
+                <a:alpha val="45000"/>
+              </a:schemeClr>
+            </a:solidFill>
+            <a:prstDash val="solid"/>
+          </a:ln>
+        </p:spPr>
+      </p:sp>
+      <p:sp>
+        <p:nvSpPr>
+          <p:cNvPr id="14" name="Icon chip"/>
+          <p:cNvSpPr/>
+          <p:nvPr/>
+        </p:nvSpPr>
+        <p:spPr>
+          <a:xfrm>
+            <a:off x="7836408" y="1819656"/>
+            <a:ext cx="548640" cy="548640"/>
+          </a:xfrm>
+          <a:prstGeom prst="ellipse">
+            <a:avLst/>
+          </a:prstGeom>
+          <a:solidFill>
+            <a:schemeClr val="accent1">
+              <a:alpha val="22000"/>
+            </a:schemeClr>
+          </a:solidFill>
+          <a:ln w="12700">
+            <a:solidFill>
+              <a:schemeClr val="accent1">
+                <a:alpha val="70000"/>
+              </a:schemeClr>
+            </a:solidFill>
+            <a:prstDash val="solid"/>
+          </a:ln>
+        </p:spPr>
+      </p:sp>
+      <p:pic>
+        <p:nvPicPr>
+          <p:cNvPr id="15" name="Icon" descr="preencoded.png">    </p:cNvPr>
+          <p:cNvPicPr>
+            <a:picLocks noChangeAspect="1"/>
+          </p:cNvPicPr>
+          <p:nvPr/>
+        </p:nvPicPr>
+        <p:blipFill>
+          <a:blip r:embed="rId2"/>
+          <a:stretch>
+            <a:fillRect/>
+          </a:stretch>
+        </p:blipFill>
+        <p:spPr>
+          <a:xfrm>
+            <a:off x="7973568" y="1956816"/>
+            <a:ext cx="274320" cy="274320"/>
+          </a:xfrm>
+          <a:prstGeom prst="rect">
+            <a:avLst/>
+          </a:prstGeom>
+        </p:spPr>
+      </p:pic>
+      <p:sp>
+        <p:nvSpPr>
+          <p:cNvPr id="16" name="Where 1 title"/>
+          <p:cNvSpPr txBox="1"/>
+          <p:nvPr/>
+        </p:nvSpPr>
+        <p:spPr>
+          <a:xfrm>
+            <a:off x="8522208" y="1709928"/>
+            <a:ext cx="3017520" cy="329184"/>
+          </a:xfrm>
+          <a:prstGeom prst="rect">
+            <a:avLst/>
+          </a:prstGeom>
+          <a:noFill/>
+          <a:ln/>
+        </p:spPr>
+        <p:txBody>
+          <a:bodyPr wrap="square" lIns="0" tIns="0" rIns="0" bIns="0" rtlCol="0" anchor="t"/>
+          <a:lstStyle/>
+          <a:p>
+            <a:pPr indent="0" marL="0">
+              <a:buNone/>
+            </a:pPr>
+            <a:r>
+              <a:rPr lang="en-US" sz="1400" b="1" dirty="0">
+                <a:solidFill>
+                  <a:schemeClr val="bg1"/>
                 </a:solidFill>
                 <a:latin typeface="+mj-lt" pitchFamily="34" charset="0"/>
                 <a:ea typeface="+mj-lt" pitchFamily="34" charset="-122"/>
                 <a:cs typeface="+mj-lt" pitchFamily="34" charset="-120"/>
               </a:rPr>
-              <a:t>hash check matches the hash committed on-chain</a:t>
-            </a:r>
-            <a:endParaRPr lang="en-US" sz="1200" dirty="0"/>
-          </a:p>
-        </p:txBody>
-      </p:sp>
-      <p:sp>
-        <p:nvSpPr>
-          <p:cNvPr id="20" name="POV 2 card"/>
+              <a:t>localhost:5173/#/network</a:t>
+            </a:r>
+            <a:endParaRPr lang="en-US" sz="1400" dirty="0"/>
+          </a:p>
+        </p:txBody>
+      </p:sp>
+      <p:sp>
+        <p:nvSpPr>
+          <p:cNvPr id="17" name="Where 1 body"/>
+          <p:cNvSpPr txBox="1"/>
+          <p:nvPr/>
+        </p:nvSpPr>
+        <p:spPr>
+          <a:xfrm>
+            <a:off x="8522208" y="2039112"/>
+            <a:ext cx="3017520" cy="530352"/>
+          </a:xfrm>
+          <a:prstGeom prst="rect">
+            <a:avLst/>
+          </a:prstGeom>
+          <a:noFill/>
+          <a:ln/>
+        </p:spPr>
+        <p:txBody>
+          <a:bodyPr wrap="square" lIns="0" tIns="0" rIns="0" bIns="0" rtlCol="0" anchor="t"/>
+          <a:lstStyle/>
+          <a:p>
+            <a:pPr indent="0" marL="0">
+              <a:buNone/>
+            </a:pPr>
+            <a:r>
+              <a:rPr lang="en-US" sz="1400" dirty="0">
+                <a:solidFill>
+                  <a:schemeClr val="bg2"/>
+                </a:solidFill>
+              </a:rPr>
+              <a:t>live graph + “on-chain, just now” feed. Click a row → Explorer.</a:t>
+            </a:r>
+            <a:endParaRPr lang="en-US" sz="1400" dirty="0"/>
+          </a:p>
+        </p:txBody>
+      </p:sp>
+      <p:sp>
+        <p:nvSpPr>
+          <p:cNvPr id="18" name="Where 2"/>
           <p:cNvSpPr/>
           <p:nvPr/>
         </p:nvSpPr>
         <p:spPr>
           <a:xfrm>
-            <a:off x="6245352" y="3474720"/>
-            <a:ext cx="5394960" cy="2377440"/>
+            <a:off x="7680960" y="2743200"/>
+            <a:ext cx="3959352" cy="1005840"/>
           </a:xfrm>
           <a:prstGeom prst="roundRect">
             <a:avLst>
-              <a:gd name="adj" fmla="val 5385"/>
+              <a:gd name="adj" fmla="val 12727"/>
             </a:avLst>
+          </a:prstGeom>
+          <a:solidFill>
+            <a:schemeClr val="tx2"/>
+          </a:solidFill>
+          <a:ln w="12700">
+            <a:solidFill>
+              <a:schemeClr val="accent2">
+                <a:alpha val="45000"/>
+              </a:schemeClr>
+            </a:solidFill>
+            <a:prstDash val="solid"/>
+          </a:ln>
+        </p:spPr>
+      </p:sp>
+      <p:sp>
+        <p:nvSpPr>
+          <p:cNvPr id="19" name="Icon chip"/>
+          <p:cNvSpPr/>
+          <p:nvPr/>
+        </p:nvSpPr>
+        <p:spPr>
+          <a:xfrm>
+            <a:off x="7836408" y="2962656"/>
+            <a:ext cx="548640" cy="548640"/>
+          </a:xfrm>
+          <a:prstGeom prst="ellipse">
+            <a:avLst/>
           </a:prstGeom>
           <a:solidFill>
             <a:schemeClr val="accent5">
-              <a:alpha val="16000"/>
+              <a:alpha val="22000"/>
             </a:schemeClr>
           </a:solidFill>
           <a:ln w="12700">
             <a:solidFill>
               <a:schemeClr val="accent5">
+                <a:alpha val="70000"/>
+              </a:schemeClr>
+            </a:solidFill>
+            <a:prstDash val="solid"/>
+          </a:ln>
+        </p:spPr>
+      </p:sp>
+      <p:pic>
+        <p:nvPicPr>
+          <p:cNvPr id="20" name="Icon" descr="preencoded.png">    </p:cNvPr>
+          <p:cNvPicPr>
+            <a:picLocks noChangeAspect="1"/>
+          </p:cNvPicPr>
+          <p:nvPr/>
+        </p:nvPicPr>
+        <p:blipFill>
+          <a:blip r:embed="rId3"/>
+          <a:stretch>
+            <a:fillRect/>
+          </a:stretch>
+        </p:blipFill>
+        <p:spPr>
+          <a:xfrm>
+            <a:off x="7973568" y="3099816"/>
+            <a:ext cx="274320" cy="274320"/>
+          </a:xfrm>
+          <a:prstGeom prst="rect">
+            <a:avLst/>
+          </a:prstGeom>
+        </p:spPr>
+      </p:pic>
+      <p:sp>
+        <p:nvSpPr>
+          <p:cNvPr id="21" name="Where 2 title"/>
+          <p:cNvSpPr txBox="1"/>
+          <p:nvPr/>
+        </p:nvSpPr>
+        <p:spPr>
+          <a:xfrm>
+            <a:off x="8522208" y="2852928"/>
+            <a:ext cx="3017520" cy="329184"/>
+          </a:xfrm>
+          <a:prstGeom prst="rect">
+            <a:avLst/>
+          </a:prstGeom>
+          <a:noFill/>
+          <a:ln/>
+        </p:spPr>
+        <p:txBody>
+          <a:bodyPr wrap="square" lIns="0" tIns="0" rIns="0" bIns="0" rtlCol="0" anchor="t"/>
+          <a:lstStyle/>
+          <a:p>
+            <a:pPr indent="0" marL="0">
+              <a:buNone/>
+            </a:pPr>
+            <a:r>
+              <a:rPr lang="en-US" sz="1400" b="1" dirty="0">
+                <a:solidFill>
+                  <a:schemeClr val="bg1"/>
+                </a:solidFill>
+                <a:latin typeface="+mj-lt" pitchFamily="34" charset="0"/>
+                <a:ea typeface="+mj-lt" pitchFamily="34" charset="-122"/>
+                <a:cs typeface="+mj-lt" pitchFamily="34" charset="-120"/>
+              </a:rPr>
+              <a:t>#/agents → pick one</a:t>
+            </a:r>
+            <a:endParaRPr lang="en-US" sz="1400" dirty="0"/>
+          </a:p>
+        </p:txBody>
+      </p:sp>
+      <p:sp>
+        <p:nvSpPr>
+          <p:cNvPr id="22" name="Where 2 body"/>
+          <p:cNvSpPr txBox="1"/>
+          <p:nvPr/>
+        </p:nvSpPr>
+        <p:spPr>
+          <a:xfrm>
+            <a:off x="8522208" y="3182112"/>
+            <a:ext cx="3017520" cy="530352"/>
+          </a:xfrm>
+          <a:prstGeom prst="rect">
+            <a:avLst/>
+          </a:prstGeom>
+          <a:noFill/>
+          <a:ln/>
+        </p:spPr>
+        <p:txBody>
+          <a:bodyPr wrap="square" lIns="0" tIns="0" rIns="0" bIns="0" rtlCol="0" anchor="t"/>
+          <a:lstStyle/>
+          <a:p>
+            <a:pPr indent="0" marL="0">
+              <a:buNone/>
+            </a:pPr>
+            <a:r>
+              <a:rPr lang="en-US" sz="1400" dirty="0">
+                <a:solidFill>
+                  <a:schemeClr val="bg2"/>
+                </a:solidFill>
+              </a:rPr>
+              <a:t>credit file: score cached on-chain vs recomputed in your browser</a:t>
+            </a:r>
+            <a:endParaRPr lang="en-US" sz="1400" dirty="0"/>
+          </a:p>
+        </p:txBody>
+      </p:sp>
+      <p:sp>
+        <p:nvSpPr>
+          <p:cNvPr id="23" name="Where 3"/>
+          <p:cNvSpPr/>
+          <p:nvPr/>
+        </p:nvSpPr>
+        <p:spPr>
+          <a:xfrm>
+            <a:off x="7680960" y="3886200"/>
+            <a:ext cx="3959352" cy="1005840"/>
+          </a:xfrm>
+          <a:prstGeom prst="roundRect">
+            <a:avLst>
+              <a:gd name="adj" fmla="val 12727"/>
+            </a:avLst>
+          </a:prstGeom>
+          <a:solidFill>
+            <a:schemeClr val="tx2"/>
+          </a:solidFill>
+          <a:ln w="12700">
+            <a:solidFill>
+              <a:schemeClr val="accent2">
                 <a:alpha val="45000"/>
               </a:schemeClr>
             </a:solidFill>
@@ -6062,14 +6010,67 @@
       </p:sp>
       <p:sp>
         <p:nvSpPr>
-          <p:cNvPr id="21" name="POV 2 list"/>
+          <p:cNvPr id="24" name="Icon chip"/>
+          <p:cNvSpPr/>
+          <p:nvPr/>
+        </p:nvSpPr>
+        <p:spPr>
+          <a:xfrm>
+            <a:off x="7836408" y="4105656"/>
+            <a:ext cx="548640" cy="548640"/>
+          </a:xfrm>
+          <a:prstGeom prst="ellipse">
+            <a:avLst/>
+          </a:prstGeom>
+          <a:solidFill>
+            <a:schemeClr val="accent2">
+              <a:alpha val="22000"/>
+            </a:schemeClr>
+          </a:solidFill>
+          <a:ln w="12700">
+            <a:solidFill>
+              <a:schemeClr val="accent2">
+                <a:alpha val="70000"/>
+              </a:schemeClr>
+            </a:solidFill>
+            <a:prstDash val="solid"/>
+          </a:ln>
+        </p:spPr>
+      </p:sp>
+      <p:pic>
+        <p:nvPicPr>
+          <p:cNvPr id="25" name="Icon" descr="preencoded.png">    </p:cNvPr>
+          <p:cNvPicPr>
+            <a:picLocks noChangeAspect="1"/>
+          </p:cNvPicPr>
+          <p:nvPr/>
+        </p:nvPicPr>
+        <p:blipFill>
+          <a:blip r:embed="rId4"/>
+          <a:stretch>
+            <a:fillRect/>
+          </a:stretch>
+        </p:blipFill>
+        <p:spPr>
+          <a:xfrm>
+            <a:off x="7973568" y="4242816"/>
+            <a:ext cx="274320" cy="274320"/>
+          </a:xfrm>
+          <a:prstGeom prst="rect">
+            <a:avLst/>
+          </a:prstGeom>
+        </p:spPr>
+      </p:pic>
+      <p:sp>
+        <p:nvSpPr>
+          <p:cNvPr id="26" name="Where 3 title"/>
           <p:cNvSpPr txBox="1"/>
           <p:nvPr/>
         </p:nvSpPr>
         <p:spPr>
           <a:xfrm>
-            <a:off x="6519672" y="3675888"/>
-            <a:ext cx="4892040" cy="2057400"/>
+            <a:off x="8522208" y="3995928"/>
+            <a:ext cx="3017520" cy="329184"/>
           </a:xfrm>
           <a:prstGeom prst="rect">
             <a:avLst/>
@@ -6081,58 +6082,214 @@
           <a:bodyPr wrap="square" lIns="0" tIns="0" rIns="0" bIns="0" rtlCol="0" anchor="t"/>
           <a:lstStyle/>
           <a:p>
-            <a:pPr marL="342900" indent="-342900">
-              <a:spcAft>
-                <a:spcPts val="1000"/>
-              </a:spcAft>
-              <a:buSzPct val="100000"/>
-              <a:buChar char="•"/>
-            </a:pPr>
-            <a:r>
-              <a:rPr lang="en-US" sz="1700" dirty="0">
+            <a:pPr indent="0" marL="0">
+              <a:buNone/>
+            </a:pPr>
+            <a:r>
+              <a:rPr lang="en-US" sz="1400" b="1" dirty="0">
                 <a:solidFill>
                   <a:schemeClr val="bg1"/>
                 </a:solidFill>
-              </a:rPr>
-              <a:t>Checkout steps tick ✓ in the browser</a:t>
-            </a:r>
-            <a:endParaRPr lang="en-US" sz="1700" dirty="0"/>
-          </a:p>
-          <a:p>
-            <a:pPr marL="342900" indent="-342900">
-              <a:spcAft>
-                <a:spcPts val="1000"/>
-              </a:spcAft>
-              <a:buSzPct val="100000"/>
-              <a:buChar char="•"/>
-            </a:pPr>
-            <a:r>
-              <a:rPr lang="en-US" sz="1700" dirty="0">
+                <a:latin typeface="+mj-lt" pitchFamily="34" charset="0"/>
+                <a:ea typeface="+mj-lt" pitchFamily="34" charset="-122"/>
+                <a:cs typeface="+mj-lt" pitchFamily="34" charset="-120"/>
+              </a:rPr>
+              <a:t>Solana Explorer (devnet)</a:t>
+            </a:r>
+            <a:endParaRPr lang="en-US" sz="1400" dirty="0"/>
+          </a:p>
+        </p:txBody>
+      </p:sp>
+      <p:sp>
+        <p:nvSpPr>
+          <p:cNvPr id="27" name="Where 3 body"/>
+          <p:cNvSpPr txBox="1"/>
+          <p:nvPr/>
+        </p:nvSpPr>
+        <p:spPr>
+          <a:xfrm>
+            <a:off x="8522208" y="4325112"/>
+            <a:ext cx="3017520" cy="530352"/>
+          </a:xfrm>
+          <a:prstGeom prst="rect">
+            <a:avLst/>
+          </a:prstGeom>
+          <a:noFill/>
+          <a:ln/>
+        </p:spPr>
+        <p:txBody>
+          <a:bodyPr wrap="square" lIns="0" tIns="0" rIns="0" bIns="0" rtlCol="0" anchor="t"/>
+          <a:lstStyle/>
+          <a:p>
+            <a:pPr indent="0" marL="0">
+              <a:buNone/>
+            </a:pPr>
+            <a:r>
+              <a:rPr lang="en-US" sz="1400" dirty="0">
+                <a:solidFill>
+                  <a:schemeClr val="bg2"/>
+                </a:solidFill>
+              </a:rPr>
+              <a:t>search any wallet or order. Solscan works too with ?cluster=devnet</a:t>
+            </a:r>
+            <a:endParaRPr lang="en-US" sz="1400" dirty="0"/>
+          </a:p>
+        </p:txBody>
+      </p:sp>
+      <p:sp>
+        <p:nvSpPr>
+          <p:cNvPr id="28" name="Where 4"/>
+          <p:cNvSpPr/>
+          <p:nvPr/>
+        </p:nvSpPr>
+        <p:spPr>
+          <a:xfrm>
+            <a:off x="7680960" y="5029200"/>
+            <a:ext cx="3959352" cy="1005840"/>
+          </a:xfrm>
+          <a:prstGeom prst="roundRect">
+            <a:avLst>
+              <a:gd name="adj" fmla="val 12727"/>
+            </a:avLst>
+          </a:prstGeom>
+          <a:solidFill>
+            <a:schemeClr val="tx2"/>
+          </a:solidFill>
+          <a:ln w="12700">
+            <a:solidFill>
+              <a:schemeClr val="accent2">
+                <a:alpha val="45000"/>
+              </a:schemeClr>
+            </a:solidFill>
+            <a:prstDash val="solid"/>
+          </a:ln>
+        </p:spPr>
+      </p:sp>
+      <p:sp>
+        <p:nvSpPr>
+          <p:cNvPr id="29" name="Icon chip"/>
+          <p:cNvSpPr/>
+          <p:nvPr/>
+        </p:nvSpPr>
+        <p:spPr>
+          <a:xfrm>
+            <a:off x="7836408" y="5248656"/>
+            <a:ext cx="548640" cy="548640"/>
+          </a:xfrm>
+          <a:prstGeom prst="ellipse">
+            <a:avLst/>
+          </a:prstGeom>
+          <a:solidFill>
+            <a:schemeClr val="accent3">
+              <a:alpha val="22000"/>
+            </a:schemeClr>
+          </a:solidFill>
+          <a:ln w="12700">
+            <a:solidFill>
+              <a:schemeClr val="accent3">
+                <a:alpha val="70000"/>
+              </a:schemeClr>
+            </a:solidFill>
+            <a:prstDash val="solid"/>
+          </a:ln>
+        </p:spPr>
+      </p:sp>
+      <p:pic>
+        <p:nvPicPr>
+          <p:cNvPr id="30" name="Icon" descr="preencoded.png">    </p:cNvPr>
+          <p:cNvPicPr>
+            <a:picLocks noChangeAspect="1"/>
+          </p:cNvPicPr>
+          <p:nvPr/>
+        </p:nvPicPr>
+        <p:blipFill>
+          <a:blip r:embed="rId5"/>
+          <a:stretch>
+            <a:fillRect/>
+          </a:stretch>
+        </p:blipFill>
+        <p:spPr>
+          <a:xfrm>
+            <a:off x="7973568" y="5385816"/>
+            <a:ext cx="274320" cy="274320"/>
+          </a:xfrm>
+          <a:prstGeom prst="rect">
+            <a:avLst/>
+          </a:prstGeom>
+        </p:spPr>
+      </p:pic>
+      <p:sp>
+        <p:nvSpPr>
+          <p:cNvPr id="31" name="Where 4 title"/>
+          <p:cNvSpPr txBox="1"/>
+          <p:nvPr/>
+        </p:nvSpPr>
+        <p:spPr>
+          <a:xfrm>
+            <a:off x="8522208" y="5138928"/>
+            <a:ext cx="3017520" cy="329184"/>
+          </a:xfrm>
+          <a:prstGeom prst="rect">
+            <a:avLst/>
+          </a:prstGeom>
+          <a:noFill/>
+          <a:ln/>
+        </p:spPr>
+        <p:txBody>
+          <a:bodyPr wrap="square" lIns="0" tIns="0" rIns="0" bIns="0" rtlCol="0" anchor="t"/>
+          <a:lstStyle/>
+          <a:p>
+            <a:pPr indent="0" marL="0">
+              <a:buNone/>
+            </a:pPr>
+            <a:r>
+              <a:rPr lang="en-US" sz="1400" b="1" dirty="0">
                 <a:solidFill>
                   <a:schemeClr val="bg1"/>
                 </a:solidFill>
-              </a:rPr>
-              <a:t>USDC moves wallet → vault → seller; every hop is on Explorer</a:t>
-            </a:r>
-            <a:endParaRPr lang="en-US" sz="1700" dirty="0"/>
-          </a:p>
-          <a:p>
-            <a:pPr marL="342900" indent="-342900">
-              <a:spcAft>
-                <a:spcPts val="1000"/>
-              </a:spcAft>
-              <a:buSzPct val="100000"/>
-              <a:buChar char="•"/>
-            </a:pPr>
-            <a:r>
-              <a:rPr lang="en-US" sz="1700" dirty="0">
-                <a:solidFill>
-                  <a:schemeClr val="bg1"/>
-                </a:solidFill>
-              </a:rPr>
-              <a:t>Your own credit file appears: New, then up as you trade</a:t>
-            </a:r>
-            <a:endParaRPr lang="en-US" sz="1700" dirty="0"/>
+                <a:latin typeface="+mj-lt" pitchFamily="34" charset="0"/>
+                <a:ea typeface="+mj-lt" pitchFamily="34" charset="-122"/>
+                <a:cs typeface="+mj-lt" pitchFamily="34" charset="-120"/>
+              </a:rPr>
+              <a:t>your terminal</a:t>
+            </a:r>
+            <a:endParaRPr lang="en-US" sz="1400" dirty="0"/>
+          </a:p>
+        </p:txBody>
+      </p:sp>
+      <p:sp>
+        <p:nvSpPr>
+          <p:cNvPr id="32" name="Where 4 body"/>
+          <p:cNvSpPr txBox="1"/>
+          <p:nvPr/>
+        </p:nvSpPr>
+        <p:spPr>
+          <a:xfrm>
+            <a:off x="8522208" y="5468112"/>
+            <a:ext cx="3017520" cy="530352"/>
+          </a:xfrm>
+          <a:prstGeom prst="rect">
+            <a:avLst/>
+          </a:prstGeom>
+          <a:noFill/>
+          <a:ln/>
+        </p:spPr>
+        <p:txBody>
+          <a:bodyPr wrap="square" lIns="0" tIns="0" rIns="0" bIns="0" rtlCol="0" anchor="t"/>
+          <a:lstStyle/>
+          <a:p>
+            <a:pPr indent="0" marL="0">
+              <a:buNone/>
+            </a:pPr>
+            <a:r>
+              <a:rPr lang="en-US" sz="1400" dirty="0">
+                <a:solidFill>
+                  <a:schemeClr val="bg2"/>
+                </a:solidFill>
+              </a:rPr>
+              <a:t>npm run buy prints the order and settle-tx links</a:t>
+            </a:r>
+            <a:endParaRPr lang="en-US" sz="1400" dirty="0"/>
           </a:p>
         </p:txBody>
       </p:sp>
@@ -6239,7 +6396,7 @@
                 <a:ea typeface="+mj-lt" pitchFamily="34" charset="-122"/>
                 <a:cs typeface="+mj-lt" pitchFamily="34" charset="-120"/>
               </a:rPr>
-              <a:t>// STEP 6 · OPTIONAL</a:t>
+              <a:t>// SAME ORDER, TWO SCREENS</a:t>
             </a:r>
             <a:endParaRPr lang="en-US" sz="1200" dirty="0"/>
           </a:p>
@@ -6277,7 +6434,7 @@
                   <a:schemeClr val="bg1"/>
                 </a:solidFill>
               </a:rPr>
-              <a:t>make it busy: the swarm 🐝</a:t>
+              <a:t>seller POV vs buyer POV 👀</a:t>
             </a:r>
             <a:endParaRPr lang="en-US" sz="3600" dirty="0"/>
           </a:p>
@@ -6285,18 +6442,57 @@
       </p:sp>
       <p:sp>
         <p:nvSpPr>
-          <p:cNvPr id="4" name="Terminal"/>
+          <p:cNvPr id="4" name="POV 1 heading"/>
+          <p:cNvSpPr txBox="1"/>
+          <p:nvPr/>
+        </p:nvSpPr>
+        <p:spPr>
+          <a:xfrm>
+            <a:off x="548640" y="1572768"/>
+            <a:ext cx="5394960" cy="384048"/>
+          </a:xfrm>
+          <a:prstGeom prst="rect">
+            <a:avLst/>
+          </a:prstGeom>
+          <a:noFill/>
+          <a:ln/>
+        </p:spPr>
+        <p:txBody>
+          <a:bodyPr wrap="square" lIns="0" tIns="0" rIns="0" bIns="0" rtlCol="0" anchor="t"/>
+          <a:lstStyle/>
+          <a:p>
+            <a:pPr indent="0" marL="0">
+              <a:buNone/>
+            </a:pPr>
+            <a:r>
+              <a:rPr lang="en-US" sz="1900" b="1" dirty="0">
+                <a:solidFill>
+                  <a:schemeClr val="accent4"/>
+                </a:solidFill>
+                <a:latin typeface="+mj-lt" pitchFamily="34" charset="0"/>
+                <a:ea typeface="+mj-lt" pitchFamily="34" charset="-122"/>
+                <a:cs typeface="+mj-lt" pitchFamily="34" charset="-120"/>
+              </a:rPr>
+              <a:t>SELLER SEES</a:t>
+            </a:r>
+            <a:endParaRPr lang="en-US" sz="1900" dirty="0"/>
+          </a:p>
+        </p:txBody>
+      </p:sp>
+      <p:sp>
+        <p:nvSpPr>
+          <p:cNvPr id="5" name="POV 1 terminal"/>
           <p:cNvSpPr/>
           <p:nvPr/>
         </p:nvSpPr>
         <p:spPr>
           <a:xfrm>
-            <a:off x="548640" y="1600200"/>
-            <a:ext cx="5669280" cy="1600200"/>
+            <a:off x="548640" y="2057400"/>
+            <a:ext cx="5394960" cy="1188720"/>
           </a:xfrm>
           <a:prstGeom prst="roundRect">
             <a:avLst>
-              <a:gd name="adj" fmla="val 8000"/>
+              <a:gd name="adj" fmla="val 10769"/>
             </a:avLst>
           </a:prstGeom>
           <a:solidFill>
@@ -6321,13 +6517,13 @@
       </p:sp>
       <p:sp>
         <p:nvSpPr>
-          <p:cNvPr id="5" name="Terminal dot 1"/>
+          <p:cNvPr id="6" name="POV 1 terminal dot 1"/>
           <p:cNvSpPr/>
           <p:nvPr/>
         </p:nvSpPr>
         <p:spPr>
           <a:xfrm>
-            <a:off x="749808" y="1755648"/>
+            <a:off x="749808" y="2212848"/>
             <a:ext cx="118872" cy="118872"/>
           </a:xfrm>
           <a:prstGeom prst="ellipse">
@@ -6346,13 +6542,13 @@
       </p:sp>
       <p:sp>
         <p:nvSpPr>
-          <p:cNvPr id="6" name="Terminal dot 2"/>
+          <p:cNvPr id="7" name="POV 1 terminal dot 2"/>
           <p:cNvSpPr/>
           <p:nvPr/>
         </p:nvSpPr>
         <p:spPr>
           <a:xfrm>
-            <a:off x="950976" y="1755648"/>
+            <a:off x="950976" y="2212848"/>
             <a:ext cx="118872" cy="118872"/>
           </a:xfrm>
           <a:prstGeom prst="ellipse">
@@ -6371,13 +6567,13 @@
       </p:sp>
       <p:sp>
         <p:nvSpPr>
-          <p:cNvPr id="7" name="Terminal dot 3"/>
+          <p:cNvPr id="8" name="POV 1 terminal dot 3"/>
           <p:cNvSpPr/>
           <p:nvPr/>
         </p:nvSpPr>
         <p:spPr>
           <a:xfrm>
-            <a:off x="1152144" y="1755648"/>
+            <a:off x="1152144" y="2212848"/>
             <a:ext cx="118872" cy="118872"/>
           </a:xfrm>
           <a:prstGeom prst="ellipse">
@@ -6396,14 +6592,14 @@
       </p:sp>
       <p:sp>
         <p:nvSpPr>
-          <p:cNvPr id="8" name="Terminal label"/>
+          <p:cNvPr id="9" name="POV 1 terminal label"/>
           <p:cNvSpPr txBox="1"/>
           <p:nvPr/>
         </p:nvSpPr>
         <p:spPr>
           <a:xfrm>
-            <a:off x="1417320" y="1682496"/>
-            <a:ext cx="4572000" cy="256032"/>
+            <a:off x="1417320" y="2139696"/>
+            <a:ext cx="4297680" cy="256032"/>
           </a:xfrm>
           <a:prstGeom prst="rect">
             <a:avLst/>
@@ -6427,7 +6623,7 @@
                 <a:ea typeface="+mj-lt" pitchFamily="34" charset="-122"/>
                 <a:cs typeface="+mj-lt" pitchFamily="34" charset="-120"/>
               </a:rPr>
-              <a:t>terminal 3</a:t>
+              <a:t>terminal 1 · seller logs</a:t>
             </a:r>
             <a:endParaRPr lang="en-US" sz="1000" dirty="0"/>
           </a:p>
@@ -6435,14 +6631,14 @@
       </p:sp>
       <p:sp>
         <p:nvSpPr>
-          <p:cNvPr id="9" name="Terminal text"/>
+          <p:cNvPr id="10" name="POV 1 terminal text"/>
           <p:cNvSpPr txBox="1"/>
           <p:nvPr/>
         </p:nvSpPr>
         <p:spPr>
           <a:xfrm>
-            <a:off x="822960" y="2039112"/>
-            <a:ext cx="5166360" cy="1051560"/>
+            <a:off x="822960" y="2496312"/>
+            <a:ext cx="4892040" cy="640080"/>
           </a:xfrm>
           <a:prstGeom prst="rect">
             <a:avLst/>
@@ -6461,17 +6657,17 @@
               <a:buNone/>
             </a:pPr>
             <a:r>
-              <a:rPr lang="en-US" sz="1600" b="1" dirty="0">
-                <a:solidFill>
-                  <a:schemeClr val="bg1"/>
+              <a:rPr lang="en-US" sz="1200" dirty="0">
+                <a:solidFill>
+                  <a:schemeClr val="accent1"/>
                 </a:solidFill>
                 <a:latin typeface="+mj-lt" pitchFamily="34" charset="0"/>
                 <a:ea typeface="+mj-lt" pitchFamily="34" charset="-122"/>
                 <a:cs typeface="+mj-lt" pitchFamily="34" charset="-120"/>
               </a:rPr>
-              <a:t>$ npm run swarm</a:t>
-            </a:r>
-            <a:endParaRPr lang="en-US" sz="1600" dirty="0"/>
+              <a:t>[crank] released &lt;order&gt; to atlas after a 120s hold</a:t>
+            </a:r>
+            <a:endParaRPr lang="en-US" sz="1200" dirty="0"/>
           </a:p>
           <a:p>
             <a:pPr indent="0" marL="0">
@@ -6481,7 +6677,7 @@
               <a:buNone/>
             </a:pPr>
             <a:r>
-              <a:rPr lang="en-US" sz="1600" dirty="0">
+              <a:rPr lang="en-US" sz="1200" dirty="0">
                 <a:solidFill>
                   <a:schemeClr val="bg2"/>
                 </a:solidFill>
@@ -6489,42 +6685,53 @@
                 <a:ea typeface="+mj-lt" pitchFamily="34" charset="-122"/>
                 <a:cs typeface="+mj-lt" pitchFamily="34" charset="-120"/>
               </a:rPr>
-              <a:t># keep npm run agents running</a:t>
-            </a:r>
-            <a:endParaRPr lang="en-US" sz="1600" dirty="0"/>
-          </a:p>
-          <a:p>
-            <a:pPr indent="0" marL="0">
-              <a:lnSpc>
-                <a:spcPct val="115000"/>
-              </a:lnSpc>
-              <a:buNone/>
-            </a:pPr>
-            <a:r>
-              <a:rPr lang="en-US" sz="1600" dirty="0">
-                <a:solidFill>
-                  <a:schemeClr val="bg2"/>
-                </a:solidFill>
-                <a:latin typeface="+mj-lt" pitchFamily="34" charset="0"/>
-                <a:ea typeface="+mj-lt" pitchFamily="34" charset="-122"/>
-                <a:cs typeface="+mj-lt" pitchFamily="34" charset="-120"/>
-              </a:rPr>
-              <a:t># 45 periods × 60 s ≈ 45 minutes</a:t>
-            </a:r>
-            <a:endParaRPr lang="en-US" sz="1600" dirty="0"/>
-          </a:p>
-        </p:txBody>
-      </p:sp>
-      <p:sp>
-        <p:nvSpPr>
-          <p:cNvPr id="10" name="Swarm list"/>
+              <a:t>[arbiter] &lt;order&gt;: delivery matches its hash</a:t>
+            </a:r>
+            <a:endParaRPr lang="en-US" sz="1200" dirty="0"/>
+          </a:p>
+        </p:txBody>
+      </p:sp>
+      <p:sp>
+        <p:nvSpPr>
+          <p:cNvPr id="11" name="POV 1 card"/>
+          <p:cNvSpPr/>
+          <p:nvPr/>
+        </p:nvSpPr>
+        <p:spPr>
+          <a:xfrm>
+            <a:off x="548640" y="3474720"/>
+            <a:ext cx="5394960" cy="2377440"/>
+          </a:xfrm>
+          <a:prstGeom prst="roundRect">
+            <a:avLst>
+              <a:gd name="adj" fmla="val 5385"/>
+            </a:avLst>
+          </a:prstGeom>
+          <a:solidFill>
+            <a:schemeClr val="accent4">
+              <a:alpha val="16000"/>
+            </a:schemeClr>
+          </a:solidFill>
+          <a:ln w="12700">
+            <a:solidFill>
+              <a:schemeClr val="accent4">
+                <a:alpha val="45000"/>
+              </a:schemeClr>
+            </a:solidFill>
+            <a:prstDash val="solid"/>
+          </a:ln>
+        </p:spPr>
+      </p:sp>
+      <p:sp>
+        <p:nvSpPr>
+          <p:cNvPr id="12" name="POV 1 list"/>
           <p:cNvSpPr txBox="1"/>
           <p:nvPr/>
         </p:nvSpPr>
         <p:spPr>
           <a:xfrm>
-            <a:off x="548640" y="3429000"/>
-            <a:ext cx="5669280" cy="2194560"/>
+            <a:off x="822960" y="3675888"/>
+            <a:ext cx="4892040" cy="2057400"/>
           </a:xfrm>
           <a:prstGeom prst="rect">
             <a:avLst/>
@@ -6549,7 +6756,7 @@
                   <a:schemeClr val="bg1"/>
                 </a:solidFill>
               </a:rPr>
-              <a:t>6 honest buyer agents trade every period</a:t>
+              <a:t>USDC arrives in the shop’s wallet (Explorer → token balances)</a:t>
             </a:r>
             <a:endParaRPr lang="en-US" sz="1700" dirty="0"/>
           </a:p>
@@ -6567,7 +6774,7 @@
                   <a:schemeClr val="bg1"/>
                 </a:solidFill>
               </a:rPr>
-              <a:t>Then the villains join: washer’s wash-trading ring, mallory the no-show, charlie the friendly-fraud disputer</a:t>
+              <a:t>1% goes to the treasury</a:t>
             </a:r>
             <a:endParaRPr lang="en-US" sz="1700" dirty="0"/>
           </a:p>
@@ -6585,7 +6792,7 @@
                   <a:schemeClr val="bg1"/>
                 </a:solidFill>
               </a:rPr>
-              <a:t>Watch tiers climb on #/network while the attackers stall or get penalised</a:t>
+              <a:t>Score and reviews update on the shop’s credit file</a:t>
             </a:r>
             <a:endParaRPr lang="en-US" sz="1700" dirty="0"/>
           </a:p>
@@ -6593,14 +6800,14 @@
       </p:sp>
       <p:sp>
         <p:nvSpPr>
-          <p:cNvPr id="11" name="Swarm warning"/>
+          <p:cNvPr id="13" name="POV 2 heading"/>
           <p:cNvSpPr txBox="1"/>
           <p:nvPr/>
         </p:nvSpPr>
         <p:spPr>
           <a:xfrm>
-            <a:off x="548640" y="5669280"/>
-            <a:ext cx="5669280" cy="457200"/>
+            <a:off x="6245352" y="1572768"/>
+            <a:ext cx="5394960" cy="384048"/>
           </a:xfrm>
           <a:prstGeom prst="rect">
             <a:avLst/>
@@ -6616,31 +6823,34 @@
               <a:buNone/>
             </a:pPr>
             <a:r>
-              <a:rPr lang="en-US" sz="1400" dirty="0">
-                <a:solidFill>
-                  <a:schemeClr val="accent3"/>
-                </a:solidFill>
-              </a:rPr>
-              <a:t>recording a video? don’t run the swarm at the same time: the public RPC rate-limits.</a:t>
-            </a:r>
-            <a:endParaRPr lang="en-US" sz="1400" dirty="0"/>
-          </a:p>
-        </p:txBody>
-      </p:sp>
-      <p:sp>
-        <p:nvSpPr>
-          <p:cNvPr id="12" name="Doge panel"/>
+              <a:rPr lang="en-US" sz="1900" b="1" dirty="0">
+                <a:solidFill>
+                  <a:schemeClr val="accent5"/>
+                </a:solidFill>
+                <a:latin typeface="+mj-lt" pitchFamily="34" charset="0"/>
+                <a:ea typeface="+mj-lt" pitchFamily="34" charset="-122"/>
+                <a:cs typeface="+mj-lt" pitchFamily="34" charset="-120"/>
+              </a:rPr>
+              <a:t>BUYER SEES</a:t>
+            </a:r>
+            <a:endParaRPr lang="en-US" sz="1900" dirty="0"/>
+          </a:p>
+        </p:txBody>
+      </p:sp>
+      <p:sp>
+        <p:nvSpPr>
+          <p:cNvPr id="14" name="POV 2 terminal"/>
           <p:cNvSpPr/>
           <p:nvPr/>
         </p:nvSpPr>
         <p:spPr>
           <a:xfrm>
-            <a:off x="6492240" y="1600200"/>
-            <a:ext cx="5148072" cy="4526280"/>
+            <a:off x="6245352" y="2057400"/>
+            <a:ext cx="5394960" cy="1188720"/>
           </a:xfrm>
           <a:prstGeom prst="roundRect">
             <a:avLst>
-              <a:gd name="adj" fmla="val 2828"/>
+              <a:gd name="adj" fmla="val 10769"/>
             </a:avLst>
           </a:prstGeom>
           <a:solidFill>
@@ -6665,14 +6875,89 @@
       </p:sp>
       <p:sp>
         <p:nvSpPr>
-          <p:cNvPr id="13" name="Doge emoji"/>
+          <p:cNvPr id="15" name="POV 2 terminal dot 1"/>
+          <p:cNvSpPr/>
+          <p:nvPr/>
+        </p:nvSpPr>
+        <p:spPr>
+          <a:xfrm>
+            <a:off x="6446520" y="2212848"/>
+            <a:ext cx="118872" cy="118872"/>
+          </a:xfrm>
+          <a:prstGeom prst="ellipse">
+            <a:avLst/>
+          </a:prstGeom>
+          <a:solidFill>
+            <a:schemeClr val="accent6"/>
+          </a:solidFill>
+          <a:ln w="12700">
+            <a:solidFill>
+              <a:schemeClr val="accent6"/>
+            </a:solidFill>
+            <a:prstDash val="solid"/>
+          </a:ln>
+        </p:spPr>
+      </p:sp>
+      <p:sp>
+        <p:nvSpPr>
+          <p:cNvPr id="16" name="POV 2 terminal dot 2"/>
+          <p:cNvSpPr/>
+          <p:nvPr/>
+        </p:nvSpPr>
+        <p:spPr>
+          <a:xfrm>
+            <a:off x="6647688" y="2212848"/>
+            <a:ext cx="118872" cy="118872"/>
+          </a:xfrm>
+          <a:prstGeom prst="ellipse">
+            <a:avLst/>
+          </a:prstGeom>
+          <a:solidFill>
+            <a:schemeClr val="accent3"/>
+          </a:solidFill>
+          <a:ln w="12700">
+            <a:solidFill>
+              <a:schemeClr val="accent3"/>
+            </a:solidFill>
+            <a:prstDash val="solid"/>
+          </a:ln>
+        </p:spPr>
+      </p:sp>
+      <p:sp>
+        <p:nvSpPr>
+          <p:cNvPr id="17" name="POV 2 terminal dot 3"/>
+          <p:cNvSpPr/>
+          <p:nvPr/>
+        </p:nvSpPr>
+        <p:spPr>
+          <a:xfrm>
+            <a:off x="6848856" y="2212848"/>
+            <a:ext cx="118872" cy="118872"/>
+          </a:xfrm>
+          <a:prstGeom prst="ellipse">
+            <a:avLst/>
+          </a:prstGeom>
+          <a:solidFill>
+            <a:schemeClr val="accent1"/>
+          </a:solidFill>
+          <a:ln w="12700">
+            <a:solidFill>
+              <a:schemeClr val="accent1"/>
+            </a:solidFill>
+            <a:prstDash val="solid"/>
+          </a:ln>
+        </p:spPr>
+      </p:sp>
+      <p:sp>
+        <p:nvSpPr>
+          <p:cNvPr id="18" name="POV 2 terminal label"/>
           <p:cNvSpPr txBox="1"/>
           <p:nvPr/>
         </p:nvSpPr>
         <p:spPr>
           <a:xfrm>
-            <a:off x="8183880" y="3063240"/>
-            <a:ext cx="1737360" cy="1463040"/>
+            <a:off x="7114032" y="2139696"/>
+            <a:ext cx="4297680" cy="256032"/>
           </a:xfrm>
           <a:prstGeom prst="rect">
             <a:avLst/>
@@ -6684,31 +6969,34 @@
           <a:bodyPr wrap="square" lIns="0" tIns="0" rIns="0" bIns="0" rtlCol="0" anchor="ctr"/>
           <a:lstStyle/>
           <a:p>
-            <a:pPr algn="ctr" indent="0" marL="0">
-              <a:buNone/>
-            </a:pPr>
-            <a:r>
-              <a:rPr lang="en-US" sz="8800" dirty="0">
-                <a:solidFill>
-                  <a:srgbClr val="000000"/>
-                </a:solidFill>
-              </a:rPr>
-              <a:t>🐕</a:t>
-            </a:r>
-            <a:endParaRPr lang="en-US" sz="8800" dirty="0"/>
-          </a:p>
-        </p:txBody>
-      </p:sp>
-      <p:sp>
-        <p:nvSpPr>
-          <p:cNvPr id="14" name="Doge 1"/>
+            <a:pPr indent="0" marL="0">
+              <a:buNone/>
+            </a:pPr>
+            <a:r>
+              <a:rPr lang="en-US" sz="1000" dirty="0">
+                <a:solidFill>
+                  <a:schemeClr val="bg2"/>
+                </a:solidFill>
+                <a:latin typeface="+mj-lt" pitchFamily="34" charset="0"/>
+                <a:ea typeface="+mj-lt" pitchFamily="34" charset="-122"/>
+                <a:cs typeface="+mj-lt" pitchFamily="34" charset="-120"/>
+              </a:rPr>
+              <a:t>terminal 3 · npm run buy</a:t>
+            </a:r>
+            <a:endParaRPr lang="en-US" sz="1000" dirty="0"/>
+          </a:p>
+        </p:txBody>
+      </p:sp>
+      <p:sp>
+        <p:nvSpPr>
+          <p:cNvPr id="19" name="POV 2 terminal text"/>
           <p:cNvSpPr txBox="1"/>
           <p:nvPr/>
         </p:nvSpPr>
         <p:spPr>
-          <a:xfrm rot="-480000">
-            <a:off x="6766560" y="1828800"/>
-            <a:ext cx="2377440" cy="594360"/>
+          <a:xfrm>
+            <a:off x="6519672" y="2496312"/>
+            <a:ext cx="4892040" cy="640080"/>
           </a:xfrm>
           <a:prstGeom prst="rect">
             <a:avLst/>
@@ -6721,30 +7009,87 @@
           <a:lstStyle/>
           <a:p>
             <a:pPr indent="0" marL="0">
-              <a:buNone/>
-            </a:pPr>
-            <a:r>
-              <a:rPr lang="en-US" sz="2800" b="1" dirty="0">
-                <a:solidFill>
-                  <a:schemeClr val="accent3"/>
-                </a:solidFill>
-              </a:rPr>
-              <a:t>such escrow</a:t>
-            </a:r>
-            <a:endParaRPr lang="en-US" sz="2800" dirty="0"/>
-          </a:p>
-        </p:txBody>
-      </p:sp>
-      <p:sp>
-        <p:nvSpPr>
-          <p:cNvPr id="15" name="Doge 2"/>
+              <a:lnSpc>
+                <a:spcPct val="115000"/>
+              </a:lnSpc>
+              <a:buNone/>
+            </a:pPr>
+            <a:r>
+              <a:rPr lang="en-US" sz="1200" dirty="0">
+                <a:solidFill>
+                  <a:schemeClr val="accent1"/>
+                </a:solidFill>
+                <a:latin typeface="+mj-lt" pitchFamily="34" charset="0"/>
+                <a:ea typeface="+mj-lt" pitchFamily="34" charset="-122"/>
+                <a:cs typeface="+mj-lt" pitchFamily="34" charset="-120"/>
+              </a:rPr>
+              <a:t>order      &lt;Explorer link&gt;</a:t>
+            </a:r>
+            <a:endParaRPr lang="en-US" sz="1200" dirty="0"/>
+          </a:p>
+          <a:p>
+            <a:pPr indent="0" marL="0">
+              <a:lnSpc>
+                <a:spcPct val="115000"/>
+              </a:lnSpc>
+              <a:buNone/>
+            </a:pPr>
+            <a:r>
+              <a:rPr lang="en-US" sz="1200" dirty="0">
+                <a:solidFill>
+                  <a:schemeClr val="accent1"/>
+                </a:solidFill>
+                <a:latin typeface="+mj-lt" pitchFamily="34" charset="0"/>
+                <a:ea typeface="+mj-lt" pitchFamily="34" charset="-122"/>
+                <a:cs typeface="+mj-lt" pitchFamily="34" charset="-120"/>
+              </a:rPr>
+              <a:t>hash check matches the hash committed on-chain</a:t>
+            </a:r>
+            <a:endParaRPr lang="en-US" sz="1200" dirty="0"/>
+          </a:p>
+        </p:txBody>
+      </p:sp>
+      <p:sp>
+        <p:nvSpPr>
+          <p:cNvPr id="20" name="POV 2 card"/>
+          <p:cNvSpPr/>
+          <p:nvPr/>
+        </p:nvSpPr>
+        <p:spPr>
+          <a:xfrm>
+            <a:off x="6245352" y="3474720"/>
+            <a:ext cx="5394960" cy="2377440"/>
+          </a:xfrm>
+          <a:prstGeom prst="roundRect">
+            <a:avLst>
+              <a:gd name="adj" fmla="val 5385"/>
+            </a:avLst>
+          </a:prstGeom>
+          <a:solidFill>
+            <a:schemeClr val="accent5">
+              <a:alpha val="16000"/>
+            </a:schemeClr>
+          </a:solidFill>
+          <a:ln w="12700">
+            <a:solidFill>
+              <a:schemeClr val="accent5">
+                <a:alpha val="45000"/>
+              </a:schemeClr>
+            </a:solidFill>
+            <a:prstDash val="solid"/>
+          </a:ln>
+        </p:spPr>
+      </p:sp>
+      <p:sp>
+        <p:nvSpPr>
+          <p:cNvPr id="21" name="POV 2 list"/>
           <p:cNvSpPr txBox="1"/>
           <p:nvPr/>
         </p:nvSpPr>
         <p:spPr>
-          <a:xfrm rot="360000">
-            <a:off x="9235440" y="2057400"/>
-            <a:ext cx="2377440" cy="594360"/>
+          <a:xfrm>
+            <a:off x="6519672" y="3675888"/>
+            <a:ext cx="4892040" cy="2057400"/>
           </a:xfrm>
           <a:prstGeom prst="rect">
             <a:avLst/>
@@ -6756,162 +7101,58 @@
           <a:bodyPr wrap="square" lIns="0" tIns="0" rIns="0" bIns="0" rtlCol="0" anchor="t"/>
           <a:lstStyle/>
           <a:p>
-            <a:pPr indent="0" marL="0">
-              <a:buNone/>
-            </a:pPr>
-            <a:r>
-              <a:rPr lang="en-US" sz="2400" b="1" dirty="0">
-                <a:solidFill>
-                  <a:schemeClr val="accent4"/>
-                </a:solidFill>
-              </a:rPr>
-              <a:t>very trust</a:t>
-            </a:r>
-            <a:endParaRPr lang="en-US" sz="2400" dirty="0"/>
-          </a:p>
-        </p:txBody>
-      </p:sp>
-      <p:sp>
-        <p:nvSpPr>
-          <p:cNvPr id="16" name="Doge 3"/>
-          <p:cNvSpPr txBox="1"/>
-          <p:nvPr/>
-        </p:nvSpPr>
-        <p:spPr>
-          <a:xfrm rot="-300000">
-            <a:off x="10241280" y="3291840"/>
-            <a:ext cx="2377440" cy="594360"/>
-          </a:xfrm>
-          <a:prstGeom prst="rect">
-            <a:avLst/>
-          </a:prstGeom>
-          <a:noFill/>
-          <a:ln/>
-        </p:spPr>
-        <p:txBody>
-          <a:bodyPr wrap="square" lIns="0" tIns="0" rIns="0" bIns="0" rtlCol="0" anchor="t"/>
-          <a:lstStyle/>
-          <a:p>
-            <a:pPr indent="0" marL="0">
-              <a:buNone/>
-            </a:pPr>
-            <a:r>
-              <a:rPr lang="en-US" sz="4000" b="1" dirty="0">
-                <a:solidFill>
-                  <a:schemeClr val="accent1"/>
-                </a:solidFill>
-              </a:rPr>
-              <a:t>wow</a:t>
-            </a:r>
-            <a:endParaRPr lang="en-US" sz="4000" dirty="0"/>
-          </a:p>
-        </p:txBody>
-      </p:sp>
-      <p:sp>
-        <p:nvSpPr>
-          <p:cNvPr id="17" name="Doge 4"/>
-          <p:cNvSpPr txBox="1"/>
-          <p:nvPr/>
-        </p:nvSpPr>
-        <p:spPr>
-          <a:xfrm rot="300000">
-            <a:off x="6720840" y="3429000"/>
-            <a:ext cx="2377440" cy="594360"/>
-          </a:xfrm>
-          <a:prstGeom prst="rect">
-            <a:avLst/>
-          </a:prstGeom>
-          <a:noFill/>
-          <a:ln/>
-        </p:spPr>
-        <p:txBody>
-          <a:bodyPr wrap="square" lIns="0" tIns="0" rIns="0" bIns="0" rtlCol="0" anchor="t"/>
-          <a:lstStyle/>
-          <a:p>
-            <a:pPr indent="0" marL="0">
-              <a:buNone/>
-            </a:pPr>
-            <a:r>
-              <a:rPr lang="en-US" sz="2200" b="1" dirty="0">
-                <a:solidFill>
-                  <a:schemeClr val="accent5"/>
-                </a:solidFill>
-              </a:rPr>
-              <a:t>much hold</a:t>
-            </a:r>
-            <a:endParaRPr lang="en-US" sz="2200" dirty="0"/>
-          </a:p>
-        </p:txBody>
-      </p:sp>
-      <p:sp>
-        <p:nvSpPr>
-          <p:cNvPr id="18" name="Doge 5"/>
-          <p:cNvSpPr txBox="1"/>
-          <p:nvPr/>
-        </p:nvSpPr>
-        <p:spPr>
-          <a:xfrm rot="-360000">
-            <a:off x="6949440" y="4892040"/>
-            <a:ext cx="2377440" cy="594360"/>
-          </a:xfrm>
-          <a:prstGeom prst="rect">
-            <a:avLst/>
-          </a:prstGeom>
-          <a:noFill/>
-          <a:ln/>
-        </p:spPr>
-        <p:txBody>
-          <a:bodyPr wrap="square" lIns="0" tIns="0" rIns="0" bIns="0" rtlCol="0" anchor="t"/>
-          <a:lstStyle/>
-          <a:p>
-            <a:pPr indent="0" marL="0">
-              <a:buNone/>
-            </a:pPr>
-            <a:r>
-              <a:rPr lang="en-US" sz="2600" b="1" dirty="0">
-                <a:solidFill>
-                  <a:schemeClr val="accent2"/>
-                </a:solidFill>
-              </a:rPr>
-              <a:t>so on-chain</a:t>
-            </a:r>
-            <a:endParaRPr lang="en-US" sz="2600" dirty="0"/>
-          </a:p>
-        </p:txBody>
-      </p:sp>
-      <p:sp>
-        <p:nvSpPr>
-          <p:cNvPr id="19" name="Doge 6"/>
-          <p:cNvSpPr txBox="1"/>
-          <p:nvPr/>
-        </p:nvSpPr>
-        <p:spPr>
-          <a:xfrm rot="240000">
-            <a:off x="9418320" y="5166360"/>
-            <a:ext cx="2377440" cy="594360"/>
-          </a:xfrm>
-          <a:prstGeom prst="rect">
-            <a:avLst/>
-          </a:prstGeom>
-          <a:noFill/>
-          <a:ln/>
-        </p:spPr>
-        <p:txBody>
-          <a:bodyPr wrap="square" lIns="0" tIns="0" rIns="0" bIns="0" rtlCol="0" anchor="t"/>
-          <a:lstStyle/>
-          <a:p>
-            <a:pPr indent="0" marL="0">
-              <a:buNone/>
-            </a:pPr>
-            <a:r>
-              <a:rPr lang="en-US" sz="2000" b="1" dirty="0">
+            <a:pPr marL="342900" indent="-342900">
+              <a:spcAft>
+                <a:spcPts val="1000"/>
+              </a:spcAft>
+              <a:buSzPct val="100000"/>
+              <a:buChar char="•"/>
+            </a:pPr>
+            <a:r>
+              <a:rPr lang="en-US" sz="1700" dirty="0">
                 <a:solidFill>
                   <a:schemeClr val="bg1"/>
                 </a:solidFill>
               </a:rPr>
-              <a:t>many agent</a:t>
-            </a:r>
-            <a:endParaRPr lang="en-US" sz="2000" dirty="0"/>
+              <a:t>Checkout steps tick ✓ in the browser</a:t>
+            </a:r>
+            <a:endParaRPr lang="en-US" sz="1700" dirty="0"/>
+          </a:p>
+          <a:p>
+            <a:pPr marL="342900" indent="-342900">
+              <a:spcAft>
+                <a:spcPts val="1000"/>
+              </a:spcAft>
+              <a:buSzPct val="100000"/>
+              <a:buChar char="•"/>
+            </a:pPr>
+            <a:r>
+              <a:rPr lang="en-US" sz="1700" dirty="0">
+                <a:solidFill>
+                  <a:schemeClr val="bg1"/>
+                </a:solidFill>
+              </a:rPr>
+              <a:t>USDC moves wallet → vault → seller; every hop is on Explorer</a:t>
+            </a:r>
+            <a:endParaRPr lang="en-US" sz="1700" dirty="0"/>
+          </a:p>
+          <a:p>
+            <a:pPr marL="342900" indent="-342900">
+              <a:spcAft>
+                <a:spcPts val="1000"/>
+              </a:spcAft>
+              <a:buSzPct val="100000"/>
+              <a:buChar char="•"/>
+            </a:pPr>
+            <a:r>
+              <a:rPr lang="en-US" sz="1700" dirty="0">
+                <a:solidFill>
+                  <a:schemeClr val="bg1"/>
+                </a:solidFill>
+              </a:rPr>
+              <a:t>Your own credit file appears: New, then up as you trade</a:t>
+            </a:r>
+            <a:endParaRPr lang="en-US" sz="1700" dirty="0"/>
           </a:p>
         </p:txBody>
       </p:sp>
@@ -7018,7 +7259,7 @@
                 <a:ea typeface="+mj-lt" pitchFamily="34" charset="-122"/>
                 <a:cs typeface="+mj-lt" pitchFamily="34" charset="-120"/>
               </a:rPr>
-              <a:t>// OPTIONAL · SELLER AND BUYER ON DIFFERENT MACHINES</a:t>
+              <a:t>// STEP 6 · OPTIONAL</a:t>
             </a:r>
             <a:endParaRPr lang="en-US" sz="1200" dirty="0"/>
           </a:p>
@@ -7056,7 +7297,7 @@
                   <a:schemeClr val="bg1"/>
                 </a:solidFill>
               </a:rPr>
-              <a:t>two laptops? 💻 ↔ 💻</a:t>
+              <a:t>make it busy: the swarm 🐝</a:t>
             </a:r>
             <a:endParaRPr lang="en-US" sz="3600" dirty="0"/>
           </a:p>
@@ -7071,11 +7312,11 @@
         <p:spPr>
           <a:xfrm>
             <a:off x="548640" y="1600200"/>
-            <a:ext cx="5440680" cy="2011680"/>
+            <a:ext cx="5669280" cy="1600200"/>
           </a:xfrm>
           <a:prstGeom prst="roundRect">
             <a:avLst>
-              <a:gd name="adj" fmla="val 6364"/>
+              <a:gd name="adj" fmla="val 8000"/>
             </a:avLst>
           </a:prstGeom>
           <a:solidFill>
@@ -7182,7 +7423,7 @@
         <p:spPr>
           <a:xfrm>
             <a:off x="1417320" y="1682496"/>
-            <a:ext cx="4343400" cy="256032"/>
+            <a:ext cx="4572000" cy="256032"/>
           </a:xfrm>
           <a:prstGeom prst="rect">
             <a:avLst/>
@@ -7206,7 +7447,7 @@
                 <a:ea typeface="+mj-lt" pitchFamily="34" charset="-122"/>
                 <a:cs typeface="+mj-lt" pitchFamily="34" charset="-120"/>
               </a:rPr>
-              <a:t>seller laptop</a:t>
+              <a:t>terminal 3</a:t>
             </a:r>
             <a:endParaRPr lang="en-US" sz="1000" dirty="0"/>
           </a:p>
@@ -7221,7 +7462,7 @@
         <p:spPr>
           <a:xfrm>
             <a:off x="822960" y="2039112"/>
-            <a:ext cx="4937760" cy="1463040"/>
+            <a:ext cx="5166360" cy="1051560"/>
           </a:xfrm>
           <a:prstGeom prst="rect">
             <a:avLst/>
@@ -7240,17 +7481,17 @@
               <a:buNone/>
             </a:pPr>
             <a:r>
-              <a:rPr lang="en-US" sz="1300" dirty="0">
-                <a:solidFill>
-                  <a:schemeClr val="bg2"/>
+              <a:rPr lang="en-US" sz="1600" b="1" dirty="0">
+                <a:solidFill>
+                  <a:schemeClr val="bg1"/>
                 </a:solidFill>
                 <a:latin typeface="+mj-lt" pitchFamily="34" charset="0"/>
                 <a:ea typeface="+mj-lt" pitchFamily="34" charset="-122"/>
                 <a:cs typeface="+mj-lt" pitchFamily="34" charset="-120"/>
               </a:rPr>
-              <a:t># expose :4020 over HTTPS (any tunnel works)</a:t>
-            </a:r>
-            <a:endParaRPr lang="en-US" sz="1300" dirty="0"/>
+              <a:t>$ npm run swarm</a:t>
+            </a:r>
+            <a:endParaRPr lang="en-US" sz="1600" dirty="0"/>
           </a:p>
           <a:p>
             <a:pPr indent="0" marL="0">
@@ -7260,17 +7501,17 @@
               <a:buNone/>
             </a:pPr>
             <a:r>
-              <a:rPr lang="en-US" sz="1300" b="1" dirty="0">
-                <a:solidFill>
-                  <a:schemeClr val="bg1"/>
+              <a:rPr lang="en-US" sz="1600" dirty="0">
+                <a:solidFill>
+                  <a:schemeClr val="bg2"/>
                 </a:solidFill>
                 <a:latin typeface="+mj-lt" pitchFamily="34" charset="0"/>
                 <a:ea typeface="+mj-lt" pitchFamily="34" charset="-122"/>
                 <a:cs typeface="+mj-lt" pitchFamily="34" charset="-120"/>
               </a:rPr>
-              <a:t>$ cloudflared tunnel --url http://localhost:4020</a:t>
-            </a:r>
-            <a:endParaRPr lang="en-US" sz="1300" dirty="0"/>
+              <a:t># keep npm run agents running</a:t>
+            </a:r>
+            <a:endParaRPr lang="en-US" sz="1600" dirty="0"/>
           </a:p>
           <a:p>
             <a:pPr indent="0" marL="0">
@@ -7280,7 +7521,7 @@
               <a:buNone/>
             </a:pPr>
             <a:r>
-              <a:rPr lang="en-US" sz="1300" dirty="0">
+              <a:rPr lang="en-US" sz="1600" dirty="0">
                 <a:solidFill>
                   <a:schemeClr val="bg2"/>
                 </a:solidFill>
@@ -7288,46 +7529,138 @@
                 <a:ea typeface="+mj-lt" pitchFamily="34" charset="-122"/>
                 <a:cs typeface="+mj-lt" pitchFamily="34" charset="-120"/>
               </a:rPr>
-              <a:t># restart the shops with the public URL</a:t>
-            </a:r>
-            <a:endParaRPr lang="en-US" sz="1300" dirty="0"/>
-          </a:p>
-          <a:p>
-            <a:pPr indent="0" marL="0">
-              <a:lnSpc>
-                <a:spcPct val="115000"/>
-              </a:lnSpc>
-              <a:buNone/>
-            </a:pPr>
-            <a:r>
-              <a:rPr lang="en-US" sz="1300" b="1" dirty="0">
+              <a:t># 45 periods × 60 s ≈ 45 minutes</a:t>
+            </a:r>
+            <a:endParaRPr lang="en-US" sz="1600" dirty="0"/>
+          </a:p>
+        </p:txBody>
+      </p:sp>
+      <p:sp>
+        <p:nvSpPr>
+          <p:cNvPr id="10" name="Swarm list"/>
+          <p:cNvSpPr txBox="1"/>
+          <p:nvPr/>
+        </p:nvSpPr>
+        <p:spPr>
+          <a:xfrm>
+            <a:off x="548640" y="3429000"/>
+            <a:ext cx="5669280" cy="2194560"/>
+          </a:xfrm>
+          <a:prstGeom prst="rect">
+            <a:avLst/>
+          </a:prstGeom>
+          <a:noFill/>
+          <a:ln/>
+        </p:spPr>
+        <p:txBody>
+          <a:bodyPr wrap="square" lIns="0" tIns="0" rIns="0" bIns="0" rtlCol="0" anchor="t"/>
+          <a:lstStyle/>
+          <a:p>
+            <a:pPr marL="342900" indent="-342900">
+              <a:spcAft>
+                <a:spcPts val="1000"/>
+              </a:spcAft>
+              <a:buSzPct val="100000"/>
+              <a:buChar char="•"/>
+            </a:pPr>
+            <a:r>
+              <a:rPr lang="en-US" sz="1700" dirty="0">
                 <a:solidFill>
                   <a:schemeClr val="bg1"/>
                 </a:solidFill>
-                <a:latin typeface="+mj-lt" pitchFamily="34" charset="0"/>
-                <a:ea typeface="+mj-lt" pitchFamily="34" charset="-122"/>
-                <a:cs typeface="+mj-lt" pitchFamily="34" charset="-120"/>
-              </a:rPr>
-              <a:t>$ AGENT_HOST=https://&lt;tunnel&gt; npm run agents</a:t>
-            </a:r>
-            <a:endParaRPr lang="en-US" sz="1300" dirty="0"/>
-          </a:p>
-        </p:txBody>
-      </p:sp>
-      <p:sp>
-        <p:nvSpPr>
-          <p:cNvPr id="10" name="Terminal"/>
+              </a:rPr>
+              <a:t>6 honest buyer agents trade every period</a:t>
+            </a:r>
+            <a:endParaRPr lang="en-US" sz="1700" dirty="0"/>
+          </a:p>
+          <a:p>
+            <a:pPr marL="342900" indent="-342900">
+              <a:spcAft>
+                <a:spcPts val="1000"/>
+              </a:spcAft>
+              <a:buSzPct val="100000"/>
+              <a:buChar char="•"/>
+            </a:pPr>
+            <a:r>
+              <a:rPr lang="en-US" sz="1700" dirty="0">
+                <a:solidFill>
+                  <a:schemeClr val="bg1"/>
+                </a:solidFill>
+              </a:rPr>
+              <a:t>Then the villains join: washer’s wash-trading ring, mallory the no-show, charlie the friendly-fraud disputer</a:t>
+            </a:r>
+            <a:endParaRPr lang="en-US" sz="1700" dirty="0"/>
+          </a:p>
+          <a:p>
+            <a:pPr marL="342900" indent="-342900">
+              <a:spcAft>
+                <a:spcPts val="1000"/>
+              </a:spcAft>
+              <a:buSzPct val="100000"/>
+              <a:buChar char="•"/>
+            </a:pPr>
+            <a:r>
+              <a:rPr lang="en-US" sz="1700" dirty="0">
+                <a:solidFill>
+                  <a:schemeClr val="bg1"/>
+                </a:solidFill>
+              </a:rPr>
+              <a:t>Watch tiers climb on #/network while the attackers stall or get penalised</a:t>
+            </a:r>
+            <a:endParaRPr lang="en-US" sz="1700" dirty="0"/>
+          </a:p>
+        </p:txBody>
+      </p:sp>
+      <p:sp>
+        <p:nvSpPr>
+          <p:cNvPr id="11" name="Swarm warning"/>
+          <p:cNvSpPr txBox="1"/>
+          <p:nvPr/>
+        </p:nvSpPr>
+        <p:spPr>
+          <a:xfrm>
+            <a:off x="548640" y="5669280"/>
+            <a:ext cx="5669280" cy="457200"/>
+          </a:xfrm>
+          <a:prstGeom prst="rect">
+            <a:avLst/>
+          </a:prstGeom>
+          <a:noFill/>
+          <a:ln/>
+        </p:spPr>
+        <p:txBody>
+          <a:bodyPr wrap="square" lIns="0" tIns="0" rIns="0" bIns="0" rtlCol="0" anchor="t"/>
+          <a:lstStyle/>
+          <a:p>
+            <a:pPr indent="0" marL="0">
+              <a:buNone/>
+            </a:pPr>
+            <a:r>
+              <a:rPr lang="en-US" sz="1400" dirty="0">
+                <a:solidFill>
+                  <a:schemeClr val="accent3"/>
+                </a:solidFill>
+              </a:rPr>
+              <a:t>recording a video? don’t run the swarm at the same time: the public RPC rate-limits.</a:t>
+            </a:r>
+            <a:endParaRPr lang="en-US" sz="1400" dirty="0"/>
+          </a:p>
+        </p:txBody>
+      </p:sp>
+      <p:sp>
+        <p:nvSpPr>
+          <p:cNvPr id="12" name="Doge panel"/>
           <p:cNvSpPr/>
           <p:nvPr/>
         </p:nvSpPr>
         <p:spPr>
           <a:xfrm>
-            <a:off x="6199632" y="1600200"/>
-            <a:ext cx="5440680" cy="2011680"/>
+            <a:off x="6492240" y="1600200"/>
+            <a:ext cx="5148072" cy="4526280"/>
           </a:xfrm>
           <a:prstGeom prst="roundRect">
             <a:avLst>
-              <a:gd name="adj" fmla="val 6364"/>
+              <a:gd name="adj" fmla="val 2828"/>
             </a:avLst>
           </a:prstGeom>
           <a:solidFill>
@@ -7352,89 +7685,14 @@
       </p:sp>
       <p:sp>
         <p:nvSpPr>
-          <p:cNvPr id="11" name="Terminal dot 1"/>
-          <p:cNvSpPr/>
-          <p:nvPr/>
-        </p:nvSpPr>
-        <p:spPr>
-          <a:xfrm>
-            <a:off x="6400800" y="1755648"/>
-            <a:ext cx="118872" cy="118872"/>
-          </a:xfrm>
-          <a:prstGeom prst="ellipse">
-            <a:avLst/>
-          </a:prstGeom>
-          <a:solidFill>
-            <a:schemeClr val="accent6"/>
-          </a:solidFill>
-          <a:ln w="12700">
-            <a:solidFill>
-              <a:schemeClr val="accent6"/>
-            </a:solidFill>
-            <a:prstDash val="solid"/>
-          </a:ln>
-        </p:spPr>
-      </p:sp>
-      <p:sp>
-        <p:nvSpPr>
-          <p:cNvPr id="12" name="Terminal dot 2"/>
-          <p:cNvSpPr/>
-          <p:nvPr/>
-        </p:nvSpPr>
-        <p:spPr>
-          <a:xfrm>
-            <a:off x="6601968" y="1755648"/>
-            <a:ext cx="118872" cy="118872"/>
-          </a:xfrm>
-          <a:prstGeom prst="ellipse">
-            <a:avLst/>
-          </a:prstGeom>
-          <a:solidFill>
-            <a:schemeClr val="accent3"/>
-          </a:solidFill>
-          <a:ln w="12700">
-            <a:solidFill>
-              <a:schemeClr val="accent3"/>
-            </a:solidFill>
-            <a:prstDash val="solid"/>
-          </a:ln>
-        </p:spPr>
-      </p:sp>
-      <p:sp>
-        <p:nvSpPr>
-          <p:cNvPr id="13" name="Terminal dot 3"/>
-          <p:cNvSpPr/>
-          <p:nvPr/>
-        </p:nvSpPr>
-        <p:spPr>
-          <a:xfrm>
-            <a:off x="6803136" y="1755648"/>
-            <a:ext cx="118872" cy="118872"/>
-          </a:xfrm>
-          <a:prstGeom prst="ellipse">
-            <a:avLst/>
-          </a:prstGeom>
-          <a:solidFill>
-            <a:schemeClr val="accent1"/>
-          </a:solidFill>
-          <a:ln w="12700">
-            <a:solidFill>
-              <a:schemeClr val="accent1"/>
-            </a:solidFill>
-            <a:prstDash val="solid"/>
-          </a:ln>
-        </p:spPr>
-      </p:sp>
-      <p:sp>
-        <p:nvSpPr>
-          <p:cNvPr id="14" name="Terminal label"/>
+          <p:cNvPr id="13" name="Doge emoji"/>
           <p:cNvSpPr txBox="1"/>
           <p:nvPr/>
         </p:nvSpPr>
         <p:spPr>
           <a:xfrm>
-            <a:off x="7068312" y="1682496"/>
-            <a:ext cx="4343400" cy="256032"/>
+            <a:off x="8183880" y="3063240"/>
+            <a:ext cx="1737360" cy="1463040"/>
           </a:xfrm>
           <a:prstGeom prst="rect">
             <a:avLst/>
@@ -7446,34 +7704,31 @@
           <a:bodyPr wrap="square" lIns="0" tIns="0" rIns="0" bIns="0" rtlCol="0" anchor="ctr"/>
           <a:lstStyle/>
           <a:p>
-            <a:pPr indent="0" marL="0">
-              <a:buNone/>
-            </a:pPr>
-            <a:r>
-              <a:rPr lang="en-US" sz="1000" dirty="0">
-                <a:solidFill>
-                  <a:schemeClr val="bg2"/>
-                </a:solidFill>
-                <a:latin typeface="+mj-lt" pitchFamily="34" charset="0"/>
-                <a:ea typeface="+mj-lt" pitchFamily="34" charset="-122"/>
-                <a:cs typeface="+mj-lt" pitchFamily="34" charset="-120"/>
-              </a:rPr>
-              <a:t>buyer laptop</a:t>
-            </a:r>
-            <a:endParaRPr lang="en-US" sz="1000" dirty="0"/>
-          </a:p>
-        </p:txBody>
-      </p:sp>
-      <p:sp>
-        <p:nvSpPr>
-          <p:cNvPr id="15" name="Terminal text"/>
+            <a:pPr algn="ctr" indent="0" marL="0">
+              <a:buNone/>
+            </a:pPr>
+            <a:r>
+              <a:rPr lang="en-US" sz="8800" dirty="0">
+                <a:solidFill>
+                  <a:srgbClr val="000000"/>
+                </a:solidFill>
+              </a:rPr>
+              <a:t>🐕</a:t>
+            </a:r>
+            <a:endParaRPr lang="en-US" sz="8800" dirty="0"/>
+          </a:p>
+        </p:txBody>
+      </p:sp>
+      <p:sp>
+        <p:nvSpPr>
+          <p:cNvPr id="14" name="Doge 1"/>
           <p:cNvSpPr txBox="1"/>
           <p:nvPr/>
         </p:nvSpPr>
         <p:spPr>
-          <a:xfrm>
-            <a:off x="6473952" y="2039112"/>
-            <a:ext cx="4937760" cy="1463040"/>
+          <a:xfrm rot="-480000">
+            <a:off x="6766560" y="1828800"/>
+            <a:ext cx="2377440" cy="594360"/>
           </a:xfrm>
           <a:prstGeom prst="rect">
             <a:avLst/>
@@ -7486,246 +7741,197 @@
           <a:lstStyle/>
           <a:p>
             <a:pPr indent="0" marL="0">
-              <a:lnSpc>
-                <a:spcPct val="115000"/>
-              </a:lnSpc>
-              <a:buNone/>
-            </a:pPr>
-            <a:r>
-              <a:rPr lang="en-US" sz="1300" dirty="0">
-                <a:solidFill>
-                  <a:schemeClr val="bg2"/>
-                </a:solidFill>
-                <a:latin typeface="+mj-lt" pitchFamily="34" charset="0"/>
-                <a:ea typeface="+mj-lt" pitchFamily="34" charset="-122"/>
-                <a:cs typeface="+mj-lt" pitchFamily="34" charset="-120"/>
-              </a:rPr>
-              <a:t># after git clone + npm install</a:t>
-            </a:r>
-            <a:endParaRPr lang="en-US" sz="1300" dirty="0"/>
-          </a:p>
-          <a:p>
-            <a:pPr indent="0" marL="0">
-              <a:lnSpc>
-                <a:spcPct val="115000"/>
-              </a:lnSpc>
-              <a:buNone/>
-            </a:pPr>
-            <a:r>
-              <a:rPr lang="en-US" sz="1300" b="1" dirty="0">
+              <a:buNone/>
+            </a:pPr>
+            <a:r>
+              <a:rPr lang="en-US" sz="2800" b="1" dirty="0">
+                <a:solidFill>
+                  <a:schemeClr val="accent3"/>
+                </a:solidFill>
+              </a:rPr>
+              <a:t>such escrow</a:t>
+            </a:r>
+            <a:endParaRPr lang="en-US" sz="2800" dirty="0"/>
+          </a:p>
+        </p:txBody>
+      </p:sp>
+      <p:sp>
+        <p:nvSpPr>
+          <p:cNvPr id="15" name="Doge 2"/>
+          <p:cNvSpPr txBox="1"/>
+          <p:nvPr/>
+        </p:nvSpPr>
+        <p:spPr>
+          <a:xfrm rot="360000">
+            <a:off x="9235440" y="2057400"/>
+            <a:ext cx="2377440" cy="594360"/>
+          </a:xfrm>
+          <a:prstGeom prst="rect">
+            <a:avLst/>
+          </a:prstGeom>
+          <a:noFill/>
+          <a:ln/>
+        </p:spPr>
+        <p:txBody>
+          <a:bodyPr wrap="square" lIns="0" tIns="0" rIns="0" bIns="0" rtlCol="0" anchor="t"/>
+          <a:lstStyle/>
+          <a:p>
+            <a:pPr indent="0" marL="0">
+              <a:buNone/>
+            </a:pPr>
+            <a:r>
+              <a:rPr lang="en-US" sz="2400" b="1" dirty="0">
+                <a:solidFill>
+                  <a:schemeClr val="accent4"/>
+                </a:solidFill>
+              </a:rPr>
+              <a:t>very trust</a:t>
+            </a:r>
+            <a:endParaRPr lang="en-US" sz="2400" dirty="0"/>
+          </a:p>
+        </p:txBody>
+      </p:sp>
+      <p:sp>
+        <p:nvSpPr>
+          <p:cNvPr id="16" name="Doge 3"/>
+          <p:cNvSpPr txBox="1"/>
+          <p:nvPr/>
+        </p:nvSpPr>
+        <p:spPr>
+          <a:xfrm rot="-300000">
+            <a:off x="10241280" y="3291840"/>
+            <a:ext cx="2377440" cy="594360"/>
+          </a:xfrm>
+          <a:prstGeom prst="rect">
+            <a:avLst/>
+          </a:prstGeom>
+          <a:noFill/>
+          <a:ln/>
+        </p:spPr>
+        <p:txBody>
+          <a:bodyPr wrap="square" lIns="0" tIns="0" rIns="0" bIns="0" rtlCol="0" anchor="t"/>
+          <a:lstStyle/>
+          <a:p>
+            <a:pPr indent="0" marL="0">
+              <a:buNone/>
+            </a:pPr>
+            <a:r>
+              <a:rPr lang="en-US" sz="4000" b="1" dirty="0">
+                <a:solidFill>
+                  <a:schemeClr val="accent1"/>
+                </a:solidFill>
+              </a:rPr>
+              <a:t>wow</a:t>
+            </a:r>
+            <a:endParaRPr lang="en-US" sz="4000" dirty="0"/>
+          </a:p>
+        </p:txBody>
+      </p:sp>
+      <p:sp>
+        <p:nvSpPr>
+          <p:cNvPr id="17" name="Doge 4"/>
+          <p:cNvSpPr txBox="1"/>
+          <p:nvPr/>
+        </p:nvSpPr>
+        <p:spPr>
+          <a:xfrm rot="300000">
+            <a:off x="6720840" y="3429000"/>
+            <a:ext cx="2377440" cy="594360"/>
+          </a:xfrm>
+          <a:prstGeom prst="rect">
+            <a:avLst/>
+          </a:prstGeom>
+          <a:noFill/>
+          <a:ln/>
+        </p:spPr>
+        <p:txBody>
+          <a:bodyPr wrap="square" lIns="0" tIns="0" rIns="0" bIns="0" rtlCol="0" anchor="t"/>
+          <a:lstStyle/>
+          <a:p>
+            <a:pPr indent="0" marL="0">
+              <a:buNone/>
+            </a:pPr>
+            <a:r>
+              <a:rPr lang="en-US" sz="2200" b="1" dirty="0">
+                <a:solidFill>
+                  <a:schemeClr val="accent5"/>
+                </a:solidFill>
+              </a:rPr>
+              <a:t>much hold</a:t>
+            </a:r>
+            <a:endParaRPr lang="en-US" sz="2200" dirty="0"/>
+          </a:p>
+        </p:txBody>
+      </p:sp>
+      <p:sp>
+        <p:nvSpPr>
+          <p:cNvPr id="18" name="Doge 5"/>
+          <p:cNvSpPr txBox="1"/>
+          <p:nvPr/>
+        </p:nvSpPr>
+        <p:spPr>
+          <a:xfrm rot="-360000">
+            <a:off x="6949440" y="4892040"/>
+            <a:ext cx="2377440" cy="594360"/>
+          </a:xfrm>
+          <a:prstGeom prst="rect">
+            <a:avLst/>
+          </a:prstGeom>
+          <a:noFill/>
+          <a:ln/>
+        </p:spPr>
+        <p:txBody>
+          <a:bodyPr wrap="square" lIns="0" tIns="0" rIns="0" bIns="0" rtlCol="0" anchor="t"/>
+          <a:lstStyle/>
+          <a:p>
+            <a:pPr indent="0" marL="0">
+              <a:buNone/>
+            </a:pPr>
+            <a:r>
+              <a:rPr lang="en-US" sz="2600" b="1" dirty="0">
+                <a:solidFill>
+                  <a:schemeClr val="accent2"/>
+                </a:solidFill>
+              </a:rPr>
+              <a:t>so on-chain</a:t>
+            </a:r>
+            <a:endParaRPr lang="en-US" sz="2600" dirty="0"/>
+          </a:p>
+        </p:txBody>
+      </p:sp>
+      <p:sp>
+        <p:nvSpPr>
+          <p:cNvPr id="19" name="Doge 6"/>
+          <p:cNvSpPr txBox="1"/>
+          <p:nvPr/>
+        </p:nvSpPr>
+        <p:spPr>
+          <a:xfrm rot="240000">
+            <a:off x="9418320" y="5166360"/>
+            <a:ext cx="2377440" cy="594360"/>
+          </a:xfrm>
+          <a:prstGeom prst="rect">
+            <a:avLst/>
+          </a:prstGeom>
+          <a:noFill/>
+          <a:ln/>
+        </p:spPr>
+        <p:txBody>
+          <a:bodyPr wrap="square" lIns="0" tIns="0" rIns="0" bIns="0" rtlCol="0" anchor="t"/>
+          <a:lstStyle/>
+          <a:p>
+            <a:pPr indent="0" marL="0">
+              <a:buNone/>
+            </a:pPr>
+            <a:r>
+              <a:rPr lang="en-US" sz="2000" b="1" dirty="0">
                 <a:solidFill>
                   <a:schemeClr val="bg1"/>
                 </a:solidFill>
-                <a:latin typeface="+mj-lt" pitchFamily="34" charset="0"/>
-                <a:ea typeface="+mj-lt" pitchFamily="34" charset="-122"/>
-                <a:cs typeface="+mj-lt" pitchFamily="34" charset="-120"/>
-              </a:rPr>
-              <a:t>$ VITE_AGENTS_URL=https://&lt;tunnel&gt; npm run web</a:t>
-            </a:r>
-            <a:endParaRPr lang="en-US" sz="1300" dirty="0"/>
-          </a:p>
-          <a:p>
-            <a:pPr indent="0" marL="0">
-              <a:lnSpc>
-                <a:spcPct val="115000"/>
-              </a:lnSpc>
-              <a:buNone/>
-            </a:pPr>
-            <a:r>
-              <a:rPr lang="en-US" sz="1300" dirty="0">
-                <a:solidFill>
-                  <a:schemeClr val="accent1"/>
-                </a:solidFill>
-                <a:latin typeface="+mj-lt" pitchFamily="34" charset="0"/>
-                <a:ea typeface="+mj-lt" pitchFamily="34" charset="-122"/>
-                <a:cs typeface="+mj-lt" pitchFamily="34" charset="-120"/>
-              </a:rPr>
-              <a:t>→ http://localhost:5173/#/market</a:t>
-            </a:r>
-            <a:endParaRPr lang="en-US" sz="1300" dirty="0"/>
-          </a:p>
-        </p:txBody>
-      </p:sp>
-      <p:sp>
-        <p:nvSpPr>
-          <p:cNvPr id="16" name="Note dot 1"/>
-          <p:cNvSpPr/>
-          <p:nvPr/>
-        </p:nvSpPr>
-        <p:spPr>
-          <a:xfrm>
-            <a:off x="594360" y="4133088"/>
-            <a:ext cx="182880" cy="182880"/>
-          </a:xfrm>
-          <a:prstGeom prst="ellipse">
-            <a:avLst/>
-          </a:prstGeom>
-          <a:solidFill>
-            <a:schemeClr val="accent1"/>
-          </a:solidFill>
-          <a:ln w="12700">
-            <a:solidFill>
-              <a:schemeClr val="accent1"/>
-            </a:solidFill>
-            <a:prstDash val="solid"/>
-          </a:ln>
-        </p:spPr>
-      </p:sp>
-      <p:sp>
-        <p:nvSpPr>
-          <p:cNvPr id="17" name="Note 1"/>
-          <p:cNvSpPr txBox="1"/>
-          <p:nvPr/>
-        </p:nvSpPr>
-        <p:spPr>
-          <a:xfrm>
-            <a:off x="960120" y="3977640"/>
-            <a:ext cx="10652760" cy="502920"/>
-          </a:xfrm>
-          <a:prstGeom prst="rect">
-            <a:avLst/>
-          </a:prstGeom>
-          <a:noFill/>
-          <a:ln/>
-        </p:spPr>
-        <p:txBody>
-          <a:bodyPr wrap="square" lIns="0" tIns="0" rIns="0" bIns="0" rtlCol="0" anchor="ctr"/>
-          <a:lstStyle/>
-          <a:p>
-            <a:pPr indent="0" marL="0">
-              <a:buNone/>
-            </a:pPr>
-            <a:r>
-              <a:rPr lang="en-US" sz="1600" dirty="0">
-                <a:solidFill>
-                  <a:schemeClr val="bg1"/>
-                </a:solidFill>
-              </a:rPr>
-              <a:t>Browser buyers can be anywhere. Agent buyers need keys from .keys/, so keep them on the seller’s laptop.</a:t>
-            </a:r>
-            <a:endParaRPr lang="en-US" sz="1600" dirty="0"/>
-          </a:p>
-        </p:txBody>
-      </p:sp>
-      <p:sp>
-        <p:nvSpPr>
-          <p:cNvPr id="18" name="Note dot 2"/>
-          <p:cNvSpPr/>
-          <p:nvPr/>
-        </p:nvSpPr>
-        <p:spPr>
-          <a:xfrm>
-            <a:off x="594360" y="4818888"/>
-            <a:ext cx="182880" cy="182880"/>
-          </a:xfrm>
-          <a:prstGeom prst="ellipse">
-            <a:avLst/>
-          </a:prstGeom>
-          <a:solidFill>
-            <a:schemeClr val="accent5"/>
-          </a:solidFill>
-          <a:ln w="12700">
-            <a:solidFill>
-              <a:schemeClr val="accent5"/>
-            </a:solidFill>
-            <a:prstDash val="solid"/>
-          </a:ln>
-        </p:spPr>
-      </p:sp>
-      <p:sp>
-        <p:nvSpPr>
-          <p:cNvPr id="19" name="Note 2"/>
-          <p:cNvSpPr txBox="1"/>
-          <p:nvPr/>
-        </p:nvSpPr>
-        <p:spPr>
-          <a:xfrm>
-            <a:off x="960120" y="4663440"/>
-            <a:ext cx="10652760" cy="502920"/>
-          </a:xfrm>
-          <a:prstGeom prst="rect">
-            <a:avLst/>
-          </a:prstGeom>
-          <a:noFill/>
-          <a:ln/>
-        </p:spPr>
-        <p:txBody>
-          <a:bodyPr wrap="square" lIns="0" tIns="0" rIns="0" bIns="0" rtlCol="0" anchor="ctr"/>
-          <a:lstStyle/>
-          <a:p>
-            <a:pPr indent="0" marL="0">
-              <a:buNone/>
-            </a:pPr>
-            <a:r>
-              <a:rPr lang="en-US" sz="1600" dirty="0">
-                <a:solidFill>
-                  <a:schemeClr val="bg1"/>
-                </a:solidFill>
-              </a:rPr>
-              <a:t>Hosting the site somewhere else? Allow its origin on the seller: WEB_ORIGINS=https://your.site,http://localhost:5173</a:t>
-            </a:r>
-            <a:endParaRPr lang="en-US" sz="1600" dirty="0"/>
-          </a:p>
-        </p:txBody>
-      </p:sp>
-      <p:sp>
-        <p:nvSpPr>
-          <p:cNvPr id="20" name="Note dot 3"/>
-          <p:cNvSpPr/>
-          <p:nvPr/>
-        </p:nvSpPr>
-        <p:spPr>
-          <a:xfrm>
-            <a:off x="594360" y="5504688"/>
-            <a:ext cx="182880" cy="182880"/>
-          </a:xfrm>
-          <a:prstGeom prst="ellipse">
-            <a:avLst/>
-          </a:prstGeom>
-          <a:solidFill>
-            <a:schemeClr val="accent3"/>
-          </a:solidFill>
-          <a:ln w="12700">
-            <a:solidFill>
-              <a:schemeClr val="accent3"/>
-            </a:solidFill>
-            <a:prstDash val="solid"/>
-          </a:ln>
-        </p:spPr>
-      </p:sp>
-      <p:sp>
-        <p:nvSpPr>
-          <p:cNvPr id="21" name="Note 3"/>
-          <p:cNvSpPr txBox="1"/>
-          <p:nvPr/>
-        </p:nvSpPr>
-        <p:spPr>
-          <a:xfrm>
-            <a:off x="960120" y="5349240"/>
-            <a:ext cx="10652760" cy="502920"/>
-          </a:xfrm>
-          <a:prstGeom prst="rect">
-            <a:avLst/>
-          </a:prstGeom>
-          <a:noFill/>
-          <a:ln/>
-        </p:spPr>
-        <p:txBody>
-          <a:bodyPr wrap="square" lIns="0" tIns="0" rIns="0" bIns="0" rtlCol="0" anchor="ctr"/>
-          <a:lstStyle/>
-          <a:p>
-            <a:pPr indent="0" marL="0">
-              <a:buNone/>
-            </a:pPr>
-            <a:r>
-              <a:rPr lang="en-US" sz="1600" dirty="0">
-                <a:solidFill>
-                  <a:schemeClr val="bg1"/>
-                </a:solidFill>
-              </a:rPr>
-              <a:t>Windows PowerShell: set variables first, e.g. $env:AGENT_HOST="https://…", then run npm run agents.</a:t>
-            </a:r>
-            <a:endParaRPr lang="en-US" sz="1600" dirty="0"/>
+              </a:rPr>
+              <a:t>many agent</a:t>
+            </a:r>
+            <a:endParaRPr lang="en-US" sz="2000" dirty="0"/>
           </a:p>
         </p:txBody>
       </p:sp>
@@ -7832,7 +8038,7 @@
                 <a:ea typeface="+mj-lt" pitchFamily="34" charset="-122"/>
                 <a:cs typeface="+mj-lt" pitchFamily="34" charset="-120"/>
               </a:rPr>
-              <a:t>// TROUBLESHOOTING</a:t>
+              <a:t>// OPTIONAL · SELLER AND BUYER ON DIFFERENT MACHINES</a:t>
             </a:r>
             <a:endParaRPr lang="en-US" sz="1200" dirty="0"/>
           </a:p>
@@ -7870,6 +8076,820 @@
                   <a:schemeClr val="bg1"/>
                 </a:solidFill>
               </a:rPr>
+              <a:t>two laptops? 💻 ↔ 💻</a:t>
+            </a:r>
+            <a:endParaRPr lang="en-US" sz="3600" dirty="0"/>
+          </a:p>
+        </p:txBody>
+      </p:sp>
+      <p:sp>
+        <p:nvSpPr>
+          <p:cNvPr id="4" name="Terminal"/>
+          <p:cNvSpPr/>
+          <p:nvPr/>
+        </p:nvSpPr>
+        <p:spPr>
+          <a:xfrm>
+            <a:off x="548640" y="1600200"/>
+            <a:ext cx="5440680" cy="2011680"/>
+          </a:xfrm>
+          <a:prstGeom prst="roundRect">
+            <a:avLst>
+              <a:gd name="adj" fmla="val 6364"/>
+            </a:avLst>
+          </a:prstGeom>
+          <a:solidFill>
+            <a:schemeClr val="tx2"/>
+          </a:solidFill>
+          <a:ln w="12700">
+            <a:solidFill>
+              <a:schemeClr val="accent2">
+                <a:alpha val="45000"/>
+              </a:schemeClr>
+            </a:solidFill>
+            <a:prstDash val="solid"/>
+          </a:ln>
+          <a:effectLst>
+            <a:outerShdw sx="100000" sy="100000" kx="0" ky="0" algn="bl" rotWithShape="0" blurRad="228600" dist="50800" dir="5400000">
+              <a:srgbClr val="9945FF">
+                <a:alpha val="35000"/>
+              </a:srgbClr>
+            </a:outerShdw>
+          </a:effectLst>
+        </p:spPr>
+      </p:sp>
+      <p:sp>
+        <p:nvSpPr>
+          <p:cNvPr id="5" name="Terminal dot 1"/>
+          <p:cNvSpPr/>
+          <p:nvPr/>
+        </p:nvSpPr>
+        <p:spPr>
+          <a:xfrm>
+            <a:off x="749808" y="1755648"/>
+            <a:ext cx="118872" cy="118872"/>
+          </a:xfrm>
+          <a:prstGeom prst="ellipse">
+            <a:avLst/>
+          </a:prstGeom>
+          <a:solidFill>
+            <a:schemeClr val="accent6"/>
+          </a:solidFill>
+          <a:ln w="12700">
+            <a:solidFill>
+              <a:schemeClr val="accent6"/>
+            </a:solidFill>
+            <a:prstDash val="solid"/>
+          </a:ln>
+        </p:spPr>
+      </p:sp>
+      <p:sp>
+        <p:nvSpPr>
+          <p:cNvPr id="6" name="Terminal dot 2"/>
+          <p:cNvSpPr/>
+          <p:nvPr/>
+        </p:nvSpPr>
+        <p:spPr>
+          <a:xfrm>
+            <a:off x="950976" y="1755648"/>
+            <a:ext cx="118872" cy="118872"/>
+          </a:xfrm>
+          <a:prstGeom prst="ellipse">
+            <a:avLst/>
+          </a:prstGeom>
+          <a:solidFill>
+            <a:schemeClr val="accent3"/>
+          </a:solidFill>
+          <a:ln w="12700">
+            <a:solidFill>
+              <a:schemeClr val="accent3"/>
+            </a:solidFill>
+            <a:prstDash val="solid"/>
+          </a:ln>
+        </p:spPr>
+      </p:sp>
+      <p:sp>
+        <p:nvSpPr>
+          <p:cNvPr id="7" name="Terminal dot 3"/>
+          <p:cNvSpPr/>
+          <p:nvPr/>
+        </p:nvSpPr>
+        <p:spPr>
+          <a:xfrm>
+            <a:off x="1152144" y="1755648"/>
+            <a:ext cx="118872" cy="118872"/>
+          </a:xfrm>
+          <a:prstGeom prst="ellipse">
+            <a:avLst/>
+          </a:prstGeom>
+          <a:solidFill>
+            <a:schemeClr val="accent1"/>
+          </a:solidFill>
+          <a:ln w="12700">
+            <a:solidFill>
+              <a:schemeClr val="accent1"/>
+            </a:solidFill>
+            <a:prstDash val="solid"/>
+          </a:ln>
+        </p:spPr>
+      </p:sp>
+      <p:sp>
+        <p:nvSpPr>
+          <p:cNvPr id="8" name="Terminal label"/>
+          <p:cNvSpPr txBox="1"/>
+          <p:nvPr/>
+        </p:nvSpPr>
+        <p:spPr>
+          <a:xfrm>
+            <a:off x="1417320" y="1682496"/>
+            <a:ext cx="4343400" cy="256032"/>
+          </a:xfrm>
+          <a:prstGeom prst="rect">
+            <a:avLst/>
+          </a:prstGeom>
+          <a:noFill/>
+          <a:ln/>
+        </p:spPr>
+        <p:txBody>
+          <a:bodyPr wrap="square" lIns="0" tIns="0" rIns="0" bIns="0" rtlCol="0" anchor="ctr"/>
+          <a:lstStyle/>
+          <a:p>
+            <a:pPr indent="0" marL="0">
+              <a:buNone/>
+            </a:pPr>
+            <a:r>
+              <a:rPr lang="en-US" sz="1000" dirty="0">
+                <a:solidFill>
+                  <a:schemeClr val="bg2"/>
+                </a:solidFill>
+                <a:latin typeface="+mj-lt" pitchFamily="34" charset="0"/>
+                <a:ea typeface="+mj-lt" pitchFamily="34" charset="-122"/>
+                <a:cs typeface="+mj-lt" pitchFamily="34" charset="-120"/>
+              </a:rPr>
+              <a:t>seller laptop</a:t>
+            </a:r>
+            <a:endParaRPr lang="en-US" sz="1000" dirty="0"/>
+          </a:p>
+        </p:txBody>
+      </p:sp>
+      <p:sp>
+        <p:nvSpPr>
+          <p:cNvPr id="9" name="Terminal text"/>
+          <p:cNvSpPr txBox="1"/>
+          <p:nvPr/>
+        </p:nvSpPr>
+        <p:spPr>
+          <a:xfrm>
+            <a:off x="822960" y="2039112"/>
+            <a:ext cx="4937760" cy="1463040"/>
+          </a:xfrm>
+          <a:prstGeom prst="rect">
+            <a:avLst/>
+          </a:prstGeom>
+          <a:noFill/>
+          <a:ln/>
+        </p:spPr>
+        <p:txBody>
+          <a:bodyPr wrap="square" lIns="0" tIns="0" rIns="0" bIns="0" rtlCol="0" anchor="t"/>
+          <a:lstStyle/>
+          <a:p>
+            <a:pPr indent="0" marL="0">
+              <a:lnSpc>
+                <a:spcPct val="115000"/>
+              </a:lnSpc>
+              <a:buNone/>
+            </a:pPr>
+            <a:r>
+              <a:rPr lang="en-US" sz="1300" dirty="0">
+                <a:solidFill>
+                  <a:schemeClr val="bg2"/>
+                </a:solidFill>
+                <a:latin typeface="+mj-lt" pitchFamily="34" charset="0"/>
+                <a:ea typeface="+mj-lt" pitchFamily="34" charset="-122"/>
+                <a:cs typeface="+mj-lt" pitchFamily="34" charset="-120"/>
+              </a:rPr>
+              <a:t># expose :4020 over HTTPS (any tunnel works)</a:t>
+            </a:r>
+            <a:endParaRPr lang="en-US" sz="1300" dirty="0"/>
+          </a:p>
+          <a:p>
+            <a:pPr indent="0" marL="0">
+              <a:lnSpc>
+                <a:spcPct val="115000"/>
+              </a:lnSpc>
+              <a:buNone/>
+            </a:pPr>
+            <a:r>
+              <a:rPr lang="en-US" sz="1300" b="1" dirty="0">
+                <a:solidFill>
+                  <a:schemeClr val="bg1"/>
+                </a:solidFill>
+                <a:latin typeface="+mj-lt" pitchFamily="34" charset="0"/>
+                <a:ea typeface="+mj-lt" pitchFamily="34" charset="-122"/>
+                <a:cs typeface="+mj-lt" pitchFamily="34" charset="-120"/>
+              </a:rPr>
+              <a:t>$ cloudflared tunnel --url http://localhost:4020</a:t>
+            </a:r>
+            <a:endParaRPr lang="en-US" sz="1300" dirty="0"/>
+          </a:p>
+          <a:p>
+            <a:pPr indent="0" marL="0">
+              <a:lnSpc>
+                <a:spcPct val="115000"/>
+              </a:lnSpc>
+              <a:buNone/>
+            </a:pPr>
+            <a:r>
+              <a:rPr lang="en-US" sz="1300" dirty="0">
+                <a:solidFill>
+                  <a:schemeClr val="bg2"/>
+                </a:solidFill>
+                <a:latin typeface="+mj-lt" pitchFamily="34" charset="0"/>
+                <a:ea typeface="+mj-lt" pitchFamily="34" charset="-122"/>
+                <a:cs typeface="+mj-lt" pitchFamily="34" charset="-120"/>
+              </a:rPr>
+              <a:t># restart the shops with the public URL</a:t>
+            </a:r>
+            <a:endParaRPr lang="en-US" sz="1300" dirty="0"/>
+          </a:p>
+          <a:p>
+            <a:pPr indent="0" marL="0">
+              <a:lnSpc>
+                <a:spcPct val="115000"/>
+              </a:lnSpc>
+              <a:buNone/>
+            </a:pPr>
+            <a:r>
+              <a:rPr lang="en-US" sz="1300" b="1" dirty="0">
+                <a:solidFill>
+                  <a:schemeClr val="bg1"/>
+                </a:solidFill>
+                <a:latin typeface="+mj-lt" pitchFamily="34" charset="0"/>
+                <a:ea typeface="+mj-lt" pitchFamily="34" charset="-122"/>
+                <a:cs typeface="+mj-lt" pitchFamily="34" charset="-120"/>
+              </a:rPr>
+              <a:t>$ AGENT_HOST=https://&lt;tunnel&gt; npm run agents</a:t>
+            </a:r>
+            <a:endParaRPr lang="en-US" sz="1300" dirty="0"/>
+          </a:p>
+        </p:txBody>
+      </p:sp>
+      <p:sp>
+        <p:nvSpPr>
+          <p:cNvPr id="10" name="Terminal"/>
+          <p:cNvSpPr/>
+          <p:nvPr/>
+        </p:nvSpPr>
+        <p:spPr>
+          <a:xfrm>
+            <a:off x="6199632" y="1600200"/>
+            <a:ext cx="5440680" cy="2011680"/>
+          </a:xfrm>
+          <a:prstGeom prst="roundRect">
+            <a:avLst>
+              <a:gd name="adj" fmla="val 6364"/>
+            </a:avLst>
+          </a:prstGeom>
+          <a:solidFill>
+            <a:schemeClr val="tx2"/>
+          </a:solidFill>
+          <a:ln w="12700">
+            <a:solidFill>
+              <a:schemeClr val="accent2">
+                <a:alpha val="45000"/>
+              </a:schemeClr>
+            </a:solidFill>
+            <a:prstDash val="solid"/>
+          </a:ln>
+          <a:effectLst>
+            <a:outerShdw sx="100000" sy="100000" kx="0" ky="0" algn="bl" rotWithShape="0" blurRad="228600" dist="50800" dir="5400000">
+              <a:srgbClr val="9945FF">
+                <a:alpha val="35000"/>
+              </a:srgbClr>
+            </a:outerShdw>
+          </a:effectLst>
+        </p:spPr>
+      </p:sp>
+      <p:sp>
+        <p:nvSpPr>
+          <p:cNvPr id="11" name="Terminal dot 1"/>
+          <p:cNvSpPr/>
+          <p:nvPr/>
+        </p:nvSpPr>
+        <p:spPr>
+          <a:xfrm>
+            <a:off x="6400800" y="1755648"/>
+            <a:ext cx="118872" cy="118872"/>
+          </a:xfrm>
+          <a:prstGeom prst="ellipse">
+            <a:avLst/>
+          </a:prstGeom>
+          <a:solidFill>
+            <a:schemeClr val="accent6"/>
+          </a:solidFill>
+          <a:ln w="12700">
+            <a:solidFill>
+              <a:schemeClr val="accent6"/>
+            </a:solidFill>
+            <a:prstDash val="solid"/>
+          </a:ln>
+        </p:spPr>
+      </p:sp>
+      <p:sp>
+        <p:nvSpPr>
+          <p:cNvPr id="12" name="Terminal dot 2"/>
+          <p:cNvSpPr/>
+          <p:nvPr/>
+        </p:nvSpPr>
+        <p:spPr>
+          <a:xfrm>
+            <a:off x="6601968" y="1755648"/>
+            <a:ext cx="118872" cy="118872"/>
+          </a:xfrm>
+          <a:prstGeom prst="ellipse">
+            <a:avLst/>
+          </a:prstGeom>
+          <a:solidFill>
+            <a:schemeClr val="accent3"/>
+          </a:solidFill>
+          <a:ln w="12700">
+            <a:solidFill>
+              <a:schemeClr val="accent3"/>
+            </a:solidFill>
+            <a:prstDash val="solid"/>
+          </a:ln>
+        </p:spPr>
+      </p:sp>
+      <p:sp>
+        <p:nvSpPr>
+          <p:cNvPr id="13" name="Terminal dot 3"/>
+          <p:cNvSpPr/>
+          <p:nvPr/>
+        </p:nvSpPr>
+        <p:spPr>
+          <a:xfrm>
+            <a:off x="6803136" y="1755648"/>
+            <a:ext cx="118872" cy="118872"/>
+          </a:xfrm>
+          <a:prstGeom prst="ellipse">
+            <a:avLst/>
+          </a:prstGeom>
+          <a:solidFill>
+            <a:schemeClr val="accent1"/>
+          </a:solidFill>
+          <a:ln w="12700">
+            <a:solidFill>
+              <a:schemeClr val="accent1"/>
+            </a:solidFill>
+            <a:prstDash val="solid"/>
+          </a:ln>
+        </p:spPr>
+      </p:sp>
+      <p:sp>
+        <p:nvSpPr>
+          <p:cNvPr id="14" name="Terminal label"/>
+          <p:cNvSpPr txBox="1"/>
+          <p:nvPr/>
+        </p:nvSpPr>
+        <p:spPr>
+          <a:xfrm>
+            <a:off x="7068312" y="1682496"/>
+            <a:ext cx="4343400" cy="256032"/>
+          </a:xfrm>
+          <a:prstGeom prst="rect">
+            <a:avLst/>
+          </a:prstGeom>
+          <a:noFill/>
+          <a:ln/>
+        </p:spPr>
+        <p:txBody>
+          <a:bodyPr wrap="square" lIns="0" tIns="0" rIns="0" bIns="0" rtlCol="0" anchor="ctr"/>
+          <a:lstStyle/>
+          <a:p>
+            <a:pPr indent="0" marL="0">
+              <a:buNone/>
+            </a:pPr>
+            <a:r>
+              <a:rPr lang="en-US" sz="1000" dirty="0">
+                <a:solidFill>
+                  <a:schemeClr val="bg2"/>
+                </a:solidFill>
+                <a:latin typeface="+mj-lt" pitchFamily="34" charset="0"/>
+                <a:ea typeface="+mj-lt" pitchFamily="34" charset="-122"/>
+                <a:cs typeface="+mj-lt" pitchFamily="34" charset="-120"/>
+              </a:rPr>
+              <a:t>buyer laptop</a:t>
+            </a:r>
+            <a:endParaRPr lang="en-US" sz="1000" dirty="0"/>
+          </a:p>
+        </p:txBody>
+      </p:sp>
+      <p:sp>
+        <p:nvSpPr>
+          <p:cNvPr id="15" name="Terminal text"/>
+          <p:cNvSpPr txBox="1"/>
+          <p:nvPr/>
+        </p:nvSpPr>
+        <p:spPr>
+          <a:xfrm>
+            <a:off x="6473952" y="2039112"/>
+            <a:ext cx="4937760" cy="1463040"/>
+          </a:xfrm>
+          <a:prstGeom prst="rect">
+            <a:avLst/>
+          </a:prstGeom>
+          <a:noFill/>
+          <a:ln/>
+        </p:spPr>
+        <p:txBody>
+          <a:bodyPr wrap="square" lIns="0" tIns="0" rIns="0" bIns="0" rtlCol="0" anchor="t"/>
+          <a:lstStyle/>
+          <a:p>
+            <a:pPr indent="0" marL="0">
+              <a:lnSpc>
+                <a:spcPct val="115000"/>
+              </a:lnSpc>
+              <a:buNone/>
+            </a:pPr>
+            <a:r>
+              <a:rPr lang="en-US" sz="1300" dirty="0">
+                <a:solidFill>
+                  <a:schemeClr val="bg2"/>
+                </a:solidFill>
+                <a:latin typeface="+mj-lt" pitchFamily="34" charset="0"/>
+                <a:ea typeface="+mj-lt" pitchFamily="34" charset="-122"/>
+                <a:cs typeface="+mj-lt" pitchFamily="34" charset="-120"/>
+              </a:rPr>
+              <a:t># after git clone + npm install</a:t>
+            </a:r>
+            <a:endParaRPr lang="en-US" sz="1300" dirty="0"/>
+          </a:p>
+          <a:p>
+            <a:pPr indent="0" marL="0">
+              <a:lnSpc>
+                <a:spcPct val="115000"/>
+              </a:lnSpc>
+              <a:buNone/>
+            </a:pPr>
+            <a:r>
+              <a:rPr lang="en-US" sz="1300" b="1" dirty="0">
+                <a:solidFill>
+                  <a:schemeClr val="bg1"/>
+                </a:solidFill>
+                <a:latin typeface="+mj-lt" pitchFamily="34" charset="0"/>
+                <a:ea typeface="+mj-lt" pitchFamily="34" charset="-122"/>
+                <a:cs typeface="+mj-lt" pitchFamily="34" charset="-120"/>
+              </a:rPr>
+              <a:t>$ VITE_AGENTS_URL=https://&lt;tunnel&gt; npm run web</a:t>
+            </a:r>
+            <a:endParaRPr lang="en-US" sz="1300" dirty="0"/>
+          </a:p>
+          <a:p>
+            <a:pPr indent="0" marL="0">
+              <a:lnSpc>
+                <a:spcPct val="115000"/>
+              </a:lnSpc>
+              <a:buNone/>
+            </a:pPr>
+            <a:r>
+              <a:rPr lang="en-US" sz="1300" dirty="0">
+                <a:solidFill>
+                  <a:schemeClr val="accent1"/>
+                </a:solidFill>
+                <a:latin typeface="+mj-lt" pitchFamily="34" charset="0"/>
+                <a:ea typeface="+mj-lt" pitchFamily="34" charset="-122"/>
+                <a:cs typeface="+mj-lt" pitchFamily="34" charset="-120"/>
+              </a:rPr>
+              <a:t>→ http://localhost:5173/#/market</a:t>
+            </a:r>
+            <a:endParaRPr lang="en-US" sz="1300" dirty="0"/>
+          </a:p>
+        </p:txBody>
+      </p:sp>
+      <p:sp>
+        <p:nvSpPr>
+          <p:cNvPr id="16" name="Note dot 1"/>
+          <p:cNvSpPr/>
+          <p:nvPr/>
+        </p:nvSpPr>
+        <p:spPr>
+          <a:xfrm>
+            <a:off x="594360" y="4133088"/>
+            <a:ext cx="182880" cy="182880"/>
+          </a:xfrm>
+          <a:prstGeom prst="ellipse">
+            <a:avLst/>
+          </a:prstGeom>
+          <a:solidFill>
+            <a:schemeClr val="accent1"/>
+          </a:solidFill>
+          <a:ln w="12700">
+            <a:solidFill>
+              <a:schemeClr val="accent1"/>
+            </a:solidFill>
+            <a:prstDash val="solid"/>
+          </a:ln>
+        </p:spPr>
+      </p:sp>
+      <p:sp>
+        <p:nvSpPr>
+          <p:cNvPr id="17" name="Note 1"/>
+          <p:cNvSpPr txBox="1"/>
+          <p:nvPr/>
+        </p:nvSpPr>
+        <p:spPr>
+          <a:xfrm>
+            <a:off x="960120" y="3977640"/>
+            <a:ext cx="10652760" cy="502920"/>
+          </a:xfrm>
+          <a:prstGeom prst="rect">
+            <a:avLst/>
+          </a:prstGeom>
+          <a:noFill/>
+          <a:ln/>
+        </p:spPr>
+        <p:txBody>
+          <a:bodyPr wrap="square" lIns="0" tIns="0" rIns="0" bIns="0" rtlCol="0" anchor="ctr"/>
+          <a:lstStyle/>
+          <a:p>
+            <a:pPr indent="0" marL="0">
+              <a:buNone/>
+            </a:pPr>
+            <a:r>
+              <a:rPr lang="en-US" sz="1600" dirty="0">
+                <a:solidFill>
+                  <a:schemeClr val="bg1"/>
+                </a:solidFill>
+              </a:rPr>
+              <a:t>Browser buyers can be anywhere. Agent buyers need keys from .keys/, so keep them on the seller’s laptop.</a:t>
+            </a:r>
+            <a:endParaRPr lang="en-US" sz="1600" dirty="0"/>
+          </a:p>
+        </p:txBody>
+      </p:sp>
+      <p:sp>
+        <p:nvSpPr>
+          <p:cNvPr id="18" name="Note dot 2"/>
+          <p:cNvSpPr/>
+          <p:nvPr/>
+        </p:nvSpPr>
+        <p:spPr>
+          <a:xfrm>
+            <a:off x="594360" y="4818888"/>
+            <a:ext cx="182880" cy="182880"/>
+          </a:xfrm>
+          <a:prstGeom prst="ellipse">
+            <a:avLst/>
+          </a:prstGeom>
+          <a:solidFill>
+            <a:schemeClr val="accent5"/>
+          </a:solidFill>
+          <a:ln w="12700">
+            <a:solidFill>
+              <a:schemeClr val="accent5"/>
+            </a:solidFill>
+            <a:prstDash val="solid"/>
+          </a:ln>
+        </p:spPr>
+      </p:sp>
+      <p:sp>
+        <p:nvSpPr>
+          <p:cNvPr id="19" name="Note 2"/>
+          <p:cNvSpPr txBox="1"/>
+          <p:nvPr/>
+        </p:nvSpPr>
+        <p:spPr>
+          <a:xfrm>
+            <a:off x="960120" y="4663440"/>
+            <a:ext cx="10652760" cy="502920"/>
+          </a:xfrm>
+          <a:prstGeom prst="rect">
+            <a:avLst/>
+          </a:prstGeom>
+          <a:noFill/>
+          <a:ln/>
+        </p:spPr>
+        <p:txBody>
+          <a:bodyPr wrap="square" lIns="0" tIns="0" rIns="0" bIns="0" rtlCol="0" anchor="ctr"/>
+          <a:lstStyle/>
+          <a:p>
+            <a:pPr indent="0" marL="0">
+              <a:buNone/>
+            </a:pPr>
+            <a:r>
+              <a:rPr lang="en-US" sz="1600" dirty="0">
+                <a:solidFill>
+                  <a:schemeClr val="bg1"/>
+                </a:solidFill>
+              </a:rPr>
+              <a:t>Hosting the site somewhere else? Allow its origin on the seller: WEB_ORIGINS=https://your.site,http://localhost:5173</a:t>
+            </a:r>
+            <a:endParaRPr lang="en-US" sz="1600" dirty="0"/>
+          </a:p>
+        </p:txBody>
+      </p:sp>
+      <p:sp>
+        <p:nvSpPr>
+          <p:cNvPr id="20" name="Note dot 3"/>
+          <p:cNvSpPr/>
+          <p:nvPr/>
+        </p:nvSpPr>
+        <p:spPr>
+          <a:xfrm>
+            <a:off x="594360" y="5504688"/>
+            <a:ext cx="182880" cy="182880"/>
+          </a:xfrm>
+          <a:prstGeom prst="ellipse">
+            <a:avLst/>
+          </a:prstGeom>
+          <a:solidFill>
+            <a:schemeClr val="accent3"/>
+          </a:solidFill>
+          <a:ln w="12700">
+            <a:solidFill>
+              <a:schemeClr val="accent3"/>
+            </a:solidFill>
+            <a:prstDash val="solid"/>
+          </a:ln>
+        </p:spPr>
+      </p:sp>
+      <p:sp>
+        <p:nvSpPr>
+          <p:cNvPr id="21" name="Note 3"/>
+          <p:cNvSpPr txBox="1"/>
+          <p:nvPr/>
+        </p:nvSpPr>
+        <p:spPr>
+          <a:xfrm>
+            <a:off x="960120" y="5349240"/>
+            <a:ext cx="10652760" cy="502920"/>
+          </a:xfrm>
+          <a:prstGeom prst="rect">
+            <a:avLst/>
+          </a:prstGeom>
+          <a:noFill/>
+          <a:ln/>
+        </p:spPr>
+        <p:txBody>
+          <a:bodyPr wrap="square" lIns="0" tIns="0" rIns="0" bIns="0" rtlCol="0" anchor="ctr"/>
+          <a:lstStyle/>
+          <a:p>
+            <a:pPr indent="0" marL="0">
+              <a:buNone/>
+            </a:pPr>
+            <a:r>
+              <a:rPr lang="en-US" sz="1600" dirty="0">
+                <a:solidFill>
+                  <a:schemeClr val="bg1"/>
+                </a:solidFill>
+              </a:rPr>
+              <a:t>Windows PowerShell: set variables first, e.g. $env:AGENT_HOST="https://…", then run npm run agents.</a:t>
+            </a:r>
+            <a:endParaRPr lang="en-US" sz="1600" dirty="0"/>
+          </a:p>
+        </p:txBody>
+      </p:sp>
+      <p:sp>
+        <p:nvSpPr>
+          <p:cNvPr id="25" name="Slide Number Placeholder 0"/>
+          <p:cNvSpPr>
+            <a:spLocks noGrp="1"/>
+          </p:cNvSpPr>
+          <p:nvPr>
+            <p:ph type="sldNum" sz="quarter" idx="4294967295"/>
+          </p:nvPr>
+        </p:nvSpPr>
+        <p:spPr>
+          <a:xfrm>
+            <a:off x="11091672" y="6419088"/>
+            <a:ext cx="548640" cy="274320"/>
+          </a:xfrm>
+          <a:prstGeom prst="rect">
+            <a:avLst/>
+          </a:prstGeom>
+          <a:extLst>
+            <a:ext uri="{C572A759-6A51-4108-AA02-DFA0A04FC94B}">
+              <ma14:wrappingTextBoxFlag xmlns:ma14="http://schemas.microsoft.com/office/mac/drawingml/2011/main" val="0"/>
+            </a:ext>
+          </a:extLst>
+        </p:spPr>
+        <p:txBody>
+          <a:bodyPr lIns="0" tIns="0" rIns="0" bIns="0"/>
+          <a:lstStyle>
+            <a:lvl1pPr>
+              <a:defRPr sz="1000">
+                <a:solidFill>
+                  <a:schemeClr val="bg2"/>
+                </a:solidFill>
+              </a:defRPr>
+            </a:lvl1pPr>
+          </a:lstStyle>
+          <a:p>
+            <a:pPr algn="r"/>
+            <a:fld id="{F7021451-1387-4CA6-816F-3879F97B5CBC}" type="slidenum">
+              <a:rPr b="0" lang="en-US"/>
+              <a:t>15</a:t>
+            </a:fld>
+            <a:endParaRPr lang="en-US"/>
+          </a:p>
+        </p:txBody>
+      </p:sp>
+    </p:spTree>
+  </p:cSld>
+  <p:clrMapOvr>
+    <a:masterClrMapping/>
+  </p:clrMapOvr>
+</p:sld>
+</file>
+
+<file path=ppt/slides/slide16.xml><?xml version="1.0" encoding="utf-8"?>
+<p:sld xmlns:a="http://schemas.openxmlformats.org/drawingml/2006/main" xmlns:r="http://schemas.openxmlformats.org/officeDocument/2006/relationships" xmlns:p="http://schemas.openxmlformats.org/presentationml/2006/main">
+  <p:cSld name="Slide 16">
+    <p:spTree>
+      <p:nvGrpSpPr>
+        <p:cNvPr id="1" name=""/>
+        <p:cNvGrpSpPr/>
+        <p:nvPr/>
+      </p:nvGrpSpPr>
+      <p:grpSpPr>
+        <a:xfrm>
+          <a:off x="0" y="0"/>
+          <a:ext cx="0" cy="0"/>
+          <a:chOff x="0" y="0"/>
+          <a:chExt cx="0" cy="0"/>
+        </a:xfrm>
+      </p:grpSpPr>
+      <p:sp>
+        <p:nvSpPr>
+          <p:cNvPr id="2" name="Kicker"/>
+          <p:cNvSpPr txBox="1"/>
+          <p:nvPr/>
+        </p:nvSpPr>
+        <p:spPr>
+          <a:xfrm>
+            <a:off x="548640" y="274320"/>
+            <a:ext cx="9144000" cy="274320"/>
+          </a:xfrm>
+          <a:prstGeom prst="rect">
+            <a:avLst/>
+          </a:prstGeom>
+          <a:noFill/>
+          <a:ln/>
+        </p:spPr>
+        <p:txBody>
+          <a:bodyPr wrap="square" lIns="0" tIns="0" rIns="0" bIns="0" rtlCol="0" anchor="ctr"/>
+          <a:lstStyle/>
+          <a:p>
+            <a:pPr indent="0" marL="0">
+              <a:buNone/>
+            </a:pPr>
+            <a:r>
+              <a:rPr lang="en-US" sz="1200" b="1" spc="200" kern="0" dirty="0">
+                <a:solidFill>
+                  <a:schemeClr val="accent1"/>
+                </a:solidFill>
+                <a:latin typeface="+mj-lt" pitchFamily="34" charset="0"/>
+                <a:ea typeface="+mj-lt" pitchFamily="34" charset="-122"/>
+                <a:cs typeface="+mj-lt" pitchFamily="34" charset="-120"/>
+              </a:rPr>
+              <a:t>// TROUBLESHOOTING</a:t>
+            </a:r>
+            <a:endParaRPr lang="en-US" sz="1200" dirty="0"/>
+          </a:p>
+        </p:txBody>
+      </p:sp>
+      <p:sp>
+        <p:nvSpPr>
+          <p:cNvPr id="3" name="Text 0"/>
+          <p:cNvSpPr/>
+          <p:nvPr>
+            <p:ph idx="100" type="title" hasCustomPrompt="1"/>
+          </p:nvPr>
+        </p:nvSpPr>
+        <p:spPr>
+          <a:xfrm>
+            <a:off x="548640" y="566928"/>
+            <a:ext cx="11064240" cy="731520"/>
+          </a:xfrm>
+          <a:prstGeom prst="rect">
+            <a:avLst/>
+          </a:prstGeom>
+          <a:noFill/>
+          <a:ln/>
+        </p:spPr>
+        <p:txBody>
+          <a:bodyPr wrap="square" lIns="0" tIns="0" rIns="0" bIns="0" rtlCol="0" anchor="t"/>
+          <a:lstStyle/>
+          <a:p>
+            <a:pPr algn="l" indent="0" marL="0">
+              <a:buNone/>
+            </a:pPr>
+            <a:r>
+              <a:rPr lang="en-US" sz="3600" b="1" dirty="0">
+                <a:solidFill>
+                  <a:schemeClr val="bg1"/>
+                </a:solidFill>
+              </a:rPr>
               <a:t>this is fine 🔥🐶</a:t>
             </a:r>
             <a:endParaRPr lang="en-US" sz="3600" dirty="0"/>
@@ -7878,7 +8898,7 @@
       </p:sp>
       <p:graphicFrame>
         <p:nvGraphicFramePr>
-          <p:cNvPr id="16" name="Troubleshooting table"/>
+          <p:cNvPr id="17" name="Troubleshooting table"/>
           <p:cNvGraphicFramePr>
             <a:graphicFrameLocks noGrp="1"/>
           </p:cNvGraphicFramePr>
@@ -8869,7 +9889,7 @@
             <a:pPr algn="r"/>
             <a:fld id="{F7021451-1387-4CA6-816F-3879F97B5CBC}" type="slidenum">
               <a:rPr b="0" lang="en-US"/>
-              <a:t>15</a:t>
+              <a:t>16</a:t>
             </a:fld>
             <a:endParaRPr lang="en-US"/>
           </a:p>
@@ -8883,9 +9903,9 @@
 </p:sld>
 </file>
 
-<file path=ppt/slides/slide16.xml><?xml version="1.0" encoding="utf-8"?>
+<file path=ppt/slides/slide17.xml><?xml version="1.0" encoding="utf-8"?>
 <p:sld xmlns:a="http://schemas.openxmlformats.org/drawingml/2006/main" xmlns:r="http://schemas.openxmlformats.org/officeDocument/2006/relationships" xmlns:p="http://schemas.openxmlformats.org/presentationml/2006/main">
-  <p:cSld name="Slide 16">
+  <p:cSld name="Slide 17">
     <p:spTree>
       <p:nvGrpSpPr>
         <p:cNvPr id="1" name=""/>
@@ -9024,11 +10044,11 @@
         <p:spPr>
           <a:xfrm>
             <a:off x="731520" y="2743200"/>
-            <a:ext cx="10725912" cy="2697480"/>
+            <a:ext cx="10725912" cy="3017520"/>
           </a:xfrm>
           <a:prstGeom prst="roundRect">
             <a:avLst>
-              <a:gd name="adj" fmla="val 4746"/>
+              <a:gd name="adj" fmla="val 4242"/>
             </a:avLst>
           </a:prstGeom>
           <a:solidFill>
@@ -9174,7 +10194,7 @@
         <p:spPr>
           <a:xfrm>
             <a:off x="1005840" y="3182112"/>
-            <a:ext cx="10222992" cy="2148840"/>
+            <a:ext cx="10222992" cy="2468880"/>
           </a:xfrm>
           <a:prstGeom prst="rect">
             <a:avLst/>
@@ -9302,6 +10322,46 @@
                 <a:cs typeface="+mj-lt" pitchFamily="34" charset="-120"/>
               </a:rPr>
               <a:t>$ npm run buy -w @tessera/agents -- --buyer scout --merchant atlas --mode x402</a:t>
+            </a:r>
+            <a:endParaRPr lang="en-US" sz="1400" dirty="0"/>
+          </a:p>
+          <a:p>
+            <a:pPr indent="0" marL="0">
+              <a:lnSpc>
+                <a:spcPct val="115000"/>
+              </a:lnSpc>
+              <a:buNone/>
+            </a:pPr>
+            <a:r>
+              <a:rPr lang="en-US" sz="1400" b="1" dirty="0">
+                <a:solidFill>
+                  <a:schemeClr val="bg1"/>
+                </a:solidFill>
+                <a:latin typeface="+mj-lt" pitchFamily="34" charset="0"/>
+                <a:ea typeface="+mj-lt" pitchFamily="34" charset="-122"/>
+                <a:cs typeface="+mj-lt" pitchFamily="34" charset="-120"/>
+              </a:rPr>
+              <a:t>$ npm run api                 # agents → :4030, then:</a:t>
+            </a:r>
+            <a:endParaRPr lang="en-US" sz="1400" dirty="0"/>
+          </a:p>
+          <a:p>
+            <a:pPr indent="0" marL="0">
+              <a:lnSpc>
+                <a:spcPct val="115000"/>
+              </a:lnSpc>
+              <a:buNone/>
+            </a:pPr>
+            <a:r>
+              <a:rPr lang="en-US" sz="1400" b="1" dirty="0">
+                <a:solidFill>
+                  <a:schemeClr val="bg1"/>
+                </a:solidFill>
+                <a:latin typeface="+mj-lt" pitchFamily="34" charset="0"/>
+                <a:ea typeface="+mj-lt" pitchFamily="34" charset="-122"/>
+                <a:cs typeface="+mj-lt" pitchFamily="34" charset="-120"/>
+              </a:rPr>
+              <a:t>$ npm run tessera -- find text summary   # who to buy from</a:t>
             </a:r>
             <a:endParaRPr lang="en-US" sz="1400" dirty="0"/>
           </a:p>
